--- a/slides/final/ucug1808_campus_gym_resistance_training.pptx
+++ b/slides/final/ucug1808_campus_gym_resistance_training.pptx
@@ -2371,7 +2371,7 @@
 </file>
 
 <file path=ppt/slides/slide10.xml><?xml version="1.0" encoding="utf-8"?>
-<p:sld xmlns:p="http://schemas.openxmlformats.org/presentationml/2006/main">
+<p:sld xmlns:a="http://schemas.openxmlformats.org/drawingml/2006/main" xmlns:ns2="http://schemas.microsoft.com/office/drawing/2014/main" xmlns:ns4="http://schemas.microsoft.com/office/powerpoint/2010/main" xmlns:p="http://schemas.openxmlformats.org/presentationml/2006/main" xmlns:r="http://schemas.openxmlformats.org/officeDocument/2006/relationships">
   <p:cSld>
     <p:spTree>
       <p:nvGrpSpPr>
@@ -2380,34 +2380,34 @@
         <p:nvPr/>
       </p:nvGrpSpPr>
       <p:grpSpPr>
-        <a:xfrm xmlns:a="http://schemas.openxmlformats.org/drawingml/2006/main"/>
+        <a:xfrm/>
       </p:grpSpPr>
       <p:sp>
         <p:nvSpPr>
           <p:cNvPr id="1" name="">
-            <a:extLst xmlns:a="http://schemas.openxmlformats.org/drawingml/2006/main">
-              <a:ext uri="{FF2B5EF4-FFF2-40B4-BE49-F238E27FC236}">
-                <a16:creationId xmlns:a16="http://schemas.microsoft.com/office/drawing/2014/main" id="{9224B669-0FD3-4ACE-8F0D-92A9A2E3109C}"/>
-              </a:ext>
-            </a:extLst>
-          </p:cNvPr>
-          <p:cNvSpPr>
-            <a:spLocks xmlns:a="http://schemas.openxmlformats.org/drawingml/2006/main" noGrp="1"/>
-          </p:cNvSpPr>
-          <p:nvPr/>
-        </p:nvSpPr>
-        <p:spPr>
-          <a:xfrm xmlns:a="http://schemas.openxmlformats.org/drawingml/2006/main">
+            <a:extLst>
+              <a:ext uri="{FF2B5EF4-FFF2-40B4-BE49-F238E27FC236}">
+                <ns2:creationId id="{9224B669-0FD3-4ACE-8F0D-92A9A2E3109C}"/>
+              </a:ext>
+            </a:extLst>
+          </p:cNvPr>
+          <p:cNvSpPr>
+            <a:spLocks noGrp="1"/>
+          </p:cNvSpPr>
+          <p:nvPr/>
+        </p:nvSpPr>
+        <p:spPr>
+          <a:xfrm>
             <a:off x="0" y="0"/>
             <a:ext cx="12192000" cy="6858000"/>
           </a:xfrm>
-          <a:prstGeom xmlns:a="http://schemas.openxmlformats.org/drawingml/2006/main" prst="rect">
-            <a:avLst/>
-          </a:prstGeom>
-          <a:solidFill xmlns:a="http://schemas.openxmlformats.org/drawingml/2006/main">
+          <a:prstGeom prst="rect">
+            <a:avLst/>
+          </a:prstGeom>
+          <a:solidFill>
             <a:srgbClr val="F7F2EA"/>
           </a:solidFill>
-          <a:ln xmlns:a="http://schemas.openxmlformats.org/drawingml/2006/main" w="0">
+          <a:ln w="0">
             <a:solidFill>
               <a:srgbClr val="000000">
                 <a:alpha val="0"/>
@@ -2420,29 +2420,29 @@
       <p:sp>
         <p:nvSpPr>
           <p:cNvPr id="2" name="kicker-10-marker">
-            <a:extLst xmlns:a="http://schemas.openxmlformats.org/drawingml/2006/main">
-              <a:ext uri="{FF2B5EF4-FFF2-40B4-BE49-F238E27FC236}">
-                <a16:creationId xmlns:a16="http://schemas.microsoft.com/office/drawing/2014/main" id="{52921D14-AB7D-4FE8-B214-6A59CB8598EA}"/>
-              </a:ext>
-            </a:extLst>
-          </p:cNvPr>
-          <p:cNvSpPr>
-            <a:spLocks xmlns:a="http://schemas.openxmlformats.org/drawingml/2006/main" noGrp="1"/>
-          </p:cNvSpPr>
-          <p:nvPr/>
-        </p:nvSpPr>
-        <p:spPr>
-          <a:xfrm xmlns:a="http://schemas.openxmlformats.org/drawingml/2006/main">
+            <a:extLst>
+              <a:ext uri="{FF2B5EF4-FFF2-40B4-BE49-F238E27FC236}">
+                <ns2:creationId id="{52921D14-AB7D-4FE8-B214-6A59CB8598EA}"/>
+              </a:ext>
+            </a:extLst>
+          </p:cNvPr>
+          <p:cNvSpPr>
+            <a:spLocks noGrp="1"/>
+          </p:cNvSpPr>
+          <p:nvPr/>
+        </p:nvSpPr>
+        <p:spPr>
+          <a:xfrm>
             <a:off x="609600" y="457200"/>
             <a:ext cx="95250" cy="95250"/>
           </a:xfrm>
-          <a:prstGeom xmlns:a="http://schemas.openxmlformats.org/drawingml/2006/main" prst="rect">
-            <a:avLst/>
-          </a:prstGeom>
-          <a:solidFill xmlns:a="http://schemas.openxmlformats.org/drawingml/2006/main">
+          <a:prstGeom prst="rect">
+            <a:avLst/>
+          </a:prstGeom>
+          <a:solidFill>
             <a:srgbClr val="B44B3F"/>
           </a:solidFill>
-          <a:ln xmlns:a="http://schemas.openxmlformats.org/drawingml/2006/main" w="0">
+          <a:ln w="0">
             <a:solidFill>
               <a:srgbClr val="000000">
                 <a:alpha val="0"/>
@@ -2455,43 +2455,43 @@
       <p:sp>
         <p:nvSpPr>
           <p:cNvPr id="3" name="kicker-10-label">
-            <a:extLst xmlns:a="http://schemas.openxmlformats.org/drawingml/2006/main">
-              <a:ext uri="{FF2B5EF4-FFF2-40B4-BE49-F238E27FC236}">
-                <a16:creationId xmlns:a16="http://schemas.microsoft.com/office/drawing/2014/main" id="{BCCFC12C-B2D3-474E-9A17-A4ED6A02EE50}"/>
-              </a:ext>
-            </a:extLst>
-          </p:cNvPr>
-          <p:cNvSpPr>
-            <a:spLocks xmlns:a="http://schemas.openxmlformats.org/drawingml/2006/main" noGrp="1"/>
-          </p:cNvSpPr>
-          <p:nvPr/>
-        </p:nvSpPr>
-        <p:spPr>
-          <a:xfrm xmlns:a="http://schemas.openxmlformats.org/drawingml/2006/main">
+            <a:extLst>
+              <a:ext uri="{FF2B5EF4-FFF2-40B4-BE49-F238E27FC236}">
+                <ns2:creationId id="{BCCFC12C-B2D3-474E-9A17-A4ED6A02EE50}"/>
+              </a:ext>
+            </a:extLst>
+          </p:cNvPr>
+          <p:cNvSpPr>
+            <a:spLocks noGrp="1"/>
+          </p:cNvSpPr>
+          <p:nvPr/>
+        </p:nvSpPr>
+        <p:spPr>
+          <a:xfrm>
             <a:off x="800100" y="371475"/>
             <a:ext cx="3429000" cy="266700"/>
           </a:xfrm>
-          <a:prstGeom xmlns:a="http://schemas.openxmlformats.org/drawingml/2006/main" prst="rect">
-            <a:avLst/>
-          </a:prstGeom>
-          <a:solidFill xmlns:a="http://schemas.openxmlformats.org/drawingml/2006/main">
-            <a:srgbClr val="000000">
-              <a:alpha val="0"/>
-            </a:srgbClr>
-          </a:solidFill>
-          <a:ln xmlns:a="http://schemas.openxmlformats.org/drawingml/2006/main" w="0">
-            <a:solidFill>
-              <a:srgbClr val="000000">
-                <a:alpha val="0"/>
-              </a:srgbClr>
-            </a:solidFill>
-            <a:prstDash val="solid"/>
-          </a:ln>
-        </p:spPr>
-        <p:txBody>
-          <a:bodyPr xmlns:a="http://schemas.openxmlformats.org/drawingml/2006/main" lIns="0" tIns="0" rIns="0" bIns="0" anchor="t"/>
-          <a:lstStyle xmlns:a="http://schemas.openxmlformats.org/drawingml/2006/main"/>
-          <a:p xmlns:a="http://schemas.openxmlformats.org/drawingml/2006/main">
+          <a:prstGeom prst="rect">
+            <a:avLst/>
+          </a:prstGeom>
+          <a:solidFill>
+            <a:srgbClr val="000000">
+              <a:alpha val="0"/>
+            </a:srgbClr>
+          </a:solidFill>
+          <a:ln w="0">
+            <a:solidFill>
+              <a:srgbClr val="000000">
+                <a:alpha val="0"/>
+              </a:srgbClr>
+            </a:solidFill>
+            <a:prstDash val="solid"/>
+          </a:ln>
+        </p:spPr>
+        <p:txBody>
+          <a:bodyPr lIns="0" tIns="0" rIns="0" bIns="0" anchor="t"/>
+          <a:lstStyle/>
+          <a:p>
             <a:pPr algn="l">
               <a:defRPr sz="1050" b="1">
                 <a:solidFill>
@@ -2519,43 +2519,43 @@
       <p:sp>
         <p:nvSpPr>
           <p:cNvPr id="4" name="">
-            <a:extLst xmlns:a="http://schemas.openxmlformats.org/drawingml/2006/main">
-              <a:ext uri="{FF2B5EF4-FFF2-40B4-BE49-F238E27FC236}">
-                <a16:creationId xmlns:a16="http://schemas.microsoft.com/office/drawing/2014/main" id="{72428B78-4857-4DC6-A2BB-B1093CB8882E}"/>
-              </a:ext>
-            </a:extLst>
-          </p:cNvPr>
-          <p:cNvSpPr>
-            <a:spLocks xmlns:a="http://schemas.openxmlformats.org/drawingml/2006/main" noGrp="1"/>
-          </p:cNvSpPr>
-          <p:nvPr/>
-        </p:nvSpPr>
-        <p:spPr>
-          <a:xfrm xmlns:a="http://schemas.openxmlformats.org/drawingml/2006/main">
+            <a:extLst>
+              <a:ext uri="{FF2B5EF4-FFF2-40B4-BE49-F238E27FC236}">
+                <ns2:creationId id="{72428B78-4857-4DC6-A2BB-B1093CB8882E}"/>
+              </a:ext>
+            </a:extLst>
+          </p:cNvPr>
+          <p:cNvSpPr>
+            <a:spLocks noGrp="1"/>
+          </p:cNvSpPr>
+          <p:nvPr/>
+        </p:nvSpPr>
+        <p:spPr>
+          <a:xfrm>
             <a:off x="609600" y="781050"/>
             <a:ext cx="8096250" cy="914400"/>
           </a:xfrm>
-          <a:prstGeom xmlns:a="http://schemas.openxmlformats.org/drawingml/2006/main" prst="rect">
-            <a:avLst/>
-          </a:prstGeom>
-          <a:solidFill xmlns:a="http://schemas.openxmlformats.org/drawingml/2006/main">
-            <a:srgbClr val="000000">
-              <a:alpha val="0"/>
-            </a:srgbClr>
-          </a:solidFill>
-          <a:ln xmlns:a="http://schemas.openxmlformats.org/drawingml/2006/main" w="0">
-            <a:solidFill>
-              <a:srgbClr val="000000">
-                <a:alpha val="0"/>
-              </a:srgbClr>
-            </a:solidFill>
-            <a:prstDash val="solid"/>
-          </a:ln>
-        </p:spPr>
-        <p:txBody>
-          <a:bodyPr xmlns:a="http://schemas.openxmlformats.org/drawingml/2006/main" lIns="0" tIns="0" rIns="0" bIns="0" anchor="t"/>
-          <a:lstStyle xmlns:a="http://schemas.openxmlformats.org/drawingml/2006/main"/>
-          <a:p xmlns:a="http://schemas.openxmlformats.org/drawingml/2006/main">
+          <a:prstGeom prst="rect">
+            <a:avLst/>
+          </a:prstGeom>
+          <a:solidFill>
+            <a:srgbClr val="000000">
+              <a:alpha val="0"/>
+            </a:srgbClr>
+          </a:solidFill>
+          <a:ln w="0">
+            <a:solidFill>
+              <a:srgbClr val="000000">
+                <a:alpha val="0"/>
+              </a:srgbClr>
+            </a:solidFill>
+            <a:prstDash val="solid"/>
+          </a:ln>
+        </p:spPr>
+        <p:txBody>
+          <a:bodyPr lIns="0" tIns="0" rIns="0" bIns="0" anchor="t"/>
+          <a:lstStyle/>
+          <a:p>
             <a:pPr algn="l">
               <a:defRPr sz="2550" b="1">
                 <a:solidFill>
@@ -2583,43 +2583,43 @@
       <p:sp>
         <p:nvSpPr>
           <p:cNvPr id="5" name="">
-            <a:extLst xmlns:a="http://schemas.openxmlformats.org/drawingml/2006/main">
-              <a:ext uri="{FF2B5EF4-FFF2-40B4-BE49-F238E27FC236}">
-                <a16:creationId xmlns:a16="http://schemas.microsoft.com/office/drawing/2014/main" id="{CF8A6543-A644-4DC9-B1B2-13C03761C753}"/>
-              </a:ext>
-            </a:extLst>
-          </p:cNvPr>
-          <p:cNvSpPr>
-            <a:spLocks xmlns:a="http://schemas.openxmlformats.org/drawingml/2006/main" noGrp="1"/>
-          </p:cNvSpPr>
-          <p:nvPr/>
-        </p:nvSpPr>
-        <p:spPr>
-          <a:xfrm xmlns:a="http://schemas.openxmlformats.org/drawingml/2006/main">
+            <a:extLst>
+              <a:ext uri="{FF2B5EF4-FFF2-40B4-BE49-F238E27FC236}">
+                <ns2:creationId id="{CF8A6543-A644-4DC9-B1B2-13C03761C753}"/>
+              </a:ext>
+            </a:extLst>
+          </p:cNvPr>
+          <p:cNvSpPr>
+            <a:spLocks noGrp="1"/>
+          </p:cNvSpPr>
+          <p:nvPr/>
+        </p:nvSpPr>
+        <p:spPr>
+          <a:xfrm>
             <a:off x="609600" y="1676400"/>
             <a:ext cx="7429500" cy="381000"/>
           </a:xfrm>
-          <a:prstGeom xmlns:a="http://schemas.openxmlformats.org/drawingml/2006/main" prst="rect">
-            <a:avLst/>
-          </a:prstGeom>
-          <a:solidFill xmlns:a="http://schemas.openxmlformats.org/drawingml/2006/main">
-            <a:srgbClr val="000000">
-              <a:alpha val="0"/>
-            </a:srgbClr>
-          </a:solidFill>
-          <a:ln xmlns:a="http://schemas.openxmlformats.org/drawingml/2006/main" w="0">
-            <a:solidFill>
-              <a:srgbClr val="000000">
-                <a:alpha val="0"/>
-              </a:srgbClr>
-            </a:solidFill>
-            <a:prstDash val="solid"/>
-          </a:ln>
-        </p:spPr>
-        <p:txBody>
-          <a:bodyPr xmlns:a="http://schemas.openxmlformats.org/drawingml/2006/main" lIns="0" tIns="0" rIns="0" bIns="0" anchor="t"/>
-          <a:lstStyle xmlns:a="http://schemas.openxmlformats.org/drawingml/2006/main"/>
-          <a:p xmlns:a="http://schemas.openxmlformats.org/drawingml/2006/main">
+          <a:prstGeom prst="rect">
+            <a:avLst/>
+          </a:prstGeom>
+          <a:solidFill>
+            <a:srgbClr val="000000">
+              <a:alpha val="0"/>
+            </a:srgbClr>
+          </a:solidFill>
+          <a:ln w="0">
+            <a:solidFill>
+              <a:srgbClr val="000000">
+                <a:alpha val="0"/>
+              </a:srgbClr>
+            </a:solidFill>
+            <a:prstDash val="solid"/>
+          </a:ln>
+        </p:spPr>
+        <p:txBody>
+          <a:bodyPr lIns="0" tIns="0" rIns="0" bIns="0" anchor="t"/>
+          <a:lstStyle/>
+          <a:p>
             <a:pPr algn="l">
               <a:defRPr sz="1125" b="0">
                 <a:solidFill>
@@ -2647,29 +2647,29 @@
       <p:sp>
         <p:nvSpPr>
           <p:cNvPr id="6" name="">
-            <a:extLst xmlns:a="http://schemas.openxmlformats.org/drawingml/2006/main">
-              <a:ext uri="{FF2B5EF4-FFF2-40B4-BE49-F238E27FC236}">
-                <a16:creationId xmlns:a16="http://schemas.microsoft.com/office/drawing/2014/main" id="{59F791F7-F587-4204-B4D5-C35E2C12F7CC}"/>
-              </a:ext>
-            </a:extLst>
-          </p:cNvPr>
-          <p:cNvSpPr>
-            <a:spLocks xmlns:a="http://schemas.openxmlformats.org/drawingml/2006/main" noGrp="1"/>
-          </p:cNvSpPr>
-          <p:nvPr/>
-        </p:nvSpPr>
-        <p:spPr>
-          <a:xfrm xmlns:a="http://schemas.openxmlformats.org/drawingml/2006/main">
+            <a:extLst>
+              <a:ext uri="{FF2B5EF4-FFF2-40B4-BE49-F238E27FC236}">
+                <ns2:creationId id="{59F791F7-F587-4204-B4D5-C35E2C12F7CC}"/>
+              </a:ext>
+            </a:extLst>
+          </p:cNvPr>
+          <p:cNvSpPr>
+            <a:spLocks noGrp="1"/>
+          </p:cNvSpPr>
+          <p:nvPr/>
+        </p:nvSpPr>
+        <p:spPr>
+          <a:xfrm>
             <a:off x="6096000" y="2266950"/>
             <a:ext cx="4476750" cy="3048000"/>
           </a:xfrm>
-          <a:prstGeom xmlns:a="http://schemas.openxmlformats.org/drawingml/2006/main" prst="rect">
-            <a:avLst/>
-          </a:prstGeom>
-          <a:solidFill xmlns:a="http://schemas.openxmlformats.org/drawingml/2006/main">
+          <a:prstGeom prst="rect">
+            <a:avLst/>
+          </a:prstGeom>
+          <a:solidFill>
             <a:srgbClr val="FFFDF8"/>
           </a:solidFill>
-          <a:ln xmlns:a="http://schemas.openxmlformats.org/drawingml/2006/main" w="9525">
+          <a:ln w="9525">
             <a:solidFill>
               <a:srgbClr val="D9CDBB"/>
             </a:solidFill>
@@ -2681,20 +2681,20 @@
         <p:nvPicPr>
           <p:cNvPr id="7" name=""/>
           <p:cNvPicPr>
-            <a:picLocks xmlns:a="http://schemas.openxmlformats.org/drawingml/2006/main" noChangeAspect="1"/>
+            <a:picLocks noChangeAspect="1"/>
           </p:cNvPicPr>
           <p:nvPr/>
         </p:nvPicPr>
         <p:blipFill>
-          <a:blip xmlns:r="http://schemas.openxmlformats.org/officeDocument/2006/relationships" xmlns:a="http://schemas.openxmlformats.org/drawingml/2006/main" r:embed="R783f312e3efe4136"/>
-          <a:stretch xmlns:a="http://schemas.openxmlformats.org/drawingml/2006/main"/>
+          <a:blip r:embed="R783f312e3efe4136"/>
+          <a:stretch/>
         </p:blipFill>
         <p:spPr>
-          <a:xfrm xmlns:a="http://schemas.openxmlformats.org/drawingml/2006/main">
+          <a:xfrm>
             <a:off x="6191250" y="3101812"/>
             <a:ext cx="4286250" cy="1378276"/>
           </a:xfrm>
-          <a:prstGeom xmlns:a="http://schemas.openxmlformats.org/drawingml/2006/main" prst="rect">
+          <a:prstGeom prst="rect">
             <a:avLst/>
           </a:prstGeom>
         </p:spPr>
@@ -2702,43 +2702,43 @@
       <p:sp>
         <p:nvSpPr>
           <p:cNvPr id="8" name="">
-            <a:extLst xmlns:a="http://schemas.openxmlformats.org/drawingml/2006/main">
-              <a:ext uri="{FF2B5EF4-FFF2-40B4-BE49-F238E27FC236}">
-                <a16:creationId xmlns:a16="http://schemas.microsoft.com/office/drawing/2014/main" id="{0244EA49-ED14-4906-A4CA-D909815D1DFE}"/>
-              </a:ext>
-            </a:extLst>
-          </p:cNvPr>
-          <p:cNvSpPr>
-            <a:spLocks xmlns:a="http://schemas.openxmlformats.org/drawingml/2006/main" noGrp="1"/>
-          </p:cNvSpPr>
-          <p:nvPr/>
-        </p:nvSpPr>
-        <p:spPr>
-          <a:xfrm xmlns:a="http://schemas.openxmlformats.org/drawingml/2006/main">
+            <a:extLst>
+              <a:ext uri="{FF2B5EF4-FFF2-40B4-BE49-F238E27FC236}">
+                <ns2:creationId id="{0244EA49-ED14-4906-A4CA-D909815D1DFE}"/>
+              </a:ext>
+            </a:extLst>
+          </p:cNvPr>
+          <p:cNvSpPr>
+            <a:spLocks noGrp="1"/>
+          </p:cNvSpPr>
+          <p:nvPr/>
+        </p:nvSpPr>
+        <p:spPr>
+          <a:xfrm>
             <a:off x="6191250" y="5295900"/>
             <a:ext cx="4286250" cy="228600"/>
           </a:xfrm>
-          <a:prstGeom xmlns:a="http://schemas.openxmlformats.org/drawingml/2006/main" prst="rect">
-            <a:avLst/>
-          </a:prstGeom>
-          <a:solidFill xmlns:a="http://schemas.openxmlformats.org/drawingml/2006/main">
-            <a:srgbClr val="000000">
-              <a:alpha val="0"/>
-            </a:srgbClr>
-          </a:solidFill>
-          <a:ln xmlns:a="http://schemas.openxmlformats.org/drawingml/2006/main" w="0">
-            <a:solidFill>
-              <a:srgbClr val="000000">
-                <a:alpha val="0"/>
-              </a:srgbClr>
-            </a:solidFill>
-            <a:prstDash val="solid"/>
-          </a:ln>
-        </p:spPr>
-        <p:txBody>
-          <a:bodyPr xmlns:a="http://schemas.openxmlformats.org/drawingml/2006/main" lIns="0" tIns="0" rIns="0" bIns="0" anchor="t"/>
-          <a:lstStyle xmlns:a="http://schemas.openxmlformats.org/drawingml/2006/main"/>
-          <a:p xmlns:a="http://schemas.openxmlformats.org/drawingml/2006/main">
+          <a:prstGeom prst="rect">
+            <a:avLst/>
+          </a:prstGeom>
+          <a:solidFill>
+            <a:srgbClr val="000000">
+              <a:alpha val="0"/>
+            </a:srgbClr>
+          </a:solidFill>
+          <a:ln w="0">
+            <a:solidFill>
+              <a:srgbClr val="000000">
+                <a:alpha val="0"/>
+              </a:srgbClr>
+            </a:solidFill>
+            <a:prstDash val="solid"/>
+          </a:ln>
+        </p:spPr>
+        <p:txBody>
+          <a:bodyPr lIns="0" tIns="0" rIns="0" bIns="0" anchor="t"/>
+          <a:lstStyle/>
+          <a:p>
             <a:pPr algn="ctr">
               <a:defRPr sz="825" b="0">
                 <a:solidFill>
@@ -2758,7 +2758,7 @@
                 <a:ea typeface="Microsoft YaHei"/>
                 <a:cs typeface="Microsoft YaHei"/>
               </a:rPr>
-              <a:t>Intervention acceptance</a:t>
+              <a:t>Intervention preference (M=3.98)</a:t>
             </a:r>
           </a:p>
         </p:txBody>
@@ -2766,43 +2766,43 @@
       <p:sp>
         <p:nvSpPr>
           <p:cNvPr id="9" name="">
-            <a:extLst xmlns:a="http://schemas.openxmlformats.org/drawingml/2006/main">
-              <a:ext uri="{FF2B5EF4-FFF2-40B4-BE49-F238E27FC236}">
-                <a16:creationId xmlns:a16="http://schemas.microsoft.com/office/drawing/2014/main" id="{0489E6FA-C5C7-476A-B129-809D2BAB3B31}"/>
-              </a:ext>
-            </a:extLst>
-          </p:cNvPr>
-          <p:cNvSpPr>
-            <a:spLocks xmlns:a="http://schemas.openxmlformats.org/drawingml/2006/main" noGrp="1"/>
-          </p:cNvSpPr>
-          <p:nvPr/>
-        </p:nvSpPr>
-        <p:spPr>
-          <a:xfrm xmlns:a="http://schemas.openxmlformats.org/drawingml/2006/main">
+            <a:extLst>
+              <a:ext uri="{FF2B5EF4-FFF2-40B4-BE49-F238E27FC236}">
+                <ns2:creationId id="{0489E6FA-C5C7-476A-B129-809D2BAB3B31}"/>
+              </a:ext>
+            </a:extLst>
+          </p:cNvPr>
+          <p:cNvSpPr>
+            <a:spLocks noGrp="1"/>
+          </p:cNvSpPr>
+          <p:nvPr/>
+        </p:nvSpPr>
+        <p:spPr>
+          <a:xfrm>
             <a:off x="838200" y="2457450"/>
             <a:ext cx="3143250" cy="609600"/>
           </a:xfrm>
-          <a:prstGeom xmlns:a="http://schemas.openxmlformats.org/drawingml/2006/main" prst="rect">
-            <a:avLst/>
-          </a:prstGeom>
-          <a:solidFill xmlns:a="http://schemas.openxmlformats.org/drawingml/2006/main">
-            <a:srgbClr val="000000">
-              <a:alpha val="0"/>
-            </a:srgbClr>
-          </a:solidFill>
-          <a:ln xmlns:a="http://schemas.openxmlformats.org/drawingml/2006/main" w="0">
-            <a:solidFill>
-              <a:srgbClr val="000000">
-                <a:alpha val="0"/>
-              </a:srgbClr>
-            </a:solidFill>
-            <a:prstDash val="solid"/>
-          </a:ln>
-        </p:spPr>
-        <p:txBody>
-          <a:bodyPr xmlns:a="http://schemas.openxmlformats.org/drawingml/2006/main" lIns="0" tIns="0" rIns="0" bIns="0" anchor="t"/>
-          <a:lstStyle xmlns:a="http://schemas.openxmlformats.org/drawingml/2006/main"/>
-          <a:p xmlns:a="http://schemas.openxmlformats.org/drawingml/2006/main">
+          <a:prstGeom prst="rect">
+            <a:avLst/>
+          </a:prstGeom>
+          <a:solidFill>
+            <a:srgbClr val="000000">
+              <a:alpha val="0"/>
+            </a:srgbClr>
+          </a:solidFill>
+          <a:ln w="0">
+            <a:solidFill>
+              <a:srgbClr val="000000">
+                <a:alpha val="0"/>
+              </a:srgbClr>
+            </a:solidFill>
+            <a:prstDash val="solid"/>
+          </a:ln>
+        </p:spPr>
+        <p:txBody>
+          <a:bodyPr lIns="0" tIns="0" rIns="0" bIns="0" anchor="t"/>
+          <a:lstStyle/>
+          <a:p>
             <a:pPr algn="l">
               <a:defRPr sz="2700" b="1">
                 <a:solidFill>
@@ -2830,43 +2830,43 @@
       <p:sp>
         <p:nvSpPr>
           <p:cNvPr id="10" name="">
-            <a:extLst xmlns:a="http://schemas.openxmlformats.org/drawingml/2006/main">
-              <a:ext uri="{FF2B5EF4-FFF2-40B4-BE49-F238E27FC236}">
-                <a16:creationId xmlns:a16="http://schemas.microsoft.com/office/drawing/2014/main" id="{97F68492-1C11-49E0-811F-6B2B41868A0A}"/>
-              </a:ext>
-            </a:extLst>
-          </p:cNvPr>
-          <p:cNvSpPr>
-            <a:spLocks xmlns:a="http://schemas.openxmlformats.org/drawingml/2006/main" noGrp="1"/>
-          </p:cNvSpPr>
-          <p:nvPr/>
-        </p:nvSpPr>
-        <p:spPr>
-          <a:xfrm xmlns:a="http://schemas.openxmlformats.org/drawingml/2006/main">
+            <a:extLst>
+              <a:ext uri="{FF2B5EF4-FFF2-40B4-BE49-F238E27FC236}">
+                <ns2:creationId id="{97F68492-1C11-49E0-811F-6B2B41868A0A}"/>
+              </a:ext>
+            </a:extLst>
+          </p:cNvPr>
+          <p:cNvSpPr>
+            <a:spLocks noGrp="1"/>
+          </p:cNvSpPr>
+          <p:nvPr/>
+        </p:nvSpPr>
+        <p:spPr>
+          <a:xfrm>
             <a:off x="838200" y="3009900"/>
             <a:ext cx="3143250" cy="419100"/>
           </a:xfrm>
-          <a:prstGeom xmlns:a="http://schemas.openxmlformats.org/drawingml/2006/main" prst="rect">
-            <a:avLst/>
-          </a:prstGeom>
-          <a:solidFill xmlns:a="http://schemas.openxmlformats.org/drawingml/2006/main">
-            <a:srgbClr val="000000">
-              <a:alpha val="0"/>
-            </a:srgbClr>
-          </a:solidFill>
-          <a:ln xmlns:a="http://schemas.openxmlformats.org/drawingml/2006/main" w="0">
-            <a:solidFill>
-              <a:srgbClr val="000000">
-                <a:alpha val="0"/>
-              </a:srgbClr>
-            </a:solidFill>
-            <a:prstDash val="solid"/>
-          </a:ln>
-        </p:spPr>
-        <p:txBody>
-          <a:bodyPr xmlns:a="http://schemas.openxmlformats.org/drawingml/2006/main" lIns="0" tIns="0" rIns="0" bIns="0" anchor="t"/>
-          <a:lstStyle xmlns:a="http://schemas.openxmlformats.org/drawingml/2006/main"/>
-          <a:p xmlns:a="http://schemas.openxmlformats.org/drawingml/2006/main">
+          <a:prstGeom prst="rect">
+            <a:avLst/>
+          </a:prstGeom>
+          <a:solidFill>
+            <a:srgbClr val="000000">
+              <a:alpha val="0"/>
+            </a:srgbClr>
+          </a:solidFill>
+          <a:ln w="0">
+            <a:solidFill>
+              <a:srgbClr val="000000">
+                <a:alpha val="0"/>
+              </a:srgbClr>
+            </a:solidFill>
+            <a:prstDash val="solid"/>
+          </a:ln>
+        </p:spPr>
+        <p:txBody>
+          <a:bodyPr lIns="0" tIns="0" rIns="0" bIns="0" anchor="t"/>
+          <a:lstStyle/>
+          <a:p>
             <a:pPr algn="l">
               <a:defRPr sz="975" b="0">
                 <a:solidFill>
@@ -2894,43 +2894,43 @@
       <p:sp>
         <p:nvSpPr>
           <p:cNvPr id="11" name="">
-            <a:extLst xmlns:a="http://schemas.openxmlformats.org/drawingml/2006/main">
-              <a:ext uri="{FF2B5EF4-FFF2-40B4-BE49-F238E27FC236}">
-                <a16:creationId xmlns:a16="http://schemas.microsoft.com/office/drawing/2014/main" id="{10A8E0CD-1E9E-4691-B85B-06E01322AD36}"/>
-              </a:ext>
-            </a:extLst>
-          </p:cNvPr>
-          <p:cNvSpPr>
-            <a:spLocks xmlns:a="http://schemas.openxmlformats.org/drawingml/2006/main" noGrp="1"/>
-          </p:cNvSpPr>
-          <p:nvPr/>
-        </p:nvSpPr>
-        <p:spPr>
-          <a:xfrm xmlns:a="http://schemas.openxmlformats.org/drawingml/2006/main">
+            <a:extLst>
+              <a:ext uri="{FF2B5EF4-FFF2-40B4-BE49-F238E27FC236}">
+                <ns2:creationId id="{10A8E0CD-1E9E-4691-B85B-06E01322AD36}"/>
+              </a:ext>
+            </a:extLst>
+          </p:cNvPr>
+          <p:cNvSpPr>
+            <a:spLocks noGrp="1"/>
+          </p:cNvSpPr>
+          <p:nvPr/>
+        </p:nvSpPr>
+        <p:spPr>
+          <a:xfrm>
             <a:off x="838200" y="3733800"/>
             <a:ext cx="3143250" cy="609600"/>
           </a:xfrm>
-          <a:prstGeom xmlns:a="http://schemas.openxmlformats.org/drawingml/2006/main" prst="rect">
-            <a:avLst/>
-          </a:prstGeom>
-          <a:solidFill xmlns:a="http://schemas.openxmlformats.org/drawingml/2006/main">
-            <a:srgbClr val="000000">
-              <a:alpha val="0"/>
-            </a:srgbClr>
-          </a:solidFill>
-          <a:ln xmlns:a="http://schemas.openxmlformats.org/drawingml/2006/main" w="0">
-            <a:solidFill>
-              <a:srgbClr val="000000">
-                <a:alpha val="0"/>
-              </a:srgbClr>
-            </a:solidFill>
-            <a:prstDash val="solid"/>
-          </a:ln>
-        </p:spPr>
-        <p:txBody>
-          <a:bodyPr xmlns:a="http://schemas.openxmlformats.org/drawingml/2006/main" lIns="0" tIns="0" rIns="0" bIns="0" anchor="t"/>
-          <a:lstStyle xmlns:a="http://schemas.openxmlformats.org/drawingml/2006/main"/>
-          <a:p xmlns:a="http://schemas.openxmlformats.org/drawingml/2006/main">
+          <a:prstGeom prst="rect">
+            <a:avLst/>
+          </a:prstGeom>
+          <a:solidFill>
+            <a:srgbClr val="000000">
+              <a:alpha val="0"/>
+            </a:srgbClr>
+          </a:solidFill>
+          <a:ln w="0">
+            <a:solidFill>
+              <a:srgbClr val="000000">
+                <a:alpha val="0"/>
+              </a:srgbClr>
+            </a:solidFill>
+            <a:prstDash val="solid"/>
+          </a:ln>
+        </p:spPr>
+        <p:txBody>
+          <a:bodyPr lIns="0" tIns="0" rIns="0" bIns="0" anchor="t"/>
+          <a:lstStyle/>
+          <a:p>
             <a:pPr algn="l">
               <a:defRPr sz="2700" b="1">
                 <a:solidFill>
@@ -2958,43 +2958,43 @@
       <p:sp>
         <p:nvSpPr>
           <p:cNvPr id="12" name="">
-            <a:extLst xmlns:a="http://schemas.openxmlformats.org/drawingml/2006/main">
-              <a:ext uri="{FF2B5EF4-FFF2-40B4-BE49-F238E27FC236}">
-                <a16:creationId xmlns:a16="http://schemas.microsoft.com/office/drawing/2014/main" id="{E18E6F96-269D-4549-B911-9D6206C96FD4}"/>
-              </a:ext>
-            </a:extLst>
-          </p:cNvPr>
-          <p:cNvSpPr>
-            <a:spLocks xmlns:a="http://schemas.openxmlformats.org/drawingml/2006/main" noGrp="1"/>
-          </p:cNvSpPr>
-          <p:nvPr/>
-        </p:nvSpPr>
-        <p:spPr>
-          <a:xfrm xmlns:a="http://schemas.openxmlformats.org/drawingml/2006/main">
+            <a:extLst>
+              <a:ext uri="{FF2B5EF4-FFF2-40B4-BE49-F238E27FC236}">
+                <ns2:creationId id="{E18E6F96-269D-4549-B911-9D6206C96FD4}"/>
+              </a:ext>
+            </a:extLst>
+          </p:cNvPr>
+          <p:cNvSpPr>
+            <a:spLocks noGrp="1"/>
+          </p:cNvSpPr>
+          <p:nvPr/>
+        </p:nvSpPr>
+        <p:spPr>
+          <a:xfrm>
             <a:off x="838200" y="4286250"/>
             <a:ext cx="3143250" cy="419100"/>
           </a:xfrm>
-          <a:prstGeom xmlns:a="http://schemas.openxmlformats.org/drawingml/2006/main" prst="rect">
-            <a:avLst/>
-          </a:prstGeom>
-          <a:solidFill xmlns:a="http://schemas.openxmlformats.org/drawingml/2006/main">
-            <a:srgbClr val="000000">
-              <a:alpha val="0"/>
-            </a:srgbClr>
-          </a:solidFill>
-          <a:ln xmlns:a="http://schemas.openxmlformats.org/drawingml/2006/main" w="0">
-            <a:solidFill>
-              <a:srgbClr val="000000">
-                <a:alpha val="0"/>
-              </a:srgbClr>
-            </a:solidFill>
-            <a:prstDash val="solid"/>
-          </a:ln>
-        </p:spPr>
-        <p:txBody>
-          <a:bodyPr xmlns:a="http://schemas.openxmlformats.org/drawingml/2006/main" lIns="0" tIns="0" rIns="0" bIns="0" anchor="t"/>
-          <a:lstStyle xmlns:a="http://schemas.openxmlformats.org/drawingml/2006/main"/>
-          <a:p xmlns:a="http://schemas.openxmlformats.org/drawingml/2006/main">
+          <a:prstGeom prst="rect">
+            <a:avLst/>
+          </a:prstGeom>
+          <a:solidFill>
+            <a:srgbClr val="000000">
+              <a:alpha val="0"/>
+            </a:srgbClr>
+          </a:solidFill>
+          <a:ln w="0">
+            <a:solidFill>
+              <a:srgbClr val="000000">
+                <a:alpha val="0"/>
+              </a:srgbClr>
+            </a:solidFill>
+            <a:prstDash val="solid"/>
+          </a:ln>
+        </p:spPr>
+        <p:txBody>
+          <a:bodyPr lIns="0" tIns="0" rIns="0" bIns="0" anchor="t"/>
+          <a:lstStyle/>
+          <a:p>
             <a:pPr algn="l">
               <a:defRPr sz="975" b="0">
                 <a:solidFill>
@@ -3022,43 +3022,43 @@
       <p:sp>
         <p:nvSpPr>
           <p:cNvPr id="13" name="">
-            <a:extLst xmlns:a="http://schemas.openxmlformats.org/drawingml/2006/main">
-              <a:ext uri="{FF2B5EF4-FFF2-40B4-BE49-F238E27FC236}">
-                <a16:creationId xmlns:a16="http://schemas.microsoft.com/office/drawing/2014/main" id="{A162C7BD-FEE5-4AEE-93DA-E6CCB26A0621}"/>
-              </a:ext>
-            </a:extLst>
-          </p:cNvPr>
-          <p:cNvSpPr>
-            <a:spLocks xmlns:a="http://schemas.openxmlformats.org/drawingml/2006/main" noGrp="1"/>
-          </p:cNvSpPr>
-          <p:nvPr/>
-        </p:nvSpPr>
-        <p:spPr>
-          <a:xfrm xmlns:a="http://schemas.openxmlformats.org/drawingml/2006/main">
+            <a:extLst>
+              <a:ext uri="{FF2B5EF4-FFF2-40B4-BE49-F238E27FC236}">
+                <ns2:creationId id="{A162C7BD-FEE5-4AEE-93DA-E6CCB26A0621}"/>
+              </a:ext>
+            </a:extLst>
+          </p:cNvPr>
+          <p:cNvSpPr>
+            <a:spLocks noGrp="1"/>
+          </p:cNvSpPr>
+          <p:nvPr/>
+        </p:nvSpPr>
+        <p:spPr>
+          <a:xfrm>
             <a:off x="838200" y="5010150"/>
             <a:ext cx="3143250" cy="609600"/>
           </a:xfrm>
-          <a:prstGeom xmlns:a="http://schemas.openxmlformats.org/drawingml/2006/main" prst="rect">
-            <a:avLst/>
-          </a:prstGeom>
-          <a:solidFill xmlns:a="http://schemas.openxmlformats.org/drawingml/2006/main">
-            <a:srgbClr val="000000">
-              <a:alpha val="0"/>
-            </a:srgbClr>
-          </a:solidFill>
-          <a:ln xmlns:a="http://schemas.openxmlformats.org/drawingml/2006/main" w="0">
-            <a:solidFill>
-              <a:srgbClr val="000000">
-                <a:alpha val="0"/>
-              </a:srgbClr>
-            </a:solidFill>
-            <a:prstDash val="solid"/>
-          </a:ln>
-        </p:spPr>
-        <p:txBody>
-          <a:bodyPr xmlns:a="http://schemas.openxmlformats.org/drawingml/2006/main" lIns="0" tIns="0" rIns="0" bIns="0" anchor="t"/>
-          <a:lstStyle xmlns:a="http://schemas.openxmlformats.org/drawingml/2006/main"/>
-          <a:p xmlns:a="http://schemas.openxmlformats.org/drawingml/2006/main">
+          <a:prstGeom prst="rect">
+            <a:avLst/>
+          </a:prstGeom>
+          <a:solidFill>
+            <a:srgbClr val="000000">
+              <a:alpha val="0"/>
+            </a:srgbClr>
+          </a:solidFill>
+          <a:ln w="0">
+            <a:solidFill>
+              <a:srgbClr val="000000">
+                <a:alpha val="0"/>
+              </a:srgbClr>
+            </a:solidFill>
+            <a:prstDash val="solid"/>
+          </a:ln>
+        </p:spPr>
+        <p:txBody>
+          <a:bodyPr lIns="0" tIns="0" rIns="0" bIns="0" anchor="t"/>
+          <a:lstStyle/>
+          <a:p>
             <a:pPr algn="l">
               <a:defRPr sz="2700" b="1">
                 <a:solidFill>
@@ -3086,43 +3086,43 @@
       <p:sp>
         <p:nvSpPr>
           <p:cNvPr id="14" name="">
-            <a:extLst xmlns:a="http://schemas.openxmlformats.org/drawingml/2006/main">
-              <a:ext uri="{FF2B5EF4-FFF2-40B4-BE49-F238E27FC236}">
-                <a16:creationId xmlns:a16="http://schemas.microsoft.com/office/drawing/2014/main" id="{8AA3C439-4E7D-43D5-A58B-F5B05C64B339}"/>
-              </a:ext>
-            </a:extLst>
-          </p:cNvPr>
-          <p:cNvSpPr>
-            <a:spLocks xmlns:a="http://schemas.openxmlformats.org/drawingml/2006/main" noGrp="1"/>
-          </p:cNvSpPr>
-          <p:nvPr/>
-        </p:nvSpPr>
-        <p:spPr>
-          <a:xfrm xmlns:a="http://schemas.openxmlformats.org/drawingml/2006/main">
+            <a:extLst>
+              <a:ext uri="{FF2B5EF4-FFF2-40B4-BE49-F238E27FC236}">
+                <ns2:creationId id="{8AA3C439-4E7D-43D5-A58B-F5B05C64B339}"/>
+              </a:ext>
+            </a:extLst>
+          </p:cNvPr>
+          <p:cNvSpPr>
+            <a:spLocks noGrp="1"/>
+          </p:cNvSpPr>
+          <p:nvPr/>
+        </p:nvSpPr>
+        <p:spPr>
+          <a:xfrm>
             <a:off x="838200" y="5562600"/>
             <a:ext cx="3143250" cy="419100"/>
           </a:xfrm>
-          <a:prstGeom xmlns:a="http://schemas.openxmlformats.org/drawingml/2006/main" prst="rect">
-            <a:avLst/>
-          </a:prstGeom>
-          <a:solidFill xmlns:a="http://schemas.openxmlformats.org/drawingml/2006/main">
-            <a:srgbClr val="000000">
-              <a:alpha val="0"/>
-            </a:srgbClr>
-          </a:solidFill>
-          <a:ln xmlns:a="http://schemas.openxmlformats.org/drawingml/2006/main" w="0">
-            <a:solidFill>
-              <a:srgbClr val="000000">
-                <a:alpha val="0"/>
-              </a:srgbClr>
-            </a:solidFill>
-            <a:prstDash val="solid"/>
-          </a:ln>
-        </p:spPr>
-        <p:txBody>
-          <a:bodyPr xmlns:a="http://schemas.openxmlformats.org/drawingml/2006/main" lIns="0" tIns="0" rIns="0" bIns="0" anchor="t"/>
-          <a:lstStyle xmlns:a="http://schemas.openxmlformats.org/drawingml/2006/main"/>
-          <a:p xmlns:a="http://schemas.openxmlformats.org/drawingml/2006/main">
+          <a:prstGeom prst="rect">
+            <a:avLst/>
+          </a:prstGeom>
+          <a:solidFill>
+            <a:srgbClr val="000000">
+              <a:alpha val="0"/>
+            </a:srgbClr>
+          </a:solidFill>
+          <a:ln w="0">
+            <a:solidFill>
+              <a:srgbClr val="000000">
+                <a:alpha val="0"/>
+              </a:srgbClr>
+            </a:solidFill>
+            <a:prstDash val="solid"/>
+          </a:ln>
+        </p:spPr>
+        <p:txBody>
+          <a:bodyPr lIns="0" tIns="0" rIns="0" bIns="0" anchor="t"/>
+          <a:lstStyle/>
+          <a:p>
             <a:pPr algn="l">
               <a:defRPr sz="975" b="0">
                 <a:solidFill>
@@ -3150,29 +3150,29 @@
       <p:sp>
         <p:nvSpPr>
           <p:cNvPr id="15" name="">
-            <a:extLst xmlns:a="http://schemas.openxmlformats.org/drawingml/2006/main">
-              <a:ext uri="{FF2B5EF4-FFF2-40B4-BE49-F238E27FC236}">
-                <a16:creationId xmlns:a16="http://schemas.microsoft.com/office/drawing/2014/main" id="{FF9A2604-5DEB-4CF1-A15B-DB31D56A1968}"/>
-              </a:ext>
-            </a:extLst>
-          </p:cNvPr>
-          <p:cNvSpPr>
-            <a:spLocks xmlns:a="http://schemas.openxmlformats.org/drawingml/2006/main" noGrp="1"/>
-          </p:cNvSpPr>
-          <p:nvPr/>
-        </p:nvSpPr>
-        <p:spPr>
-          <a:xfrm xmlns:a="http://schemas.openxmlformats.org/drawingml/2006/main">
+            <a:extLst>
+              <a:ext uri="{FF2B5EF4-FFF2-40B4-BE49-F238E27FC236}">
+                <ns2:creationId id="{FF9A2604-5DEB-4CF1-A15B-DB31D56A1968}"/>
+              </a:ext>
+            </a:extLst>
+          </p:cNvPr>
+          <p:cNvSpPr>
+            <a:spLocks noGrp="1"/>
+          </p:cNvSpPr>
+          <p:nvPr/>
+        </p:nvSpPr>
+        <p:spPr>
+          <a:xfrm>
             <a:off x="609600" y="6334125"/>
             <a:ext cx="9810750" cy="9525"/>
           </a:xfrm>
-          <a:prstGeom xmlns:a="http://schemas.openxmlformats.org/drawingml/2006/main" prst="rect">
-            <a:avLst/>
-          </a:prstGeom>
-          <a:solidFill xmlns:a="http://schemas.openxmlformats.org/drawingml/2006/main">
+          <a:prstGeom prst="rect">
+            <a:avLst/>
+          </a:prstGeom>
+          <a:solidFill>
             <a:srgbClr val="E2D8C9"/>
           </a:solidFill>
-          <a:ln xmlns:a="http://schemas.openxmlformats.org/drawingml/2006/main" w="0">
+          <a:ln w="0">
             <a:solidFill>
               <a:srgbClr val="000000">
                 <a:alpha val="0"/>
@@ -3185,43 +3185,43 @@
       <p:sp>
         <p:nvSpPr>
           <p:cNvPr id="16" name="">
-            <a:extLst xmlns:a="http://schemas.openxmlformats.org/drawingml/2006/main">
-              <a:ext uri="{FF2B5EF4-FFF2-40B4-BE49-F238E27FC236}">
-                <a16:creationId xmlns:a16="http://schemas.microsoft.com/office/drawing/2014/main" id="{C4E97389-5DDA-4B33-9F41-9EF84C8215D7}"/>
-              </a:ext>
-            </a:extLst>
-          </p:cNvPr>
-          <p:cNvSpPr>
-            <a:spLocks xmlns:a="http://schemas.openxmlformats.org/drawingml/2006/main" noGrp="1"/>
-          </p:cNvSpPr>
-          <p:nvPr/>
-        </p:nvSpPr>
-        <p:spPr>
-          <a:xfrm xmlns:a="http://schemas.openxmlformats.org/drawingml/2006/main">
+            <a:extLst>
+              <a:ext uri="{FF2B5EF4-FFF2-40B4-BE49-F238E27FC236}">
+                <ns2:creationId id="{C4E97389-5DDA-4B33-9F41-9EF84C8215D7}"/>
+              </a:ext>
+            </a:extLst>
+          </p:cNvPr>
+          <p:cNvSpPr>
+            <a:spLocks noGrp="1"/>
+          </p:cNvSpPr>
+          <p:nvPr/>
+        </p:nvSpPr>
+        <p:spPr>
+          <a:xfrm>
             <a:off x="609600" y="6419850"/>
             <a:ext cx="7239000" cy="228600"/>
           </a:xfrm>
-          <a:prstGeom xmlns:a="http://schemas.openxmlformats.org/drawingml/2006/main" prst="rect">
-            <a:avLst/>
-          </a:prstGeom>
-          <a:solidFill xmlns:a="http://schemas.openxmlformats.org/drawingml/2006/main">
-            <a:srgbClr val="000000">
-              <a:alpha val="0"/>
-            </a:srgbClr>
-          </a:solidFill>
-          <a:ln xmlns:a="http://schemas.openxmlformats.org/drawingml/2006/main" w="0">
-            <a:solidFill>
-              <a:srgbClr val="000000">
-                <a:alpha val="0"/>
-              </a:srgbClr>
-            </a:solidFill>
-            <a:prstDash val="solid"/>
-          </a:ln>
-        </p:spPr>
-        <p:txBody>
-          <a:bodyPr xmlns:a="http://schemas.openxmlformats.org/drawingml/2006/main" lIns="0" tIns="0" rIns="0" bIns="0" anchor="t"/>
-          <a:lstStyle xmlns:a="http://schemas.openxmlformats.org/drawingml/2006/main"/>
-          <a:p xmlns:a="http://schemas.openxmlformats.org/drawingml/2006/main">
+          <a:prstGeom prst="rect">
+            <a:avLst/>
+          </a:prstGeom>
+          <a:solidFill>
+            <a:srgbClr val="000000">
+              <a:alpha val="0"/>
+            </a:srgbClr>
+          </a:solidFill>
+          <a:ln w="0">
+            <a:solidFill>
+              <a:srgbClr val="000000">
+                <a:alpha val="0"/>
+              </a:srgbClr>
+            </a:solidFill>
+            <a:prstDash val="solid"/>
+          </a:ln>
+        </p:spPr>
+        <p:txBody>
+          <a:bodyPr lIns="0" tIns="0" rIns="0" bIns="0" anchor="t"/>
+          <a:lstStyle/>
+          <a:p>
             <a:pPr algn="l">
               <a:defRPr sz="750" b="0">
                 <a:solidFill>
@@ -3241,7 +3241,7 @@
                 <a:ea typeface="Microsoft YaHei"/>
                 <a:cs typeface="Microsoft YaHei"/>
               </a:rPr>
-              <a:t>Survey intervention items Q25-Q27</a:t>
+              <a:t>Q25-Q27; pressure-preference rho=.67, p&lt;.001</a:t>
             </a:r>
           </a:p>
         </p:txBody>
@@ -3249,43 +3249,43 @@
       <p:sp>
         <p:nvSpPr>
           <p:cNvPr id="17" name="">
-            <a:extLst xmlns:a="http://schemas.openxmlformats.org/drawingml/2006/main">
-              <a:ext uri="{FF2B5EF4-FFF2-40B4-BE49-F238E27FC236}">
-                <a16:creationId xmlns:a16="http://schemas.microsoft.com/office/drawing/2014/main" id="{83D88DFB-4754-4593-8118-CCF1A2384CB6}"/>
-              </a:ext>
-            </a:extLst>
-          </p:cNvPr>
-          <p:cNvSpPr>
-            <a:spLocks xmlns:a="http://schemas.openxmlformats.org/drawingml/2006/main" noGrp="1"/>
-          </p:cNvSpPr>
-          <p:nvPr/>
-        </p:nvSpPr>
-        <p:spPr>
-          <a:xfrm xmlns:a="http://schemas.openxmlformats.org/drawingml/2006/main">
+            <a:extLst>
+              <a:ext uri="{FF2B5EF4-FFF2-40B4-BE49-F238E27FC236}">
+                <ns2:creationId id="{83D88DFB-4754-4593-8118-CCF1A2384CB6}"/>
+              </a:ext>
+            </a:extLst>
+          </p:cNvPr>
+          <p:cNvSpPr>
+            <a:spLocks noGrp="1"/>
+          </p:cNvSpPr>
+          <p:nvPr/>
+        </p:nvSpPr>
+        <p:spPr>
+          <a:xfrm>
             <a:off x="10953750" y="6419850"/>
             <a:ext cx="628650" cy="228600"/>
           </a:xfrm>
-          <a:prstGeom xmlns:a="http://schemas.openxmlformats.org/drawingml/2006/main" prst="rect">
-            <a:avLst/>
-          </a:prstGeom>
-          <a:solidFill xmlns:a="http://schemas.openxmlformats.org/drawingml/2006/main">
-            <a:srgbClr val="000000">
-              <a:alpha val="0"/>
-            </a:srgbClr>
-          </a:solidFill>
-          <a:ln xmlns:a="http://schemas.openxmlformats.org/drawingml/2006/main" w="0">
-            <a:solidFill>
-              <a:srgbClr val="000000">
-                <a:alpha val="0"/>
-              </a:srgbClr>
-            </a:solidFill>
-            <a:prstDash val="solid"/>
-          </a:ln>
-        </p:spPr>
-        <p:txBody>
-          <a:bodyPr xmlns:a="http://schemas.openxmlformats.org/drawingml/2006/main" lIns="0" tIns="0" rIns="0" bIns="0" anchor="t"/>
-          <a:lstStyle xmlns:a="http://schemas.openxmlformats.org/drawingml/2006/main"/>
-          <a:p xmlns:a="http://schemas.openxmlformats.org/drawingml/2006/main">
+          <a:prstGeom prst="rect">
+            <a:avLst/>
+          </a:prstGeom>
+          <a:solidFill>
+            <a:srgbClr val="000000">
+              <a:alpha val="0"/>
+            </a:srgbClr>
+          </a:solidFill>
+          <a:ln w="0">
+            <a:solidFill>
+              <a:srgbClr val="000000">
+                <a:alpha val="0"/>
+              </a:srgbClr>
+            </a:solidFill>
+            <a:prstDash val="solid"/>
+          </a:ln>
+        </p:spPr>
+        <p:txBody>
+          <a:bodyPr lIns="0" tIns="0" rIns="0" bIns="0" anchor="t"/>
+          <a:lstStyle/>
+          <a:p>
             <a:pPr algn="r">
               <a:defRPr sz="900" b="1">
                 <a:solidFill>
@@ -3313,7 +3313,7 @@
     </p:spTree>
     <p:extLst>
       <p:ext uri="{BB962C8B-B14F-4D97-AF65-F5344CB8AC3E}">
-        <p14:creationId xmlns:p14="http://schemas.microsoft.com/office/powerpoint/2010/main" val="2044545242"/>
+        <ns4:creationId val="2044545242"/>
       </p:ext>
     </p:extLst>
   </p:cSld>
@@ -3321,7 +3321,7 @@
 </file>
 
 <file path=ppt/slides/slide11.xml><?xml version="1.0" encoding="utf-8"?>
-<p:sld xmlns:p="http://schemas.openxmlformats.org/presentationml/2006/main">
+<p:sld xmlns:a="http://schemas.openxmlformats.org/drawingml/2006/main" xmlns:ns2="http://schemas.microsoft.com/office/drawing/2014/main" xmlns:ns3="http://schemas.microsoft.com/office/powerpoint/2010/main" xmlns:p="http://schemas.openxmlformats.org/presentationml/2006/main">
   <p:cSld>
     <p:spTree>
       <p:nvGrpSpPr>
@@ -3330,34 +3330,34 @@
         <p:nvPr/>
       </p:nvGrpSpPr>
       <p:grpSpPr>
-        <a:xfrm xmlns:a="http://schemas.openxmlformats.org/drawingml/2006/main"/>
+        <a:xfrm/>
       </p:grpSpPr>
       <p:sp>
         <p:nvSpPr>
           <p:cNvPr id="1" name="">
-            <a:extLst xmlns:a="http://schemas.openxmlformats.org/drawingml/2006/main">
-              <a:ext uri="{FF2B5EF4-FFF2-40B4-BE49-F238E27FC236}">
-                <a16:creationId xmlns:a16="http://schemas.microsoft.com/office/drawing/2014/main" id="{75DF2605-697F-4E54-A0F7-3B52DF07B4EA}"/>
-              </a:ext>
-            </a:extLst>
-          </p:cNvPr>
-          <p:cNvSpPr>
-            <a:spLocks xmlns:a="http://schemas.openxmlformats.org/drawingml/2006/main" noGrp="1"/>
-          </p:cNvSpPr>
-          <p:nvPr/>
-        </p:nvSpPr>
-        <p:spPr>
-          <a:xfrm xmlns:a="http://schemas.openxmlformats.org/drawingml/2006/main">
+            <a:extLst>
+              <a:ext uri="{FF2B5EF4-FFF2-40B4-BE49-F238E27FC236}">
+                <ns2:creationId id="{75DF2605-697F-4E54-A0F7-3B52DF07B4EA}"/>
+              </a:ext>
+            </a:extLst>
+          </p:cNvPr>
+          <p:cNvSpPr>
+            <a:spLocks noGrp="1"/>
+          </p:cNvSpPr>
+          <p:nvPr/>
+        </p:nvSpPr>
+        <p:spPr>
+          <a:xfrm>
             <a:off x="0" y="0"/>
             <a:ext cx="12192000" cy="6858000"/>
           </a:xfrm>
-          <a:prstGeom xmlns:a="http://schemas.openxmlformats.org/drawingml/2006/main" prst="rect">
-            <a:avLst/>
-          </a:prstGeom>
-          <a:solidFill xmlns:a="http://schemas.openxmlformats.org/drawingml/2006/main">
+          <a:prstGeom prst="rect">
+            <a:avLst/>
+          </a:prstGeom>
+          <a:solidFill>
             <a:srgbClr val="F7F2EA"/>
           </a:solidFill>
-          <a:ln xmlns:a="http://schemas.openxmlformats.org/drawingml/2006/main" w="0">
+          <a:ln w="0">
             <a:solidFill>
               <a:srgbClr val="000000">
                 <a:alpha val="0"/>
@@ -3370,29 +3370,29 @@
       <p:sp>
         <p:nvSpPr>
           <p:cNvPr id="2" name="kicker-11-marker">
-            <a:extLst xmlns:a="http://schemas.openxmlformats.org/drawingml/2006/main">
-              <a:ext uri="{FF2B5EF4-FFF2-40B4-BE49-F238E27FC236}">
-                <a16:creationId xmlns:a16="http://schemas.microsoft.com/office/drawing/2014/main" id="{864C8C5C-FFE3-48F4-80DA-4CF9B09835FA}"/>
-              </a:ext>
-            </a:extLst>
-          </p:cNvPr>
-          <p:cNvSpPr>
-            <a:spLocks xmlns:a="http://schemas.openxmlformats.org/drawingml/2006/main" noGrp="1"/>
-          </p:cNvSpPr>
-          <p:nvPr/>
-        </p:nvSpPr>
-        <p:spPr>
-          <a:xfrm xmlns:a="http://schemas.openxmlformats.org/drawingml/2006/main">
+            <a:extLst>
+              <a:ext uri="{FF2B5EF4-FFF2-40B4-BE49-F238E27FC236}">
+                <ns2:creationId id="{864C8C5C-FFE3-48F4-80DA-4CF9B09835FA}"/>
+              </a:ext>
+            </a:extLst>
+          </p:cNvPr>
+          <p:cNvSpPr>
+            <a:spLocks noGrp="1"/>
+          </p:cNvSpPr>
+          <p:nvPr/>
+        </p:nvSpPr>
+        <p:spPr>
+          <a:xfrm>
             <a:off x="609600" y="457200"/>
             <a:ext cx="95250" cy="95250"/>
           </a:xfrm>
-          <a:prstGeom xmlns:a="http://schemas.openxmlformats.org/drawingml/2006/main" prst="rect">
-            <a:avLst/>
-          </a:prstGeom>
-          <a:solidFill xmlns:a="http://schemas.openxmlformats.org/drawingml/2006/main">
+          <a:prstGeom prst="rect">
+            <a:avLst/>
+          </a:prstGeom>
+          <a:solidFill>
             <a:srgbClr val="B44B3F"/>
           </a:solidFill>
-          <a:ln xmlns:a="http://schemas.openxmlformats.org/drawingml/2006/main" w="0">
+          <a:ln w="0">
             <a:solidFill>
               <a:srgbClr val="000000">
                 <a:alpha val="0"/>
@@ -3405,43 +3405,43 @@
       <p:sp>
         <p:nvSpPr>
           <p:cNvPr id="3" name="kicker-11-label">
-            <a:extLst xmlns:a="http://schemas.openxmlformats.org/drawingml/2006/main">
-              <a:ext uri="{FF2B5EF4-FFF2-40B4-BE49-F238E27FC236}">
-                <a16:creationId xmlns:a16="http://schemas.microsoft.com/office/drawing/2014/main" id="{39C9CAAF-1D40-4205-85D6-9F2C4F58393B}"/>
-              </a:ext>
-            </a:extLst>
-          </p:cNvPr>
-          <p:cNvSpPr>
-            <a:spLocks xmlns:a="http://schemas.openxmlformats.org/drawingml/2006/main" noGrp="1"/>
-          </p:cNvSpPr>
-          <p:nvPr/>
-        </p:nvSpPr>
-        <p:spPr>
-          <a:xfrm xmlns:a="http://schemas.openxmlformats.org/drawingml/2006/main">
+            <a:extLst>
+              <a:ext uri="{FF2B5EF4-FFF2-40B4-BE49-F238E27FC236}">
+                <ns2:creationId id="{39C9CAAF-1D40-4205-85D6-9F2C4F58393B}"/>
+              </a:ext>
+            </a:extLst>
+          </p:cNvPr>
+          <p:cNvSpPr>
+            <a:spLocks noGrp="1"/>
+          </p:cNvSpPr>
+          <p:nvPr/>
+        </p:nvSpPr>
+        <p:spPr>
+          <a:xfrm>
             <a:off x="800100" y="371475"/>
             <a:ext cx="3429000" cy="266700"/>
           </a:xfrm>
-          <a:prstGeom xmlns:a="http://schemas.openxmlformats.org/drawingml/2006/main" prst="rect">
-            <a:avLst/>
-          </a:prstGeom>
-          <a:solidFill xmlns:a="http://schemas.openxmlformats.org/drawingml/2006/main">
-            <a:srgbClr val="000000">
-              <a:alpha val="0"/>
-            </a:srgbClr>
-          </a:solidFill>
-          <a:ln xmlns:a="http://schemas.openxmlformats.org/drawingml/2006/main" w="0">
-            <a:solidFill>
-              <a:srgbClr val="000000">
-                <a:alpha val="0"/>
-              </a:srgbClr>
-            </a:solidFill>
-            <a:prstDash val="solid"/>
-          </a:ln>
-        </p:spPr>
-        <p:txBody>
-          <a:bodyPr xmlns:a="http://schemas.openxmlformats.org/drawingml/2006/main" lIns="0" tIns="0" rIns="0" bIns="0" anchor="t"/>
-          <a:lstStyle xmlns:a="http://schemas.openxmlformats.org/drawingml/2006/main"/>
-          <a:p xmlns:a="http://schemas.openxmlformats.org/drawingml/2006/main">
+          <a:prstGeom prst="rect">
+            <a:avLst/>
+          </a:prstGeom>
+          <a:solidFill>
+            <a:srgbClr val="000000">
+              <a:alpha val="0"/>
+            </a:srgbClr>
+          </a:solidFill>
+          <a:ln w="0">
+            <a:solidFill>
+              <a:srgbClr val="000000">
+                <a:alpha val="0"/>
+              </a:srgbClr>
+            </a:solidFill>
+            <a:prstDash val="solid"/>
+          </a:ln>
+        </p:spPr>
+        <p:txBody>
+          <a:bodyPr lIns="0" tIns="0" rIns="0" bIns="0" anchor="t"/>
+          <a:lstStyle/>
+          <a:p>
             <a:pPr algn="l">
               <a:defRPr sz="1050" b="1">
                 <a:solidFill>
@@ -3469,43 +3469,43 @@
       <p:sp>
         <p:nvSpPr>
           <p:cNvPr id="4" name="">
-            <a:extLst xmlns:a="http://schemas.openxmlformats.org/drawingml/2006/main">
-              <a:ext uri="{FF2B5EF4-FFF2-40B4-BE49-F238E27FC236}">
-                <a16:creationId xmlns:a16="http://schemas.microsoft.com/office/drawing/2014/main" id="{A3C1B451-60B3-4F23-960A-EB3E2292FACA}"/>
-              </a:ext>
-            </a:extLst>
-          </p:cNvPr>
-          <p:cNvSpPr>
-            <a:spLocks xmlns:a="http://schemas.openxmlformats.org/drawingml/2006/main" noGrp="1"/>
-          </p:cNvSpPr>
-          <p:nvPr/>
-        </p:nvSpPr>
-        <p:spPr>
-          <a:xfrm xmlns:a="http://schemas.openxmlformats.org/drawingml/2006/main">
+            <a:extLst>
+              <a:ext uri="{FF2B5EF4-FFF2-40B4-BE49-F238E27FC236}">
+                <ns2:creationId id="{A3C1B451-60B3-4F23-960A-EB3E2292FACA}"/>
+              </a:ext>
+            </a:extLst>
+          </p:cNvPr>
+          <p:cNvSpPr>
+            <a:spLocks noGrp="1"/>
+          </p:cNvSpPr>
+          <p:nvPr/>
+        </p:nvSpPr>
+        <p:spPr>
+          <a:xfrm>
             <a:off x="609600" y="781050"/>
             <a:ext cx="8096250" cy="914400"/>
           </a:xfrm>
-          <a:prstGeom xmlns:a="http://schemas.openxmlformats.org/drawingml/2006/main" prst="rect">
-            <a:avLst/>
-          </a:prstGeom>
-          <a:solidFill xmlns:a="http://schemas.openxmlformats.org/drawingml/2006/main">
-            <a:srgbClr val="000000">
-              <a:alpha val="0"/>
-            </a:srgbClr>
-          </a:solidFill>
-          <a:ln xmlns:a="http://schemas.openxmlformats.org/drawingml/2006/main" w="0">
-            <a:solidFill>
-              <a:srgbClr val="000000">
-                <a:alpha val="0"/>
-              </a:srgbClr>
-            </a:solidFill>
-            <a:prstDash val="solid"/>
-          </a:ln>
-        </p:spPr>
-        <p:txBody>
-          <a:bodyPr xmlns:a="http://schemas.openxmlformats.org/drawingml/2006/main" lIns="0" tIns="0" rIns="0" bIns="0" anchor="t"/>
-          <a:lstStyle xmlns:a="http://schemas.openxmlformats.org/drawingml/2006/main"/>
-          <a:p xmlns:a="http://schemas.openxmlformats.org/drawingml/2006/main">
+          <a:prstGeom prst="rect">
+            <a:avLst/>
+          </a:prstGeom>
+          <a:solidFill>
+            <a:srgbClr val="000000">
+              <a:alpha val="0"/>
+            </a:srgbClr>
+          </a:solidFill>
+          <a:ln w="0">
+            <a:solidFill>
+              <a:srgbClr val="000000">
+                <a:alpha val="0"/>
+              </a:srgbClr>
+            </a:solidFill>
+            <a:prstDash val="solid"/>
+          </a:ln>
+        </p:spPr>
+        <p:txBody>
+          <a:bodyPr lIns="0" tIns="0" rIns="0" bIns="0" anchor="t"/>
+          <a:lstStyle/>
+          <a:p>
             <a:pPr algn="l">
               <a:defRPr sz="2550" b="1">
                 <a:solidFill>
@@ -3525,7 +3525,7 @@
                 <a:ea typeface="Georgia"/>
                 <a:cs typeface="Georgia"/>
               </a:rPr>
-              <a:t>The evidence is exploratory and descriptive by design.</a:t>
+              <a:t>The evidence is exploratory, even with participant-level analysis.</a:t>
             </a:r>
           </a:p>
         </p:txBody>
@@ -3533,43 +3533,43 @@
       <p:sp>
         <p:nvSpPr>
           <p:cNvPr id="5" name="">
-            <a:extLst xmlns:a="http://schemas.openxmlformats.org/drawingml/2006/main">
-              <a:ext uri="{FF2B5EF4-FFF2-40B4-BE49-F238E27FC236}">
-                <a16:creationId xmlns:a16="http://schemas.microsoft.com/office/drawing/2014/main" id="{EFDAB141-A9B2-42A5-AE1B-8EA2B7F833A4}"/>
-              </a:ext>
-            </a:extLst>
-          </p:cNvPr>
-          <p:cNvSpPr>
-            <a:spLocks xmlns:a="http://schemas.openxmlformats.org/drawingml/2006/main" noGrp="1"/>
-          </p:cNvSpPr>
-          <p:nvPr/>
-        </p:nvSpPr>
-        <p:spPr>
-          <a:xfrm xmlns:a="http://schemas.openxmlformats.org/drawingml/2006/main">
+            <a:extLst>
+              <a:ext uri="{FF2B5EF4-FFF2-40B4-BE49-F238E27FC236}">
+                <ns2:creationId id="{EFDAB141-A9B2-42A5-AE1B-8EA2B7F833A4}"/>
+              </a:ext>
+            </a:extLst>
+          </p:cNvPr>
+          <p:cNvSpPr>
+            <a:spLocks noGrp="1"/>
+          </p:cNvSpPr>
+          <p:nvPr/>
+        </p:nvSpPr>
+        <p:spPr>
+          <a:xfrm>
             <a:off x="609600" y="1676400"/>
             <a:ext cx="7429500" cy="381000"/>
           </a:xfrm>
-          <a:prstGeom xmlns:a="http://schemas.openxmlformats.org/drawingml/2006/main" prst="rect">
-            <a:avLst/>
-          </a:prstGeom>
-          <a:solidFill xmlns:a="http://schemas.openxmlformats.org/drawingml/2006/main">
-            <a:srgbClr val="000000">
-              <a:alpha val="0"/>
-            </a:srgbClr>
-          </a:solidFill>
-          <a:ln xmlns:a="http://schemas.openxmlformats.org/drawingml/2006/main" w="0">
-            <a:solidFill>
-              <a:srgbClr val="000000">
-                <a:alpha val="0"/>
-              </a:srgbClr>
-            </a:solidFill>
-            <a:prstDash val="solid"/>
-          </a:ln>
-        </p:spPr>
-        <p:txBody>
-          <a:bodyPr xmlns:a="http://schemas.openxmlformats.org/drawingml/2006/main" lIns="0" tIns="0" rIns="0" bIns="0" anchor="t"/>
-          <a:lstStyle xmlns:a="http://schemas.openxmlformats.org/drawingml/2006/main"/>
-          <a:p xmlns:a="http://schemas.openxmlformats.org/drawingml/2006/main">
+          <a:prstGeom prst="rect">
+            <a:avLst/>
+          </a:prstGeom>
+          <a:solidFill>
+            <a:srgbClr val="000000">
+              <a:alpha val="0"/>
+            </a:srgbClr>
+          </a:solidFill>
+          <a:ln w="0">
+            <a:solidFill>
+              <a:srgbClr val="000000">
+                <a:alpha val="0"/>
+              </a:srgbClr>
+            </a:solidFill>
+            <a:prstDash val="solid"/>
+          </a:ln>
+        </p:spPr>
+        <p:txBody>
+          <a:bodyPr lIns="0" tIns="0" rIns="0" bIns="0" anchor="t"/>
+          <a:lstStyle/>
+          <a:p>
             <a:pPr algn="l">
               <a:defRPr sz="1125" b="0">
                 <a:solidFill>
@@ -3597,29 +3597,29 @@
       <p:sp>
         <p:nvSpPr>
           <p:cNvPr id="6" name="">
-            <a:extLst xmlns:a="http://schemas.openxmlformats.org/drawingml/2006/main">
-              <a:ext uri="{FF2B5EF4-FFF2-40B4-BE49-F238E27FC236}">
-                <a16:creationId xmlns:a16="http://schemas.microsoft.com/office/drawing/2014/main" id="{05024DC3-728D-477D-A4E3-57AEEC824D6D}"/>
-              </a:ext>
-            </a:extLst>
-          </p:cNvPr>
-          <p:cNvSpPr>
-            <a:spLocks xmlns:a="http://schemas.openxmlformats.org/drawingml/2006/main" noGrp="1"/>
-          </p:cNvSpPr>
-          <p:nvPr/>
-        </p:nvSpPr>
-        <p:spPr>
-          <a:xfrm xmlns:a="http://schemas.openxmlformats.org/drawingml/2006/main">
+            <a:extLst>
+              <a:ext uri="{FF2B5EF4-FFF2-40B4-BE49-F238E27FC236}">
+                <ns2:creationId id="{05024DC3-728D-477D-A4E3-57AEEC824D6D}"/>
+              </a:ext>
+            </a:extLst>
+          </p:cNvPr>
+          <p:cNvSpPr>
+            <a:spLocks noGrp="1"/>
+          </p:cNvSpPr>
+          <p:nvPr/>
+        </p:nvSpPr>
+        <p:spPr>
+          <a:xfrm>
             <a:off x="876300" y="2476500"/>
             <a:ext cx="85725" cy="85725"/>
           </a:xfrm>
-          <a:prstGeom xmlns:a="http://schemas.openxmlformats.org/drawingml/2006/main" prst="rect">
-            <a:avLst/>
-          </a:prstGeom>
-          <a:solidFill xmlns:a="http://schemas.openxmlformats.org/drawingml/2006/main">
+          <a:prstGeom prst="rect">
+            <a:avLst/>
+          </a:prstGeom>
+          <a:solidFill>
             <a:srgbClr val="B44B3F"/>
           </a:solidFill>
-          <a:ln xmlns:a="http://schemas.openxmlformats.org/drawingml/2006/main" w="0">
+          <a:ln w="0">
             <a:solidFill>
               <a:srgbClr val="000000">
                 <a:alpha val="0"/>
@@ -3632,43 +3632,43 @@
       <p:sp>
         <p:nvSpPr>
           <p:cNvPr id="7" name="">
-            <a:extLst xmlns:a="http://schemas.openxmlformats.org/drawingml/2006/main">
-              <a:ext uri="{FF2B5EF4-FFF2-40B4-BE49-F238E27FC236}">
-                <a16:creationId xmlns:a16="http://schemas.microsoft.com/office/drawing/2014/main" id="{CF063112-C005-464B-8BA1-1A6D0F6F5FFB}"/>
-              </a:ext>
-            </a:extLst>
-          </p:cNvPr>
-          <p:cNvSpPr>
-            <a:spLocks xmlns:a="http://schemas.openxmlformats.org/drawingml/2006/main" noGrp="1"/>
-          </p:cNvSpPr>
-          <p:nvPr/>
-        </p:nvSpPr>
-        <p:spPr>
-          <a:xfrm xmlns:a="http://schemas.openxmlformats.org/drawingml/2006/main">
+            <a:extLst>
+              <a:ext uri="{FF2B5EF4-FFF2-40B4-BE49-F238E27FC236}">
+                <ns2:creationId id="{CF063112-C005-464B-8BA1-1A6D0F6F5FFB}"/>
+              </a:ext>
+            </a:extLst>
+          </p:cNvPr>
+          <p:cNvSpPr>
+            <a:spLocks noGrp="1"/>
+          </p:cNvSpPr>
+          <p:nvPr/>
+        </p:nvSpPr>
+        <p:spPr>
+          <a:xfrm>
             <a:off x="1085850" y="2419350"/>
             <a:ext cx="3810000" cy="247650"/>
           </a:xfrm>
-          <a:prstGeom xmlns:a="http://schemas.openxmlformats.org/drawingml/2006/main" prst="rect">
-            <a:avLst/>
-          </a:prstGeom>
-          <a:solidFill xmlns:a="http://schemas.openxmlformats.org/drawingml/2006/main">
-            <a:srgbClr val="000000">
-              <a:alpha val="0"/>
-            </a:srgbClr>
-          </a:solidFill>
-          <a:ln xmlns:a="http://schemas.openxmlformats.org/drawingml/2006/main" w="0">
-            <a:solidFill>
-              <a:srgbClr val="000000">
-                <a:alpha val="0"/>
-              </a:srgbClr>
-            </a:solidFill>
-            <a:prstDash val="solid"/>
-          </a:ln>
-        </p:spPr>
-        <p:txBody>
-          <a:bodyPr xmlns:a="http://schemas.openxmlformats.org/drawingml/2006/main" lIns="0" tIns="0" rIns="0" bIns="0" anchor="t"/>
-          <a:lstStyle xmlns:a="http://schemas.openxmlformats.org/drawingml/2006/main"/>
-          <a:p xmlns:a="http://schemas.openxmlformats.org/drawingml/2006/main">
+          <a:prstGeom prst="rect">
+            <a:avLst/>
+          </a:prstGeom>
+          <a:solidFill>
+            <a:srgbClr val="000000">
+              <a:alpha val="0"/>
+            </a:srgbClr>
+          </a:solidFill>
+          <a:ln w="0">
+            <a:solidFill>
+              <a:srgbClr val="000000">
+                <a:alpha val="0"/>
+              </a:srgbClr>
+            </a:solidFill>
+            <a:prstDash val="solid"/>
+          </a:ln>
+        </p:spPr>
+        <p:txBody>
+          <a:bodyPr lIns="0" tIns="0" rIns="0" bIns="0" anchor="t"/>
+          <a:lstStyle/>
+          <a:p>
             <a:pPr algn="l">
               <a:defRPr sz="1275" b="1">
                 <a:solidFill>
@@ -3688,7 +3688,7 @@
                 <a:ea typeface="Microsoft YaHei"/>
                 <a:cs typeface="Microsoft YaHei"/>
               </a:rPr>
-              <a:t>Aggregate export</a:t>
+              <a:t>Small N</a:t>
             </a:r>
           </a:p>
         </p:txBody>
@@ -3696,43 +3696,43 @@
       <p:sp>
         <p:nvSpPr>
           <p:cNvPr id="8" name="">
-            <a:extLst xmlns:a="http://schemas.openxmlformats.org/drawingml/2006/main">
-              <a:ext uri="{FF2B5EF4-FFF2-40B4-BE49-F238E27FC236}">
-                <a16:creationId xmlns:a16="http://schemas.microsoft.com/office/drawing/2014/main" id="{A8FED67F-0CB4-4A16-9712-87B9E5A46784}"/>
-              </a:ext>
-            </a:extLst>
-          </p:cNvPr>
-          <p:cNvSpPr>
-            <a:spLocks xmlns:a="http://schemas.openxmlformats.org/drawingml/2006/main" noGrp="1"/>
-          </p:cNvSpPr>
-          <p:nvPr/>
-        </p:nvSpPr>
-        <p:spPr>
-          <a:xfrm xmlns:a="http://schemas.openxmlformats.org/drawingml/2006/main">
+            <a:extLst>
+              <a:ext uri="{FF2B5EF4-FFF2-40B4-BE49-F238E27FC236}">
+                <ns2:creationId id="{A8FED67F-0CB4-4A16-9712-87B9E5A46784}"/>
+              </a:ext>
+            </a:extLst>
+          </p:cNvPr>
+          <p:cNvSpPr>
+            <a:spLocks noGrp="1"/>
+          </p:cNvSpPr>
+          <p:nvPr/>
+        </p:nvSpPr>
+        <p:spPr>
+          <a:xfrm>
             <a:off x="1085850" y="2695575"/>
             <a:ext cx="4333875" cy="514350"/>
           </a:xfrm>
-          <a:prstGeom xmlns:a="http://schemas.openxmlformats.org/drawingml/2006/main" prst="rect">
-            <a:avLst/>
-          </a:prstGeom>
-          <a:solidFill xmlns:a="http://schemas.openxmlformats.org/drawingml/2006/main">
-            <a:srgbClr val="000000">
-              <a:alpha val="0"/>
-            </a:srgbClr>
-          </a:solidFill>
-          <a:ln xmlns:a="http://schemas.openxmlformats.org/drawingml/2006/main" w="0">
-            <a:solidFill>
-              <a:srgbClr val="000000">
-                <a:alpha val="0"/>
-              </a:srgbClr>
-            </a:solidFill>
-            <a:prstDash val="solid"/>
-          </a:ln>
-        </p:spPr>
-        <p:txBody>
-          <a:bodyPr xmlns:a="http://schemas.openxmlformats.org/drawingml/2006/main" lIns="0" tIns="0" rIns="0" bIns="0" anchor="t"/>
-          <a:lstStyle xmlns:a="http://schemas.openxmlformats.org/drawingml/2006/main"/>
-          <a:p xmlns:a="http://schemas.openxmlformats.org/drawingml/2006/main">
+          <a:prstGeom prst="rect">
+            <a:avLst/>
+          </a:prstGeom>
+          <a:solidFill>
+            <a:srgbClr val="000000">
+              <a:alpha val="0"/>
+            </a:srgbClr>
+          </a:solidFill>
+          <a:ln w="0">
+            <a:solidFill>
+              <a:srgbClr val="000000">
+                <a:alpha val="0"/>
+              </a:srgbClr>
+            </a:solidFill>
+            <a:prstDash val="solid"/>
+          </a:ln>
+        </p:spPr>
+        <p:txBody>
+          <a:bodyPr lIns="0" tIns="0" rIns="0" bIns="0" anchor="t"/>
+          <a:lstStyle/>
+          <a:p>
             <a:pPr algn="l">
               <a:defRPr sz="975" b="0">
                 <a:solidFill>
@@ -3752,7 +3752,7 @@
                 <a:ea typeface="Microsoft YaHei"/>
                 <a:cs typeface="Microsoft YaHei"/>
               </a:rPr>
-              <a:t>No individual response matrix; descriptive statistics only.</a:t>
+              <a:t>N=32 survey respondents and 3 interviewees; limited campus context.</a:t>
             </a:r>
           </a:p>
         </p:txBody>
@@ -3760,29 +3760,29 @@
       <p:sp>
         <p:nvSpPr>
           <p:cNvPr id="9" name="">
-            <a:extLst xmlns:a="http://schemas.openxmlformats.org/drawingml/2006/main">
-              <a:ext uri="{FF2B5EF4-FFF2-40B4-BE49-F238E27FC236}">
-                <a16:creationId xmlns:a16="http://schemas.microsoft.com/office/drawing/2014/main" id="{87EEAF24-C717-4B07-80CA-0A99B29F0A89}"/>
-              </a:ext>
-            </a:extLst>
-          </p:cNvPr>
-          <p:cNvSpPr>
-            <a:spLocks xmlns:a="http://schemas.openxmlformats.org/drawingml/2006/main" noGrp="1"/>
-          </p:cNvSpPr>
-          <p:nvPr/>
-        </p:nvSpPr>
-        <p:spPr>
-          <a:xfrm xmlns:a="http://schemas.openxmlformats.org/drawingml/2006/main">
+            <a:extLst>
+              <a:ext uri="{FF2B5EF4-FFF2-40B4-BE49-F238E27FC236}">
+                <ns2:creationId id="{87EEAF24-C717-4B07-80CA-0A99B29F0A89}"/>
+              </a:ext>
+            </a:extLst>
+          </p:cNvPr>
+          <p:cNvSpPr>
+            <a:spLocks noGrp="1"/>
+          </p:cNvSpPr>
+          <p:nvPr/>
+        </p:nvSpPr>
+        <p:spPr>
+          <a:xfrm>
             <a:off x="876300" y="3581400"/>
             <a:ext cx="85725" cy="85725"/>
           </a:xfrm>
-          <a:prstGeom xmlns:a="http://schemas.openxmlformats.org/drawingml/2006/main" prst="rect">
-            <a:avLst/>
-          </a:prstGeom>
-          <a:solidFill xmlns:a="http://schemas.openxmlformats.org/drawingml/2006/main">
+          <a:prstGeom prst="rect">
+            <a:avLst/>
+          </a:prstGeom>
+          <a:solidFill>
             <a:srgbClr val="C08B32"/>
           </a:solidFill>
-          <a:ln xmlns:a="http://schemas.openxmlformats.org/drawingml/2006/main" w="0">
+          <a:ln w="0">
             <a:solidFill>
               <a:srgbClr val="000000">
                 <a:alpha val="0"/>
@@ -3795,43 +3795,43 @@
       <p:sp>
         <p:nvSpPr>
           <p:cNvPr id="10" name="">
-            <a:extLst xmlns:a="http://schemas.openxmlformats.org/drawingml/2006/main">
-              <a:ext uri="{FF2B5EF4-FFF2-40B4-BE49-F238E27FC236}">
-                <a16:creationId xmlns:a16="http://schemas.microsoft.com/office/drawing/2014/main" id="{7B9D1102-E618-4F4E-B548-FC69BDFB850D}"/>
-              </a:ext>
-            </a:extLst>
-          </p:cNvPr>
-          <p:cNvSpPr>
-            <a:spLocks xmlns:a="http://schemas.openxmlformats.org/drawingml/2006/main" noGrp="1"/>
-          </p:cNvSpPr>
-          <p:nvPr/>
-        </p:nvSpPr>
-        <p:spPr>
-          <a:xfrm xmlns:a="http://schemas.openxmlformats.org/drawingml/2006/main">
+            <a:extLst>
+              <a:ext uri="{FF2B5EF4-FFF2-40B4-BE49-F238E27FC236}">
+                <ns2:creationId id="{7B9D1102-E618-4F4E-B548-FC69BDFB850D}"/>
+              </a:ext>
+            </a:extLst>
+          </p:cNvPr>
+          <p:cNvSpPr>
+            <a:spLocks noGrp="1"/>
+          </p:cNvSpPr>
+          <p:nvPr/>
+        </p:nvSpPr>
+        <p:spPr>
+          <a:xfrm>
             <a:off x="1085850" y="3524250"/>
             <a:ext cx="3810000" cy="247650"/>
           </a:xfrm>
-          <a:prstGeom xmlns:a="http://schemas.openxmlformats.org/drawingml/2006/main" prst="rect">
-            <a:avLst/>
-          </a:prstGeom>
-          <a:solidFill xmlns:a="http://schemas.openxmlformats.org/drawingml/2006/main">
-            <a:srgbClr val="000000">
-              <a:alpha val="0"/>
-            </a:srgbClr>
-          </a:solidFill>
-          <a:ln xmlns:a="http://schemas.openxmlformats.org/drawingml/2006/main" w="0">
-            <a:solidFill>
-              <a:srgbClr val="000000">
-                <a:alpha val="0"/>
-              </a:srgbClr>
-            </a:solidFill>
-            <a:prstDash val="solid"/>
-          </a:ln>
-        </p:spPr>
-        <p:txBody>
-          <a:bodyPr xmlns:a="http://schemas.openxmlformats.org/drawingml/2006/main" lIns="0" tIns="0" rIns="0" bIns="0" anchor="t"/>
-          <a:lstStyle xmlns:a="http://schemas.openxmlformats.org/drawingml/2006/main"/>
-          <a:p xmlns:a="http://schemas.openxmlformats.org/drawingml/2006/main">
+          <a:prstGeom prst="rect">
+            <a:avLst/>
+          </a:prstGeom>
+          <a:solidFill>
+            <a:srgbClr val="000000">
+              <a:alpha val="0"/>
+            </a:srgbClr>
+          </a:solidFill>
+          <a:ln w="0">
+            <a:solidFill>
+              <a:srgbClr val="000000">
+                <a:alpha val="0"/>
+              </a:srgbClr>
+            </a:solidFill>
+            <a:prstDash val="solid"/>
+          </a:ln>
+        </p:spPr>
+        <p:txBody>
+          <a:bodyPr lIns="0" tIns="0" rIns="0" bIns="0" anchor="t"/>
+          <a:lstStyle/>
+          <a:p>
             <a:pPr algn="l">
               <a:defRPr sz="1275" b="1">
                 <a:solidFill>
@@ -3851,7 +3851,7 @@
                 <a:ea typeface="Microsoft YaHei"/>
                 <a:cs typeface="Microsoft YaHei"/>
               </a:rPr>
-              <a:t>Small sample</a:t>
+              <a:t>Unbalanced groups</a:t>
             </a:r>
           </a:p>
         </p:txBody>
@@ -3859,43 +3859,43 @@
       <p:sp>
         <p:nvSpPr>
           <p:cNvPr id="11" name="">
-            <a:extLst xmlns:a="http://schemas.openxmlformats.org/drawingml/2006/main">
-              <a:ext uri="{FF2B5EF4-FFF2-40B4-BE49-F238E27FC236}">
-                <a16:creationId xmlns:a16="http://schemas.microsoft.com/office/drawing/2014/main" id="{C3A88BFA-5DC3-4B2F-A35E-8652599AF849}"/>
-              </a:ext>
-            </a:extLst>
-          </p:cNvPr>
-          <p:cNvSpPr>
-            <a:spLocks xmlns:a="http://schemas.openxmlformats.org/drawingml/2006/main" noGrp="1"/>
-          </p:cNvSpPr>
-          <p:nvPr/>
-        </p:nvSpPr>
-        <p:spPr>
-          <a:xfrm xmlns:a="http://schemas.openxmlformats.org/drawingml/2006/main">
+            <a:extLst>
+              <a:ext uri="{FF2B5EF4-FFF2-40B4-BE49-F238E27FC236}">
+                <ns2:creationId id="{C3A88BFA-5DC3-4B2F-A35E-8652599AF849}"/>
+              </a:ext>
+            </a:extLst>
+          </p:cNvPr>
+          <p:cNvSpPr>
+            <a:spLocks noGrp="1"/>
+          </p:cNvSpPr>
+          <p:nvPr/>
+        </p:nvSpPr>
+        <p:spPr>
+          <a:xfrm>
             <a:off x="1085850" y="3800475"/>
             <a:ext cx="4333875" cy="514350"/>
           </a:xfrm>
-          <a:prstGeom xmlns:a="http://schemas.openxmlformats.org/drawingml/2006/main" prst="rect">
-            <a:avLst/>
-          </a:prstGeom>
-          <a:solidFill xmlns:a="http://schemas.openxmlformats.org/drawingml/2006/main">
-            <a:srgbClr val="000000">
-              <a:alpha val="0"/>
-            </a:srgbClr>
-          </a:solidFill>
-          <a:ln xmlns:a="http://schemas.openxmlformats.org/drawingml/2006/main" w="0">
-            <a:solidFill>
-              <a:srgbClr val="000000">
-                <a:alpha val="0"/>
-              </a:srgbClr>
-            </a:solidFill>
-            <a:prstDash val="solid"/>
-          </a:ln>
-        </p:spPr>
-        <p:txBody>
-          <a:bodyPr xmlns:a="http://schemas.openxmlformats.org/drawingml/2006/main" lIns="0" tIns="0" rIns="0" bIns="0" anchor="t"/>
-          <a:lstStyle xmlns:a="http://schemas.openxmlformats.org/drawingml/2006/main"/>
-          <a:p xmlns:a="http://schemas.openxmlformats.org/drawingml/2006/main">
+          <a:prstGeom prst="rect">
+            <a:avLst/>
+          </a:prstGeom>
+          <a:solidFill>
+            <a:srgbClr val="000000">
+              <a:alpha val="0"/>
+            </a:srgbClr>
+          </a:solidFill>
+          <a:ln w="0">
+            <a:solidFill>
+              <a:srgbClr val="000000">
+                <a:alpha val="0"/>
+              </a:srgbClr>
+            </a:solidFill>
+            <a:prstDash val="solid"/>
+          </a:ln>
+        </p:spPr>
+        <p:txBody>
+          <a:bodyPr lIns="0" tIns="0" rIns="0" bIns="0" anchor="t"/>
+          <a:lstStyle/>
+          <a:p>
             <a:pPr algn="l">
               <a:defRPr sz="975" b="0">
                 <a:solidFill>
@@ -3915,7 +3915,7 @@
                 <a:ea typeface="Microsoft YaHei"/>
                 <a:cs typeface="Microsoft YaHei"/>
               </a:rPr>
-              <a:t>32 survey respondents and 3 interviewees from a limited campus context.</a:t>
+              <a:t>Only 5 frequent free-weight users; group tests are exploratory.</a:t>
             </a:r>
           </a:p>
         </p:txBody>
@@ -3923,29 +3923,29 @@
       <p:sp>
         <p:nvSpPr>
           <p:cNvPr id="12" name="">
-            <a:extLst xmlns:a="http://schemas.openxmlformats.org/drawingml/2006/main">
-              <a:ext uri="{FF2B5EF4-FFF2-40B4-BE49-F238E27FC236}">
-                <a16:creationId xmlns:a16="http://schemas.microsoft.com/office/drawing/2014/main" id="{4F8CC4CA-B30A-4164-A846-DEC2B9B6203C}"/>
-              </a:ext>
-            </a:extLst>
-          </p:cNvPr>
-          <p:cNvSpPr>
-            <a:spLocks xmlns:a="http://schemas.openxmlformats.org/drawingml/2006/main" noGrp="1"/>
-          </p:cNvSpPr>
-          <p:nvPr/>
-        </p:nvSpPr>
-        <p:spPr>
-          <a:xfrm xmlns:a="http://schemas.openxmlformats.org/drawingml/2006/main">
+            <a:extLst>
+              <a:ext uri="{FF2B5EF4-FFF2-40B4-BE49-F238E27FC236}">
+                <ns2:creationId id="{4F8CC4CA-B30A-4164-A846-DEC2B9B6203C}"/>
+              </a:ext>
+            </a:extLst>
+          </p:cNvPr>
+          <p:cNvSpPr>
+            <a:spLocks noGrp="1"/>
+          </p:cNvSpPr>
+          <p:nvPr/>
+        </p:nvSpPr>
+        <p:spPr>
+          <a:xfrm>
             <a:off x="876300" y="4686300"/>
             <a:ext cx="85725" cy="85725"/>
           </a:xfrm>
-          <a:prstGeom xmlns:a="http://schemas.openxmlformats.org/drawingml/2006/main" prst="rect">
-            <a:avLst/>
-          </a:prstGeom>
-          <a:solidFill xmlns:a="http://schemas.openxmlformats.org/drawingml/2006/main">
+          <a:prstGeom prst="rect">
+            <a:avLst/>
+          </a:prstGeom>
+          <a:solidFill>
             <a:srgbClr val="2F7C77"/>
           </a:solidFill>
-          <a:ln xmlns:a="http://schemas.openxmlformats.org/drawingml/2006/main" w="0">
+          <a:ln w="0">
             <a:solidFill>
               <a:srgbClr val="000000">
                 <a:alpha val="0"/>
@@ -3958,43 +3958,43 @@
       <p:sp>
         <p:nvSpPr>
           <p:cNvPr id="13" name="">
-            <a:extLst xmlns:a="http://schemas.openxmlformats.org/drawingml/2006/main">
-              <a:ext uri="{FF2B5EF4-FFF2-40B4-BE49-F238E27FC236}">
-                <a16:creationId xmlns:a16="http://schemas.microsoft.com/office/drawing/2014/main" id="{28D9EE75-69B8-4FD4-8EDB-C5A374ED0873}"/>
-              </a:ext>
-            </a:extLst>
-          </p:cNvPr>
-          <p:cNvSpPr>
-            <a:spLocks xmlns:a="http://schemas.openxmlformats.org/drawingml/2006/main" noGrp="1"/>
-          </p:cNvSpPr>
-          <p:nvPr/>
-        </p:nvSpPr>
-        <p:spPr>
-          <a:xfrm xmlns:a="http://schemas.openxmlformats.org/drawingml/2006/main">
+            <a:extLst>
+              <a:ext uri="{FF2B5EF4-FFF2-40B4-BE49-F238E27FC236}">
+                <ns2:creationId id="{28D9EE75-69B8-4FD4-8EDB-C5A374ED0873}"/>
+              </a:ext>
+            </a:extLst>
+          </p:cNvPr>
+          <p:cNvSpPr>
+            <a:spLocks noGrp="1"/>
+          </p:cNvSpPr>
+          <p:nvPr/>
+        </p:nvSpPr>
+        <p:spPr>
+          <a:xfrm>
             <a:off x="1085850" y="4629150"/>
             <a:ext cx="3810000" cy="247650"/>
           </a:xfrm>
-          <a:prstGeom xmlns:a="http://schemas.openxmlformats.org/drawingml/2006/main" prst="rect">
-            <a:avLst/>
-          </a:prstGeom>
-          <a:solidFill xmlns:a="http://schemas.openxmlformats.org/drawingml/2006/main">
-            <a:srgbClr val="000000">
-              <a:alpha val="0"/>
-            </a:srgbClr>
-          </a:solidFill>
-          <a:ln xmlns:a="http://schemas.openxmlformats.org/drawingml/2006/main" w="0">
-            <a:solidFill>
-              <a:srgbClr val="000000">
-                <a:alpha val="0"/>
-              </a:srgbClr>
-            </a:solidFill>
-            <a:prstDash val="solid"/>
-          </a:ln>
-        </p:spPr>
-        <p:txBody>
-          <a:bodyPr xmlns:a="http://schemas.openxmlformats.org/drawingml/2006/main" lIns="0" tIns="0" rIns="0" bIns="0" anchor="t"/>
-          <a:lstStyle xmlns:a="http://schemas.openxmlformats.org/drawingml/2006/main"/>
-          <a:p xmlns:a="http://schemas.openxmlformats.org/drawingml/2006/main">
+          <a:prstGeom prst="rect">
+            <a:avLst/>
+          </a:prstGeom>
+          <a:solidFill>
+            <a:srgbClr val="000000">
+              <a:alpha val="0"/>
+            </a:srgbClr>
+          </a:solidFill>
+          <a:ln w="0">
+            <a:solidFill>
+              <a:srgbClr val="000000">
+                <a:alpha val="0"/>
+              </a:srgbClr>
+            </a:solidFill>
+            <a:prstDash val="solid"/>
+          </a:ln>
+        </p:spPr>
+        <p:txBody>
+          <a:bodyPr lIns="0" tIns="0" rIns="0" bIns="0" anchor="t"/>
+          <a:lstStyle/>
+          <a:p>
             <a:pPr algn="l">
               <a:defRPr sz="1275" b="1">
                 <a:solidFill>
@@ -4022,43 +4022,43 @@
       <p:sp>
         <p:nvSpPr>
           <p:cNvPr id="14" name="">
-            <a:extLst xmlns:a="http://schemas.openxmlformats.org/drawingml/2006/main">
-              <a:ext uri="{FF2B5EF4-FFF2-40B4-BE49-F238E27FC236}">
-                <a16:creationId xmlns:a16="http://schemas.microsoft.com/office/drawing/2014/main" id="{B19EB96E-18E7-4605-B78A-A0BC90CC0AD7}"/>
-              </a:ext>
-            </a:extLst>
-          </p:cNvPr>
-          <p:cNvSpPr>
-            <a:spLocks xmlns:a="http://schemas.openxmlformats.org/drawingml/2006/main" noGrp="1"/>
-          </p:cNvSpPr>
-          <p:nvPr/>
-        </p:nvSpPr>
-        <p:spPr>
-          <a:xfrm xmlns:a="http://schemas.openxmlformats.org/drawingml/2006/main">
+            <a:extLst>
+              <a:ext uri="{FF2B5EF4-FFF2-40B4-BE49-F238E27FC236}">
+                <ns2:creationId id="{B19EB96E-18E7-4605-B78A-A0BC90CC0AD7}"/>
+              </a:ext>
+            </a:extLst>
+          </p:cNvPr>
+          <p:cNvSpPr>
+            <a:spLocks noGrp="1"/>
+          </p:cNvSpPr>
+          <p:nvPr/>
+        </p:nvSpPr>
+        <p:spPr>
+          <a:xfrm>
             <a:off x="1085850" y="4905375"/>
             <a:ext cx="4333875" cy="514350"/>
           </a:xfrm>
-          <a:prstGeom xmlns:a="http://schemas.openxmlformats.org/drawingml/2006/main" prst="rect">
-            <a:avLst/>
-          </a:prstGeom>
-          <a:solidFill xmlns:a="http://schemas.openxmlformats.org/drawingml/2006/main">
-            <a:srgbClr val="000000">
-              <a:alpha val="0"/>
-            </a:srgbClr>
-          </a:solidFill>
-          <a:ln xmlns:a="http://schemas.openxmlformats.org/drawingml/2006/main" w="0">
-            <a:solidFill>
-              <a:srgbClr val="000000">
-                <a:alpha val="0"/>
-              </a:srgbClr>
-            </a:solidFill>
-            <a:prstDash val="solid"/>
-          </a:ln>
-        </p:spPr>
-        <p:txBody>
-          <a:bodyPr xmlns:a="http://schemas.openxmlformats.org/drawingml/2006/main" lIns="0" tIns="0" rIns="0" bIns="0" anchor="t"/>
-          <a:lstStyle xmlns:a="http://schemas.openxmlformats.org/drawingml/2006/main"/>
-          <a:p xmlns:a="http://schemas.openxmlformats.org/drawingml/2006/main">
+          <a:prstGeom prst="rect">
+            <a:avLst/>
+          </a:prstGeom>
+          <a:solidFill>
+            <a:srgbClr val="000000">
+              <a:alpha val="0"/>
+            </a:srgbClr>
+          </a:solidFill>
+          <a:ln w="0">
+            <a:solidFill>
+              <a:srgbClr val="000000">
+                <a:alpha val="0"/>
+              </a:srgbClr>
+            </a:solidFill>
+            <a:prstDash val="solid"/>
+          </a:ln>
+        </p:spPr>
+        <p:txBody>
+          <a:bodyPr lIns="0" tIns="0" rIns="0" bIns="0" anchor="t"/>
+          <a:lstStyle/>
+          <a:p>
             <a:pPr algn="l">
               <a:defRPr sz="975" b="0">
                 <a:solidFill>
@@ -4078,7 +4078,7 @@
                 <a:ea typeface="Microsoft YaHei"/>
                 <a:cs typeface="Microsoft YaHei"/>
               </a:rPr>
-              <a:t>Contextualized items, not full validated scales; some multi-choice export blanks.</a:t>
+              <a:t>Contextualized short items, not full validated scales.</a:t>
             </a:r>
           </a:p>
         </p:txBody>
@@ -4086,29 +4086,29 @@
       <p:sp>
         <p:nvSpPr>
           <p:cNvPr id="15" name="">
-            <a:extLst xmlns:a="http://schemas.openxmlformats.org/drawingml/2006/main">
-              <a:ext uri="{FF2B5EF4-FFF2-40B4-BE49-F238E27FC236}">
-                <a16:creationId xmlns:a16="http://schemas.microsoft.com/office/drawing/2014/main" id="{82EA24E0-E88E-486A-BBCE-050384110E43}"/>
-              </a:ext>
-            </a:extLst>
-          </p:cNvPr>
-          <p:cNvSpPr>
-            <a:spLocks xmlns:a="http://schemas.openxmlformats.org/drawingml/2006/main" noGrp="1"/>
-          </p:cNvSpPr>
-          <p:nvPr/>
-        </p:nvSpPr>
-        <p:spPr>
-          <a:xfrm xmlns:a="http://schemas.openxmlformats.org/drawingml/2006/main">
+            <a:extLst>
+              <a:ext uri="{FF2B5EF4-FFF2-40B4-BE49-F238E27FC236}">
+                <ns2:creationId id="{82EA24E0-E88E-486A-BBCE-050384110E43}"/>
+              </a:ext>
+            </a:extLst>
+          </p:cNvPr>
+          <p:cNvSpPr>
+            <a:spLocks noGrp="1"/>
+          </p:cNvSpPr>
+          <p:nvPr/>
+        </p:nvSpPr>
+        <p:spPr>
+          <a:xfrm>
             <a:off x="6858000" y="2457450"/>
             <a:ext cx="3048000" cy="2381250"/>
           </a:xfrm>
-          <a:prstGeom xmlns:a="http://schemas.openxmlformats.org/drawingml/2006/main" prst="rect">
-            <a:avLst/>
-          </a:prstGeom>
-          <a:solidFill xmlns:a="http://schemas.openxmlformats.org/drawingml/2006/main">
+          <a:prstGeom prst="rect">
+            <a:avLst/>
+          </a:prstGeom>
+          <a:solidFill>
             <a:srgbClr val="182026"/>
           </a:solidFill>
-          <a:ln xmlns:a="http://schemas.openxmlformats.org/drawingml/2006/main" w="0">
+          <a:ln w="0">
             <a:solidFill>
               <a:srgbClr val="000000">
                 <a:alpha val="0"/>
@@ -4121,43 +4121,43 @@
       <p:sp>
         <p:nvSpPr>
           <p:cNvPr id="16" name="">
-            <a:extLst xmlns:a="http://schemas.openxmlformats.org/drawingml/2006/main">
-              <a:ext uri="{FF2B5EF4-FFF2-40B4-BE49-F238E27FC236}">
-                <a16:creationId xmlns:a16="http://schemas.microsoft.com/office/drawing/2014/main" id="{A3E0475B-0A82-402B-9BCB-A4CB475B2A20}"/>
-              </a:ext>
-            </a:extLst>
-          </p:cNvPr>
-          <p:cNvSpPr>
-            <a:spLocks xmlns:a="http://schemas.openxmlformats.org/drawingml/2006/main" noGrp="1"/>
-          </p:cNvSpPr>
-          <p:nvPr/>
-        </p:nvSpPr>
-        <p:spPr>
-          <a:xfrm xmlns:a="http://schemas.openxmlformats.org/drawingml/2006/main">
+            <a:extLst>
+              <a:ext uri="{FF2B5EF4-FFF2-40B4-BE49-F238E27FC236}">
+                <ns2:creationId id="{A3E0475B-0A82-402B-9BCB-A4CB475B2A20}"/>
+              </a:ext>
+            </a:extLst>
+          </p:cNvPr>
+          <p:cNvSpPr>
+            <a:spLocks noGrp="1"/>
+          </p:cNvSpPr>
+          <p:nvPr/>
+        </p:nvSpPr>
+        <p:spPr>
+          <a:xfrm>
             <a:off x="7181850" y="2914650"/>
             <a:ext cx="2381250" cy="1333500"/>
           </a:xfrm>
-          <a:prstGeom xmlns:a="http://schemas.openxmlformats.org/drawingml/2006/main" prst="rect">
-            <a:avLst/>
-          </a:prstGeom>
-          <a:solidFill xmlns:a="http://schemas.openxmlformats.org/drawingml/2006/main">
-            <a:srgbClr val="000000">
-              <a:alpha val="0"/>
-            </a:srgbClr>
-          </a:solidFill>
-          <a:ln xmlns:a="http://schemas.openxmlformats.org/drawingml/2006/main" w="0">
-            <a:solidFill>
-              <a:srgbClr val="000000">
-                <a:alpha val="0"/>
-              </a:srgbClr>
-            </a:solidFill>
-            <a:prstDash val="solid"/>
-          </a:ln>
-        </p:spPr>
-        <p:txBody>
-          <a:bodyPr xmlns:a="http://schemas.openxmlformats.org/drawingml/2006/main" lIns="0" tIns="0" rIns="0" bIns="0" anchor="t"/>
-          <a:lstStyle xmlns:a="http://schemas.openxmlformats.org/drawingml/2006/main"/>
-          <a:p xmlns:a="http://schemas.openxmlformats.org/drawingml/2006/main">
+          <a:prstGeom prst="rect">
+            <a:avLst/>
+          </a:prstGeom>
+          <a:solidFill>
+            <a:srgbClr val="000000">
+              <a:alpha val="0"/>
+            </a:srgbClr>
+          </a:solidFill>
+          <a:ln w="0">
+            <a:solidFill>
+              <a:srgbClr val="000000">
+                <a:alpha val="0"/>
+              </a:srgbClr>
+            </a:solidFill>
+            <a:prstDash val="solid"/>
+          </a:ln>
+        </p:spPr>
+        <p:txBody>
+          <a:bodyPr lIns="0" tIns="0" rIns="0" bIns="0" anchor="t"/>
+          <a:lstStyle/>
+          <a:p>
             <a:pPr algn="ctr">
               <a:defRPr sz="1875" b="1">
                 <a:solidFill>
@@ -4180,7 +4180,7 @@
               <a:t>What we can claim:</a:t>
             </a:r>
           </a:p>
-          <a:p xmlns:a="http://schemas.openxmlformats.org/drawingml/2006/main">
+          <a:p>
             <a:pPr algn="ctr">
               <a:defRPr sz="1875" b="1">
                 <a:solidFill>
@@ -4200,7 +4200,7 @@
                 <a:ea typeface="Georgia"/>
                 <a:cs typeface="Georgia"/>
               </a:rPr>
-              <a:t>which barriers were most visible in this sample.</a:t>
+              <a:t>associations and patterns in this sample, not causality.</a:t>
             </a:r>
           </a:p>
         </p:txBody>
@@ -4208,29 +4208,29 @@
       <p:sp>
         <p:nvSpPr>
           <p:cNvPr id="17" name="">
-            <a:extLst xmlns:a="http://schemas.openxmlformats.org/drawingml/2006/main">
-              <a:ext uri="{FF2B5EF4-FFF2-40B4-BE49-F238E27FC236}">
-                <a16:creationId xmlns:a16="http://schemas.microsoft.com/office/drawing/2014/main" id="{53EF21F7-6070-4132-A5BE-2B1C1100A2CD}"/>
-              </a:ext>
-            </a:extLst>
-          </p:cNvPr>
-          <p:cNvSpPr>
-            <a:spLocks xmlns:a="http://schemas.openxmlformats.org/drawingml/2006/main" noGrp="1"/>
-          </p:cNvSpPr>
-          <p:nvPr/>
-        </p:nvSpPr>
-        <p:spPr>
-          <a:xfrm xmlns:a="http://schemas.openxmlformats.org/drawingml/2006/main">
+            <a:extLst>
+              <a:ext uri="{FF2B5EF4-FFF2-40B4-BE49-F238E27FC236}">
+                <ns2:creationId id="{53EF21F7-6070-4132-A5BE-2B1C1100A2CD}"/>
+              </a:ext>
+            </a:extLst>
+          </p:cNvPr>
+          <p:cNvSpPr>
+            <a:spLocks noGrp="1"/>
+          </p:cNvSpPr>
+          <p:nvPr/>
+        </p:nvSpPr>
+        <p:spPr>
+          <a:xfrm>
             <a:off x="609600" y="6334125"/>
             <a:ext cx="9810750" cy="9525"/>
           </a:xfrm>
-          <a:prstGeom xmlns:a="http://schemas.openxmlformats.org/drawingml/2006/main" prst="rect">
-            <a:avLst/>
-          </a:prstGeom>
-          <a:solidFill xmlns:a="http://schemas.openxmlformats.org/drawingml/2006/main">
+          <a:prstGeom prst="rect">
+            <a:avLst/>
+          </a:prstGeom>
+          <a:solidFill>
             <a:srgbClr val="E2D8C9"/>
           </a:solidFill>
-          <a:ln xmlns:a="http://schemas.openxmlformats.org/drawingml/2006/main" w="0">
+          <a:ln w="0">
             <a:solidFill>
               <a:srgbClr val="000000">
                 <a:alpha val="0"/>
@@ -4243,43 +4243,43 @@
       <p:sp>
         <p:nvSpPr>
           <p:cNvPr id="18" name="">
-            <a:extLst xmlns:a="http://schemas.openxmlformats.org/drawingml/2006/main">
-              <a:ext uri="{FF2B5EF4-FFF2-40B4-BE49-F238E27FC236}">
-                <a16:creationId xmlns:a16="http://schemas.microsoft.com/office/drawing/2014/main" id="{0D59C640-DFF6-4134-BA62-9F0F34ADAAB7}"/>
-              </a:ext>
-            </a:extLst>
-          </p:cNvPr>
-          <p:cNvSpPr>
-            <a:spLocks xmlns:a="http://schemas.openxmlformats.org/drawingml/2006/main" noGrp="1"/>
-          </p:cNvSpPr>
-          <p:nvPr/>
-        </p:nvSpPr>
-        <p:spPr>
-          <a:xfrm xmlns:a="http://schemas.openxmlformats.org/drawingml/2006/main">
+            <a:extLst>
+              <a:ext uri="{FF2B5EF4-FFF2-40B4-BE49-F238E27FC236}">
+                <ns2:creationId id="{0D59C640-DFF6-4134-BA62-9F0F34ADAAB7}"/>
+              </a:ext>
+            </a:extLst>
+          </p:cNvPr>
+          <p:cNvSpPr>
+            <a:spLocks noGrp="1"/>
+          </p:cNvSpPr>
+          <p:nvPr/>
+        </p:nvSpPr>
+        <p:spPr>
+          <a:xfrm>
             <a:off x="609600" y="6419850"/>
             <a:ext cx="7239000" cy="228600"/>
           </a:xfrm>
-          <a:prstGeom xmlns:a="http://schemas.openxmlformats.org/drawingml/2006/main" prst="rect">
-            <a:avLst/>
-          </a:prstGeom>
-          <a:solidFill xmlns:a="http://schemas.openxmlformats.org/drawingml/2006/main">
-            <a:srgbClr val="000000">
-              <a:alpha val="0"/>
-            </a:srgbClr>
-          </a:solidFill>
-          <a:ln xmlns:a="http://schemas.openxmlformats.org/drawingml/2006/main" w="0">
-            <a:solidFill>
-              <a:srgbClr val="000000">
-                <a:alpha val="0"/>
-              </a:srgbClr>
-            </a:solidFill>
-            <a:prstDash val="solid"/>
-          </a:ln>
-        </p:spPr>
-        <p:txBody>
-          <a:bodyPr xmlns:a="http://schemas.openxmlformats.org/drawingml/2006/main" lIns="0" tIns="0" rIns="0" bIns="0" anchor="t"/>
-          <a:lstStyle xmlns:a="http://schemas.openxmlformats.org/drawingml/2006/main"/>
-          <a:p xmlns:a="http://schemas.openxmlformats.org/drawingml/2006/main">
+          <a:prstGeom prst="rect">
+            <a:avLst/>
+          </a:prstGeom>
+          <a:solidFill>
+            <a:srgbClr val="000000">
+              <a:alpha val="0"/>
+            </a:srgbClr>
+          </a:solidFill>
+          <a:ln w="0">
+            <a:solidFill>
+              <a:srgbClr val="000000">
+                <a:alpha val="0"/>
+              </a:srgbClr>
+            </a:solidFill>
+            <a:prstDash val="solid"/>
+          </a:ln>
+        </p:spPr>
+        <p:txBody>
+          <a:bodyPr lIns="0" tIns="0" rIns="0" bIns="0" anchor="t"/>
+          <a:lstStyle/>
+          <a:p>
             <a:pPr algn="l">
               <a:defRPr sz="750" b="0">
                 <a:solidFill>
@@ -4307,43 +4307,43 @@
       <p:sp>
         <p:nvSpPr>
           <p:cNvPr id="19" name="">
-            <a:extLst xmlns:a="http://schemas.openxmlformats.org/drawingml/2006/main">
-              <a:ext uri="{FF2B5EF4-FFF2-40B4-BE49-F238E27FC236}">
-                <a16:creationId xmlns:a16="http://schemas.microsoft.com/office/drawing/2014/main" id="{CC2B2E28-AB6A-492A-854C-A3BEAB029549}"/>
-              </a:ext>
-            </a:extLst>
-          </p:cNvPr>
-          <p:cNvSpPr>
-            <a:spLocks xmlns:a="http://schemas.openxmlformats.org/drawingml/2006/main" noGrp="1"/>
-          </p:cNvSpPr>
-          <p:nvPr/>
-        </p:nvSpPr>
-        <p:spPr>
-          <a:xfrm xmlns:a="http://schemas.openxmlformats.org/drawingml/2006/main">
+            <a:extLst>
+              <a:ext uri="{FF2B5EF4-FFF2-40B4-BE49-F238E27FC236}">
+                <ns2:creationId id="{CC2B2E28-AB6A-492A-854C-A3BEAB029549}"/>
+              </a:ext>
+            </a:extLst>
+          </p:cNvPr>
+          <p:cNvSpPr>
+            <a:spLocks noGrp="1"/>
+          </p:cNvSpPr>
+          <p:nvPr/>
+        </p:nvSpPr>
+        <p:spPr>
+          <a:xfrm>
             <a:off x="10953750" y="6419850"/>
             <a:ext cx="628650" cy="228600"/>
           </a:xfrm>
-          <a:prstGeom xmlns:a="http://schemas.openxmlformats.org/drawingml/2006/main" prst="rect">
-            <a:avLst/>
-          </a:prstGeom>
-          <a:solidFill xmlns:a="http://schemas.openxmlformats.org/drawingml/2006/main">
-            <a:srgbClr val="000000">
-              <a:alpha val="0"/>
-            </a:srgbClr>
-          </a:solidFill>
-          <a:ln xmlns:a="http://schemas.openxmlformats.org/drawingml/2006/main" w="0">
-            <a:solidFill>
-              <a:srgbClr val="000000">
-                <a:alpha val="0"/>
-              </a:srgbClr>
-            </a:solidFill>
-            <a:prstDash val="solid"/>
-          </a:ln>
-        </p:spPr>
-        <p:txBody>
-          <a:bodyPr xmlns:a="http://schemas.openxmlformats.org/drawingml/2006/main" lIns="0" tIns="0" rIns="0" bIns="0" anchor="t"/>
-          <a:lstStyle xmlns:a="http://schemas.openxmlformats.org/drawingml/2006/main"/>
-          <a:p xmlns:a="http://schemas.openxmlformats.org/drawingml/2006/main">
+          <a:prstGeom prst="rect">
+            <a:avLst/>
+          </a:prstGeom>
+          <a:solidFill>
+            <a:srgbClr val="000000">
+              <a:alpha val="0"/>
+            </a:srgbClr>
+          </a:solidFill>
+          <a:ln w="0">
+            <a:solidFill>
+              <a:srgbClr val="000000">
+                <a:alpha val="0"/>
+              </a:srgbClr>
+            </a:solidFill>
+            <a:prstDash val="solid"/>
+          </a:ln>
+        </p:spPr>
+        <p:txBody>
+          <a:bodyPr lIns="0" tIns="0" rIns="0" bIns="0" anchor="t"/>
+          <a:lstStyle/>
+          <a:p>
             <a:pPr algn="r">
               <a:defRPr sz="900" b="1">
                 <a:solidFill>
@@ -4371,7 +4371,7 @@
     </p:spTree>
     <p:extLst>
       <p:ext uri="{BB962C8B-B14F-4D97-AF65-F5344CB8AC3E}">
-        <p14:creationId xmlns:p14="http://schemas.microsoft.com/office/powerpoint/2010/main" val="905499672"/>
+        <ns3:creationId val="905499672"/>
       </p:ext>
     </p:extLst>
   </p:cSld>
@@ -7565,7 +7565,7 @@
 </file>
 
 <file path=ppt/slides/slide4.xml><?xml version="1.0" encoding="utf-8"?>
-<p:sld xmlns:p="http://schemas.openxmlformats.org/presentationml/2006/main">
+<p:sld xmlns:a="http://schemas.openxmlformats.org/drawingml/2006/main" xmlns:ns2="http://schemas.microsoft.com/office/drawing/2014/main" xmlns:ns3="http://schemas.microsoft.com/office/powerpoint/2010/main" xmlns:p="http://schemas.openxmlformats.org/presentationml/2006/main">
   <p:cSld>
     <p:spTree>
       <p:nvGrpSpPr>
@@ -7574,34 +7574,34 @@
         <p:nvPr/>
       </p:nvGrpSpPr>
       <p:grpSpPr>
-        <a:xfrm xmlns:a="http://schemas.openxmlformats.org/drawingml/2006/main"/>
+        <a:xfrm/>
       </p:grpSpPr>
       <p:sp>
         <p:nvSpPr>
           <p:cNvPr id="1" name="">
-            <a:extLst xmlns:a="http://schemas.openxmlformats.org/drawingml/2006/main">
-              <a:ext uri="{FF2B5EF4-FFF2-40B4-BE49-F238E27FC236}">
-                <a16:creationId xmlns:a16="http://schemas.microsoft.com/office/drawing/2014/main" id="{99E6119C-CD11-4260-ACB3-42F9EDA232D3}"/>
-              </a:ext>
-            </a:extLst>
-          </p:cNvPr>
-          <p:cNvSpPr>
-            <a:spLocks xmlns:a="http://schemas.openxmlformats.org/drawingml/2006/main" noGrp="1"/>
-          </p:cNvSpPr>
-          <p:nvPr/>
-        </p:nvSpPr>
-        <p:spPr>
-          <a:xfrm xmlns:a="http://schemas.openxmlformats.org/drawingml/2006/main">
+            <a:extLst>
+              <a:ext uri="{FF2B5EF4-FFF2-40B4-BE49-F238E27FC236}">
+                <ns2:creationId id="{99E6119C-CD11-4260-ACB3-42F9EDA232D3}"/>
+              </a:ext>
+            </a:extLst>
+          </p:cNvPr>
+          <p:cNvSpPr>
+            <a:spLocks noGrp="1"/>
+          </p:cNvSpPr>
+          <p:nvPr/>
+        </p:nvSpPr>
+        <p:spPr>
+          <a:xfrm>
             <a:off x="0" y="0"/>
             <a:ext cx="12192000" cy="6858000"/>
           </a:xfrm>
-          <a:prstGeom xmlns:a="http://schemas.openxmlformats.org/drawingml/2006/main" prst="rect">
-            <a:avLst/>
-          </a:prstGeom>
-          <a:solidFill xmlns:a="http://schemas.openxmlformats.org/drawingml/2006/main">
+          <a:prstGeom prst="rect">
+            <a:avLst/>
+          </a:prstGeom>
+          <a:solidFill>
             <a:srgbClr val="F7F2EA"/>
           </a:solidFill>
-          <a:ln xmlns:a="http://schemas.openxmlformats.org/drawingml/2006/main" w="0">
+          <a:ln w="0">
             <a:solidFill>
               <a:srgbClr val="000000">
                 <a:alpha val="0"/>
@@ -7614,29 +7614,29 @@
       <p:sp>
         <p:nvSpPr>
           <p:cNvPr id="2" name="kicker-4-marker">
-            <a:extLst xmlns:a="http://schemas.openxmlformats.org/drawingml/2006/main">
-              <a:ext uri="{FF2B5EF4-FFF2-40B4-BE49-F238E27FC236}">
-                <a16:creationId xmlns:a16="http://schemas.microsoft.com/office/drawing/2014/main" id="{E8B739B2-7468-4217-9129-6C0D45ACE39C}"/>
-              </a:ext>
-            </a:extLst>
-          </p:cNvPr>
-          <p:cNvSpPr>
-            <a:spLocks xmlns:a="http://schemas.openxmlformats.org/drawingml/2006/main" noGrp="1"/>
-          </p:cNvSpPr>
-          <p:nvPr/>
-        </p:nvSpPr>
-        <p:spPr>
-          <a:xfrm xmlns:a="http://schemas.openxmlformats.org/drawingml/2006/main">
+            <a:extLst>
+              <a:ext uri="{FF2B5EF4-FFF2-40B4-BE49-F238E27FC236}">
+                <ns2:creationId id="{E8B739B2-7468-4217-9129-6C0D45ACE39C}"/>
+              </a:ext>
+            </a:extLst>
+          </p:cNvPr>
+          <p:cNvSpPr>
+            <a:spLocks noGrp="1"/>
+          </p:cNvSpPr>
+          <p:nvPr/>
+        </p:nvSpPr>
+        <p:spPr>
+          <a:xfrm>
             <a:off x="609600" y="457200"/>
             <a:ext cx="95250" cy="95250"/>
           </a:xfrm>
-          <a:prstGeom xmlns:a="http://schemas.openxmlformats.org/drawingml/2006/main" prst="rect">
-            <a:avLst/>
-          </a:prstGeom>
-          <a:solidFill xmlns:a="http://schemas.openxmlformats.org/drawingml/2006/main">
+          <a:prstGeom prst="rect">
+            <a:avLst/>
+          </a:prstGeom>
+          <a:solidFill>
             <a:srgbClr val="B44B3F"/>
           </a:solidFill>
-          <a:ln xmlns:a="http://schemas.openxmlformats.org/drawingml/2006/main" w="0">
+          <a:ln w="0">
             <a:solidFill>
               <a:srgbClr val="000000">
                 <a:alpha val="0"/>
@@ -7649,43 +7649,43 @@
       <p:sp>
         <p:nvSpPr>
           <p:cNvPr id="3" name="kicker-4-label">
-            <a:extLst xmlns:a="http://schemas.openxmlformats.org/drawingml/2006/main">
-              <a:ext uri="{FF2B5EF4-FFF2-40B4-BE49-F238E27FC236}">
-                <a16:creationId xmlns:a16="http://schemas.microsoft.com/office/drawing/2014/main" id="{D57F3C91-6120-4C26-9381-2BA65CAFEA43}"/>
-              </a:ext>
-            </a:extLst>
-          </p:cNvPr>
-          <p:cNvSpPr>
-            <a:spLocks xmlns:a="http://schemas.openxmlformats.org/drawingml/2006/main" noGrp="1"/>
-          </p:cNvSpPr>
-          <p:nvPr/>
-        </p:nvSpPr>
-        <p:spPr>
-          <a:xfrm xmlns:a="http://schemas.openxmlformats.org/drawingml/2006/main">
+            <a:extLst>
+              <a:ext uri="{FF2B5EF4-FFF2-40B4-BE49-F238E27FC236}">
+                <ns2:creationId id="{D57F3C91-6120-4C26-9381-2BA65CAFEA43}"/>
+              </a:ext>
+            </a:extLst>
+          </p:cNvPr>
+          <p:cNvSpPr>
+            <a:spLocks noGrp="1"/>
+          </p:cNvSpPr>
+          <p:nvPr/>
+        </p:nvSpPr>
+        <p:spPr>
+          <a:xfrm>
             <a:off x="800100" y="371475"/>
             <a:ext cx="3429000" cy="266700"/>
           </a:xfrm>
-          <a:prstGeom xmlns:a="http://schemas.openxmlformats.org/drawingml/2006/main" prst="rect">
-            <a:avLst/>
-          </a:prstGeom>
-          <a:solidFill xmlns:a="http://schemas.openxmlformats.org/drawingml/2006/main">
-            <a:srgbClr val="000000">
-              <a:alpha val="0"/>
-            </a:srgbClr>
-          </a:solidFill>
-          <a:ln xmlns:a="http://schemas.openxmlformats.org/drawingml/2006/main" w="0">
-            <a:solidFill>
-              <a:srgbClr val="000000">
-                <a:alpha val="0"/>
-              </a:srgbClr>
-            </a:solidFill>
-            <a:prstDash val="solid"/>
-          </a:ln>
-        </p:spPr>
-        <p:txBody>
-          <a:bodyPr xmlns:a="http://schemas.openxmlformats.org/drawingml/2006/main" lIns="0" tIns="0" rIns="0" bIns="0" anchor="t"/>
-          <a:lstStyle xmlns:a="http://schemas.openxmlformats.org/drawingml/2006/main"/>
-          <a:p xmlns:a="http://schemas.openxmlformats.org/drawingml/2006/main">
+          <a:prstGeom prst="rect">
+            <a:avLst/>
+          </a:prstGeom>
+          <a:solidFill>
+            <a:srgbClr val="000000">
+              <a:alpha val="0"/>
+            </a:srgbClr>
+          </a:solidFill>
+          <a:ln w="0">
+            <a:solidFill>
+              <a:srgbClr val="000000">
+                <a:alpha val="0"/>
+              </a:srgbClr>
+            </a:solidFill>
+            <a:prstDash val="solid"/>
+          </a:ln>
+        </p:spPr>
+        <p:txBody>
+          <a:bodyPr lIns="0" tIns="0" rIns="0" bIns="0" anchor="t"/>
+          <a:lstStyle/>
+          <a:p>
             <a:pPr algn="l">
               <a:defRPr sz="1050" b="1">
                 <a:solidFill>
@@ -7713,43 +7713,43 @@
       <p:sp>
         <p:nvSpPr>
           <p:cNvPr id="4" name="">
-            <a:extLst xmlns:a="http://schemas.openxmlformats.org/drawingml/2006/main">
-              <a:ext uri="{FF2B5EF4-FFF2-40B4-BE49-F238E27FC236}">
-                <a16:creationId xmlns:a16="http://schemas.microsoft.com/office/drawing/2014/main" id="{7D2D1795-0EA5-4401-A45C-E39F0EFCC5E4}"/>
-              </a:ext>
-            </a:extLst>
-          </p:cNvPr>
-          <p:cNvSpPr>
-            <a:spLocks xmlns:a="http://schemas.openxmlformats.org/drawingml/2006/main" noGrp="1"/>
-          </p:cNvSpPr>
-          <p:nvPr/>
-        </p:nvSpPr>
-        <p:spPr>
-          <a:xfrm xmlns:a="http://schemas.openxmlformats.org/drawingml/2006/main">
+            <a:extLst>
+              <a:ext uri="{FF2B5EF4-FFF2-40B4-BE49-F238E27FC236}">
+                <ns2:creationId id="{7D2D1795-0EA5-4401-A45C-E39F0EFCC5E4}"/>
+              </a:ext>
+            </a:extLst>
+          </p:cNvPr>
+          <p:cNvSpPr>
+            <a:spLocks noGrp="1"/>
+          </p:cNvSpPr>
+          <p:nvPr/>
+        </p:nvSpPr>
+        <p:spPr>
+          <a:xfrm>
             <a:off x="609600" y="781050"/>
             <a:ext cx="8096250" cy="914400"/>
           </a:xfrm>
-          <a:prstGeom xmlns:a="http://schemas.openxmlformats.org/drawingml/2006/main" prst="rect">
-            <a:avLst/>
-          </a:prstGeom>
-          <a:solidFill xmlns:a="http://schemas.openxmlformats.org/drawingml/2006/main">
-            <a:srgbClr val="000000">
-              <a:alpha val="0"/>
-            </a:srgbClr>
-          </a:solidFill>
-          <a:ln xmlns:a="http://schemas.openxmlformats.org/drawingml/2006/main" w="0">
-            <a:solidFill>
-              <a:srgbClr val="000000">
-                <a:alpha val="0"/>
-              </a:srgbClr>
-            </a:solidFill>
-            <a:prstDash val="solid"/>
-          </a:ln>
-        </p:spPr>
-        <p:txBody>
-          <a:bodyPr xmlns:a="http://schemas.openxmlformats.org/drawingml/2006/main" lIns="0" tIns="0" rIns="0" bIns="0" anchor="t"/>
-          <a:lstStyle xmlns:a="http://schemas.openxmlformats.org/drawingml/2006/main"/>
-          <a:p xmlns:a="http://schemas.openxmlformats.org/drawingml/2006/main">
+          <a:prstGeom prst="rect">
+            <a:avLst/>
+          </a:prstGeom>
+          <a:solidFill>
+            <a:srgbClr val="000000">
+              <a:alpha val="0"/>
+            </a:srgbClr>
+          </a:solidFill>
+          <a:ln w="0">
+            <a:solidFill>
+              <a:srgbClr val="000000">
+                <a:alpha val="0"/>
+              </a:srgbClr>
+            </a:solidFill>
+            <a:prstDash val="solid"/>
+          </a:ln>
+        </p:spPr>
+        <p:txBody>
+          <a:bodyPr lIns="0" tIns="0" rIns="0" bIns="0" anchor="t"/>
+          <a:lstStyle/>
+          <a:p>
             <a:pPr algn="l">
               <a:defRPr sz="2550" b="1">
                 <a:solidFill>
@@ -7769,7 +7769,7 @@
                 <a:ea typeface="Georgia"/>
                 <a:cs typeface="Georgia"/>
               </a:rPr>
-              <a:t>We use descriptive survey evidence plus interviews, with limits stated clearly.</a:t>
+              <a:t>We use participant-level survey evidence plus interviews, with exploratory limits.</a:t>
             </a:r>
           </a:p>
         </p:txBody>
@@ -7777,43 +7777,43 @@
       <p:sp>
         <p:nvSpPr>
           <p:cNvPr id="5" name="">
-            <a:extLst xmlns:a="http://schemas.openxmlformats.org/drawingml/2006/main">
-              <a:ext uri="{FF2B5EF4-FFF2-40B4-BE49-F238E27FC236}">
-                <a16:creationId xmlns:a16="http://schemas.microsoft.com/office/drawing/2014/main" id="{E80E65CD-2D57-4F43-A04A-98D39F6B12A8}"/>
-              </a:ext>
-            </a:extLst>
-          </p:cNvPr>
-          <p:cNvSpPr>
-            <a:spLocks xmlns:a="http://schemas.openxmlformats.org/drawingml/2006/main" noGrp="1"/>
-          </p:cNvSpPr>
-          <p:nvPr/>
-        </p:nvSpPr>
-        <p:spPr>
-          <a:xfrm xmlns:a="http://schemas.openxmlformats.org/drawingml/2006/main">
+            <a:extLst>
+              <a:ext uri="{FF2B5EF4-FFF2-40B4-BE49-F238E27FC236}">
+                <ns2:creationId id="{E80E65CD-2D57-4F43-A04A-98D39F6B12A8}"/>
+              </a:ext>
+            </a:extLst>
+          </p:cNvPr>
+          <p:cNvSpPr>
+            <a:spLocks noGrp="1"/>
+          </p:cNvSpPr>
+          <p:nvPr/>
+        </p:nvSpPr>
+        <p:spPr>
+          <a:xfrm>
             <a:off x="609600" y="1676400"/>
             <a:ext cx="7429500" cy="381000"/>
           </a:xfrm>
-          <a:prstGeom xmlns:a="http://schemas.openxmlformats.org/drawingml/2006/main" prst="rect">
-            <a:avLst/>
-          </a:prstGeom>
-          <a:solidFill xmlns:a="http://schemas.openxmlformats.org/drawingml/2006/main">
-            <a:srgbClr val="000000">
-              <a:alpha val="0"/>
-            </a:srgbClr>
-          </a:solidFill>
-          <a:ln xmlns:a="http://schemas.openxmlformats.org/drawingml/2006/main" w="0">
-            <a:solidFill>
-              <a:srgbClr val="000000">
-                <a:alpha val="0"/>
-              </a:srgbClr>
-            </a:solidFill>
-            <a:prstDash val="solid"/>
-          </a:ln>
-        </p:spPr>
-        <p:txBody>
-          <a:bodyPr xmlns:a="http://schemas.openxmlformats.org/drawingml/2006/main" lIns="0" tIns="0" rIns="0" bIns="0" anchor="t"/>
-          <a:lstStyle xmlns:a="http://schemas.openxmlformats.org/drawingml/2006/main"/>
-          <a:p xmlns:a="http://schemas.openxmlformats.org/drawingml/2006/main">
+          <a:prstGeom prst="rect">
+            <a:avLst/>
+          </a:prstGeom>
+          <a:solidFill>
+            <a:srgbClr val="000000">
+              <a:alpha val="0"/>
+            </a:srgbClr>
+          </a:solidFill>
+          <a:ln w="0">
+            <a:solidFill>
+              <a:srgbClr val="000000">
+                <a:alpha val="0"/>
+              </a:srgbClr>
+            </a:solidFill>
+            <a:prstDash val="solid"/>
+          </a:ln>
+        </p:spPr>
+        <p:txBody>
+          <a:bodyPr lIns="0" tIns="0" rIns="0" bIns="0" anchor="t"/>
+          <a:lstStyle/>
+          <a:p>
             <a:pPr algn="l">
               <a:defRPr sz="1125" b="0">
                 <a:solidFill>
@@ -7833,7 +7833,7 @@
                 <a:ea typeface="Microsoft YaHei"/>
                 <a:cs typeface="Microsoft YaHei"/>
               </a:rPr>
-              <a:t>当前问卷文件是汇总导出，因此不能做个体层面的推断统计。</a:t>
+              <a:t>这次新增逐名作答矩阵，可做构念得分、信度和探索性相关。</a:t>
             </a:r>
           </a:p>
         </p:txBody>
@@ -7841,43 +7841,43 @@
       <p:sp>
         <p:nvSpPr>
           <p:cNvPr id="6" name="">
-            <a:extLst xmlns:a="http://schemas.openxmlformats.org/drawingml/2006/main">
-              <a:ext uri="{FF2B5EF4-FFF2-40B4-BE49-F238E27FC236}">
-                <a16:creationId xmlns:a16="http://schemas.microsoft.com/office/drawing/2014/main" id="{BDE83722-4D1E-43A8-AF2A-A9F265697D6A}"/>
-              </a:ext>
-            </a:extLst>
-          </p:cNvPr>
-          <p:cNvSpPr>
-            <a:spLocks xmlns:a="http://schemas.openxmlformats.org/drawingml/2006/main" noGrp="1"/>
-          </p:cNvSpPr>
-          <p:nvPr/>
-        </p:nvSpPr>
-        <p:spPr>
-          <a:xfrm xmlns:a="http://schemas.openxmlformats.org/drawingml/2006/main">
+            <a:extLst>
+              <a:ext uri="{FF2B5EF4-FFF2-40B4-BE49-F238E27FC236}">
+                <ns2:creationId id="{BDE83722-4D1E-43A8-AF2A-A9F265697D6A}"/>
+              </a:ext>
+            </a:extLst>
+          </p:cNvPr>
+          <p:cNvSpPr>
+            <a:spLocks noGrp="1"/>
+          </p:cNvSpPr>
+          <p:nvPr/>
+        </p:nvSpPr>
+        <p:spPr>
+          <a:xfrm>
             <a:off x="876300" y="2381250"/>
             <a:ext cx="2286000" cy="609600"/>
           </a:xfrm>
-          <a:prstGeom xmlns:a="http://schemas.openxmlformats.org/drawingml/2006/main" prst="rect">
-            <a:avLst/>
-          </a:prstGeom>
-          <a:solidFill xmlns:a="http://schemas.openxmlformats.org/drawingml/2006/main">
-            <a:srgbClr val="000000">
-              <a:alpha val="0"/>
-            </a:srgbClr>
-          </a:solidFill>
-          <a:ln xmlns:a="http://schemas.openxmlformats.org/drawingml/2006/main" w="0">
-            <a:solidFill>
-              <a:srgbClr val="000000">
-                <a:alpha val="0"/>
-              </a:srgbClr>
-            </a:solidFill>
-            <a:prstDash val="solid"/>
-          </a:ln>
-        </p:spPr>
-        <p:txBody>
-          <a:bodyPr xmlns:a="http://schemas.openxmlformats.org/drawingml/2006/main" lIns="0" tIns="0" rIns="0" bIns="0" anchor="t"/>
-          <a:lstStyle xmlns:a="http://schemas.openxmlformats.org/drawingml/2006/main"/>
-          <a:p xmlns:a="http://schemas.openxmlformats.org/drawingml/2006/main">
+          <a:prstGeom prst="rect">
+            <a:avLst/>
+          </a:prstGeom>
+          <a:solidFill>
+            <a:srgbClr val="000000">
+              <a:alpha val="0"/>
+            </a:srgbClr>
+          </a:solidFill>
+          <a:ln w="0">
+            <a:solidFill>
+              <a:srgbClr val="000000">
+                <a:alpha val="0"/>
+              </a:srgbClr>
+            </a:solidFill>
+            <a:prstDash val="solid"/>
+          </a:ln>
+        </p:spPr>
+        <p:txBody>
+          <a:bodyPr lIns="0" tIns="0" rIns="0" bIns="0" anchor="t"/>
+          <a:lstStyle/>
+          <a:p>
             <a:pPr algn="l">
               <a:defRPr sz="2700" b="1">
                 <a:solidFill>
@@ -7905,43 +7905,43 @@
       <p:sp>
         <p:nvSpPr>
           <p:cNvPr id="7" name="">
-            <a:extLst xmlns:a="http://schemas.openxmlformats.org/drawingml/2006/main">
-              <a:ext uri="{FF2B5EF4-FFF2-40B4-BE49-F238E27FC236}">
-                <a16:creationId xmlns:a16="http://schemas.microsoft.com/office/drawing/2014/main" id="{707FEEB4-76D5-4ECC-ABE9-25FF08637ABD}"/>
-              </a:ext>
-            </a:extLst>
-          </p:cNvPr>
-          <p:cNvSpPr>
-            <a:spLocks xmlns:a="http://schemas.openxmlformats.org/drawingml/2006/main" noGrp="1"/>
-          </p:cNvSpPr>
-          <p:nvPr/>
-        </p:nvSpPr>
-        <p:spPr>
-          <a:xfrm xmlns:a="http://schemas.openxmlformats.org/drawingml/2006/main">
+            <a:extLst>
+              <a:ext uri="{FF2B5EF4-FFF2-40B4-BE49-F238E27FC236}">
+                <ns2:creationId id="{707FEEB4-76D5-4ECC-ABE9-25FF08637ABD}"/>
+              </a:ext>
+            </a:extLst>
+          </p:cNvPr>
+          <p:cNvSpPr>
+            <a:spLocks noGrp="1"/>
+          </p:cNvSpPr>
+          <p:nvPr/>
+        </p:nvSpPr>
+        <p:spPr>
+          <a:xfrm>
             <a:off x="876300" y="2933700"/>
             <a:ext cx="2286000" cy="419100"/>
           </a:xfrm>
-          <a:prstGeom xmlns:a="http://schemas.openxmlformats.org/drawingml/2006/main" prst="rect">
-            <a:avLst/>
-          </a:prstGeom>
-          <a:solidFill xmlns:a="http://schemas.openxmlformats.org/drawingml/2006/main">
-            <a:srgbClr val="000000">
-              <a:alpha val="0"/>
-            </a:srgbClr>
-          </a:solidFill>
-          <a:ln xmlns:a="http://schemas.openxmlformats.org/drawingml/2006/main" w="0">
-            <a:solidFill>
-              <a:srgbClr val="000000">
-                <a:alpha val="0"/>
-              </a:srgbClr>
-            </a:solidFill>
-            <a:prstDash val="solid"/>
-          </a:ln>
-        </p:spPr>
-        <p:txBody>
-          <a:bodyPr xmlns:a="http://schemas.openxmlformats.org/drawingml/2006/main" lIns="0" tIns="0" rIns="0" bIns="0" anchor="t"/>
-          <a:lstStyle xmlns:a="http://schemas.openxmlformats.org/drawingml/2006/main"/>
-          <a:p xmlns:a="http://schemas.openxmlformats.org/drawingml/2006/main">
+          <a:prstGeom prst="rect">
+            <a:avLst/>
+          </a:prstGeom>
+          <a:solidFill>
+            <a:srgbClr val="000000">
+              <a:alpha val="0"/>
+            </a:srgbClr>
+          </a:solidFill>
+          <a:ln w="0">
+            <a:solidFill>
+              <a:srgbClr val="000000">
+                <a:alpha val="0"/>
+              </a:srgbClr>
+            </a:solidFill>
+            <a:prstDash val="solid"/>
+          </a:ln>
+        </p:spPr>
+        <p:txBody>
+          <a:bodyPr lIns="0" tIns="0" rIns="0" bIns="0" anchor="t"/>
+          <a:lstStyle/>
+          <a:p>
             <a:pPr algn="l">
               <a:defRPr sz="975" b="0">
                 <a:solidFill>
@@ -7969,43 +7969,43 @@
       <p:sp>
         <p:nvSpPr>
           <p:cNvPr id="8" name="">
-            <a:extLst xmlns:a="http://schemas.openxmlformats.org/drawingml/2006/main">
-              <a:ext uri="{FF2B5EF4-FFF2-40B4-BE49-F238E27FC236}">
-                <a16:creationId xmlns:a16="http://schemas.microsoft.com/office/drawing/2014/main" id="{F0AE0610-7411-490D-93CF-64B3FFA636A8}"/>
-              </a:ext>
-            </a:extLst>
-          </p:cNvPr>
-          <p:cNvSpPr>
-            <a:spLocks xmlns:a="http://schemas.openxmlformats.org/drawingml/2006/main" noGrp="1"/>
-          </p:cNvSpPr>
-          <p:nvPr/>
-        </p:nvSpPr>
-        <p:spPr>
-          <a:xfrm xmlns:a="http://schemas.openxmlformats.org/drawingml/2006/main">
+            <a:extLst>
+              <a:ext uri="{FF2B5EF4-FFF2-40B4-BE49-F238E27FC236}">
+                <ns2:creationId id="{F0AE0610-7411-490D-93CF-64B3FFA636A8}"/>
+              </a:ext>
+            </a:extLst>
+          </p:cNvPr>
+          <p:cNvSpPr>
+            <a:spLocks noGrp="1"/>
+          </p:cNvSpPr>
+          <p:nvPr/>
+        </p:nvSpPr>
+        <p:spPr>
+          <a:xfrm>
             <a:off x="876300" y="3733800"/>
             <a:ext cx="2286000" cy="609600"/>
           </a:xfrm>
-          <a:prstGeom xmlns:a="http://schemas.openxmlformats.org/drawingml/2006/main" prst="rect">
-            <a:avLst/>
-          </a:prstGeom>
-          <a:solidFill xmlns:a="http://schemas.openxmlformats.org/drawingml/2006/main">
-            <a:srgbClr val="000000">
-              <a:alpha val="0"/>
-            </a:srgbClr>
-          </a:solidFill>
-          <a:ln xmlns:a="http://schemas.openxmlformats.org/drawingml/2006/main" w="0">
-            <a:solidFill>
-              <a:srgbClr val="000000">
-                <a:alpha val="0"/>
-              </a:srgbClr>
-            </a:solidFill>
-            <a:prstDash val="solid"/>
-          </a:ln>
-        </p:spPr>
-        <p:txBody>
-          <a:bodyPr xmlns:a="http://schemas.openxmlformats.org/drawingml/2006/main" lIns="0" tIns="0" rIns="0" bIns="0" anchor="t"/>
-          <a:lstStyle xmlns:a="http://schemas.openxmlformats.org/drawingml/2006/main"/>
-          <a:p xmlns:a="http://schemas.openxmlformats.org/drawingml/2006/main">
+          <a:prstGeom prst="rect">
+            <a:avLst/>
+          </a:prstGeom>
+          <a:solidFill>
+            <a:srgbClr val="000000">
+              <a:alpha val="0"/>
+            </a:srgbClr>
+          </a:solidFill>
+          <a:ln w="0">
+            <a:solidFill>
+              <a:srgbClr val="000000">
+                <a:alpha val="0"/>
+              </a:srgbClr>
+            </a:solidFill>
+            <a:prstDash val="solid"/>
+          </a:ln>
+        </p:spPr>
+        <p:txBody>
+          <a:bodyPr lIns="0" tIns="0" rIns="0" bIns="0" anchor="t"/>
+          <a:lstStyle/>
+          <a:p>
             <a:pPr algn="l">
               <a:defRPr sz="2700" b="1">
                 <a:solidFill>
@@ -8033,43 +8033,43 @@
       <p:sp>
         <p:nvSpPr>
           <p:cNvPr id="9" name="">
-            <a:extLst xmlns:a="http://schemas.openxmlformats.org/drawingml/2006/main">
-              <a:ext uri="{FF2B5EF4-FFF2-40B4-BE49-F238E27FC236}">
-                <a16:creationId xmlns:a16="http://schemas.microsoft.com/office/drawing/2014/main" id="{C0F20EEA-1D39-4C47-8247-8CBC8A61B7BB}"/>
-              </a:ext>
-            </a:extLst>
-          </p:cNvPr>
-          <p:cNvSpPr>
-            <a:spLocks xmlns:a="http://schemas.openxmlformats.org/drawingml/2006/main" noGrp="1"/>
-          </p:cNvSpPr>
-          <p:nvPr/>
-        </p:nvSpPr>
-        <p:spPr>
-          <a:xfrm xmlns:a="http://schemas.openxmlformats.org/drawingml/2006/main">
+            <a:extLst>
+              <a:ext uri="{FF2B5EF4-FFF2-40B4-BE49-F238E27FC236}">
+                <ns2:creationId id="{C0F20EEA-1D39-4C47-8247-8CBC8A61B7BB}"/>
+              </a:ext>
+            </a:extLst>
+          </p:cNvPr>
+          <p:cNvSpPr>
+            <a:spLocks noGrp="1"/>
+          </p:cNvSpPr>
+          <p:nvPr/>
+        </p:nvSpPr>
+        <p:spPr>
+          <a:xfrm>
             <a:off x="876300" y="4286250"/>
             <a:ext cx="2286000" cy="419100"/>
           </a:xfrm>
-          <a:prstGeom xmlns:a="http://schemas.openxmlformats.org/drawingml/2006/main" prst="rect">
-            <a:avLst/>
-          </a:prstGeom>
-          <a:solidFill xmlns:a="http://schemas.openxmlformats.org/drawingml/2006/main">
-            <a:srgbClr val="000000">
-              <a:alpha val="0"/>
-            </a:srgbClr>
-          </a:solidFill>
-          <a:ln xmlns:a="http://schemas.openxmlformats.org/drawingml/2006/main" w="0">
-            <a:solidFill>
-              <a:srgbClr val="000000">
-                <a:alpha val="0"/>
-              </a:srgbClr>
-            </a:solidFill>
-            <a:prstDash val="solid"/>
-          </a:ln>
-        </p:spPr>
-        <p:txBody>
-          <a:bodyPr xmlns:a="http://schemas.openxmlformats.org/drawingml/2006/main" lIns="0" tIns="0" rIns="0" bIns="0" anchor="t"/>
-          <a:lstStyle xmlns:a="http://schemas.openxmlformats.org/drawingml/2006/main"/>
-          <a:p xmlns:a="http://schemas.openxmlformats.org/drawingml/2006/main">
+          <a:prstGeom prst="rect">
+            <a:avLst/>
+          </a:prstGeom>
+          <a:solidFill>
+            <a:srgbClr val="000000">
+              <a:alpha val="0"/>
+            </a:srgbClr>
+          </a:solidFill>
+          <a:ln w="0">
+            <a:solidFill>
+              <a:srgbClr val="000000">
+                <a:alpha val="0"/>
+              </a:srgbClr>
+            </a:solidFill>
+            <a:prstDash val="solid"/>
+          </a:ln>
+        </p:spPr>
+        <p:txBody>
+          <a:bodyPr lIns="0" tIns="0" rIns="0" bIns="0" anchor="t"/>
+          <a:lstStyle/>
+          <a:p>
             <a:pPr algn="l">
               <a:defRPr sz="975" b="0">
                 <a:solidFill>
@@ -8097,29 +8097,29 @@
       <p:sp>
         <p:nvSpPr>
           <p:cNvPr id="10" name="">
-            <a:extLst xmlns:a="http://schemas.openxmlformats.org/drawingml/2006/main">
-              <a:ext uri="{FF2B5EF4-FFF2-40B4-BE49-F238E27FC236}">
-                <a16:creationId xmlns:a16="http://schemas.microsoft.com/office/drawing/2014/main" id="{1501171E-3380-4DA1-83CF-991A5655563A}"/>
-              </a:ext>
-            </a:extLst>
-          </p:cNvPr>
-          <p:cNvSpPr>
-            <a:spLocks xmlns:a="http://schemas.openxmlformats.org/drawingml/2006/main" noGrp="1"/>
-          </p:cNvSpPr>
-          <p:nvPr/>
-        </p:nvSpPr>
-        <p:spPr>
-          <a:xfrm xmlns:a="http://schemas.openxmlformats.org/drawingml/2006/main">
+            <a:extLst>
+              <a:ext uri="{FF2B5EF4-FFF2-40B4-BE49-F238E27FC236}">
+                <ns2:creationId id="{1501171E-3380-4DA1-83CF-991A5655563A}"/>
+              </a:ext>
+            </a:extLst>
+          </p:cNvPr>
+          <p:cNvSpPr>
+            <a:spLocks noGrp="1"/>
+          </p:cNvSpPr>
+          <p:nvPr/>
+        </p:nvSpPr>
+        <p:spPr>
+          <a:xfrm>
             <a:off x="4286250" y="2247900"/>
             <a:ext cx="5715000" cy="2781300"/>
           </a:xfrm>
-          <a:prstGeom xmlns:a="http://schemas.openxmlformats.org/drawingml/2006/main" prst="rect">
-            <a:avLst/>
-          </a:prstGeom>
-          <a:solidFill xmlns:a="http://schemas.openxmlformats.org/drawingml/2006/main">
+          <a:prstGeom prst="rect">
+            <a:avLst/>
+          </a:prstGeom>
+          <a:solidFill>
             <a:srgbClr val="FFFDF8"/>
           </a:solidFill>
-          <a:ln xmlns:a="http://schemas.openxmlformats.org/drawingml/2006/main" w="9525">
+          <a:ln w="9525">
             <a:solidFill>
               <a:srgbClr val="D9CDBB"/>
             </a:solidFill>
@@ -8130,43 +8130,43 @@
       <p:sp>
         <p:nvSpPr>
           <p:cNvPr id="11" name="">
-            <a:extLst xmlns:a="http://schemas.openxmlformats.org/drawingml/2006/main">
-              <a:ext uri="{FF2B5EF4-FFF2-40B4-BE49-F238E27FC236}">
-                <a16:creationId xmlns:a16="http://schemas.microsoft.com/office/drawing/2014/main" id="{31B81515-3F01-4138-B957-5FC7FA448455}"/>
-              </a:ext>
-            </a:extLst>
-          </p:cNvPr>
-          <p:cNvSpPr>
-            <a:spLocks xmlns:a="http://schemas.openxmlformats.org/drawingml/2006/main" noGrp="1"/>
-          </p:cNvSpPr>
-          <p:nvPr/>
-        </p:nvSpPr>
-        <p:spPr>
-          <a:xfrm xmlns:a="http://schemas.openxmlformats.org/drawingml/2006/main">
+            <a:extLst>
+              <a:ext uri="{FF2B5EF4-FFF2-40B4-BE49-F238E27FC236}">
+                <ns2:creationId id="{31B81515-3F01-4138-B957-5FC7FA448455}"/>
+              </a:ext>
+            </a:extLst>
+          </p:cNvPr>
+          <p:cNvSpPr>
+            <a:spLocks noGrp="1"/>
+          </p:cNvSpPr>
+          <p:nvPr/>
+        </p:nvSpPr>
+        <p:spPr>
+          <a:xfrm>
             <a:off x="4610100" y="2533650"/>
             <a:ext cx="4953000" cy="419100"/>
           </a:xfrm>
-          <a:prstGeom xmlns:a="http://schemas.openxmlformats.org/drawingml/2006/main" prst="rect">
-            <a:avLst/>
-          </a:prstGeom>
-          <a:solidFill xmlns:a="http://schemas.openxmlformats.org/drawingml/2006/main">
-            <a:srgbClr val="000000">
-              <a:alpha val="0"/>
-            </a:srgbClr>
-          </a:solidFill>
-          <a:ln xmlns:a="http://schemas.openxmlformats.org/drawingml/2006/main" w="0">
-            <a:solidFill>
-              <a:srgbClr val="000000">
-                <a:alpha val="0"/>
-              </a:srgbClr>
-            </a:solidFill>
-            <a:prstDash val="solid"/>
-          </a:ln>
-        </p:spPr>
-        <p:txBody>
-          <a:bodyPr xmlns:a="http://schemas.openxmlformats.org/drawingml/2006/main" lIns="0" tIns="0" rIns="0" bIns="0" anchor="t"/>
-          <a:lstStyle xmlns:a="http://schemas.openxmlformats.org/drawingml/2006/main"/>
-          <a:p xmlns:a="http://schemas.openxmlformats.org/drawingml/2006/main">
+          <a:prstGeom prst="rect">
+            <a:avLst/>
+          </a:prstGeom>
+          <a:solidFill>
+            <a:srgbClr val="000000">
+              <a:alpha val="0"/>
+            </a:srgbClr>
+          </a:solidFill>
+          <a:ln w="0">
+            <a:solidFill>
+              <a:srgbClr val="000000">
+                <a:alpha val="0"/>
+              </a:srgbClr>
+            </a:solidFill>
+            <a:prstDash val="solid"/>
+          </a:ln>
+        </p:spPr>
+        <p:txBody>
+          <a:bodyPr lIns="0" tIns="0" rIns="0" bIns="0" anchor="t"/>
+          <a:lstStyle/>
+          <a:p>
             <a:pPr algn="l">
               <a:defRPr sz="1800" b="1">
                 <a:solidFill>
@@ -8186,7 +8186,7 @@
                 <a:ea typeface="Georgia"/>
                 <a:cs typeface="Georgia"/>
               </a:rPr>
-              <a:t>What the data can support</a:t>
+              <a:t>What the updated data supports</a:t>
             </a:r>
           </a:p>
         </p:txBody>
@@ -8194,43 +8194,43 @@
       <p:sp>
         <p:nvSpPr>
           <p:cNvPr id="12" name="">
-            <a:extLst xmlns:a="http://schemas.openxmlformats.org/drawingml/2006/main">
-              <a:ext uri="{FF2B5EF4-FFF2-40B4-BE49-F238E27FC236}">
-                <a16:creationId xmlns:a16="http://schemas.microsoft.com/office/drawing/2014/main" id="{7AFB6746-47F6-479E-BD12-EA93E063AD11}"/>
-              </a:ext>
-            </a:extLst>
-          </p:cNvPr>
-          <p:cNvSpPr>
-            <a:spLocks xmlns:a="http://schemas.openxmlformats.org/drawingml/2006/main" noGrp="1"/>
-          </p:cNvSpPr>
-          <p:nvPr/>
-        </p:nvSpPr>
-        <p:spPr>
-          <a:xfrm xmlns:a="http://schemas.openxmlformats.org/drawingml/2006/main">
+            <a:extLst>
+              <a:ext uri="{FF2B5EF4-FFF2-40B4-BE49-F238E27FC236}">
+                <ns2:creationId id="{7AFB6746-47F6-479E-BD12-EA93E063AD11}"/>
+              </a:ext>
+            </a:extLst>
+          </p:cNvPr>
+          <p:cNvSpPr>
+            <a:spLocks noGrp="1"/>
+          </p:cNvSpPr>
+          <p:nvPr/>
+        </p:nvSpPr>
+        <p:spPr>
+          <a:xfrm>
             <a:off x="4629150" y="3219450"/>
             <a:ext cx="2762250" cy="228600"/>
           </a:xfrm>
-          <a:prstGeom xmlns:a="http://schemas.openxmlformats.org/drawingml/2006/main" prst="rect">
-            <a:avLst/>
-          </a:prstGeom>
-          <a:solidFill xmlns:a="http://schemas.openxmlformats.org/drawingml/2006/main">
-            <a:srgbClr val="000000">
-              <a:alpha val="0"/>
-            </a:srgbClr>
-          </a:solidFill>
-          <a:ln xmlns:a="http://schemas.openxmlformats.org/drawingml/2006/main" w="0">
-            <a:solidFill>
-              <a:srgbClr val="000000">
-                <a:alpha val="0"/>
-              </a:srgbClr>
-            </a:solidFill>
-            <a:prstDash val="solid"/>
-          </a:ln>
-        </p:spPr>
-        <p:txBody>
-          <a:bodyPr xmlns:a="http://schemas.openxmlformats.org/drawingml/2006/main" lIns="0" tIns="0" rIns="0" bIns="0" anchor="t"/>
-          <a:lstStyle xmlns:a="http://schemas.openxmlformats.org/drawingml/2006/main"/>
-          <a:p xmlns:a="http://schemas.openxmlformats.org/drawingml/2006/main">
+          <a:prstGeom prst="rect">
+            <a:avLst/>
+          </a:prstGeom>
+          <a:solidFill>
+            <a:srgbClr val="000000">
+              <a:alpha val="0"/>
+            </a:srgbClr>
+          </a:solidFill>
+          <a:ln w="0">
+            <a:solidFill>
+              <a:srgbClr val="000000">
+                <a:alpha val="0"/>
+              </a:srgbClr>
+            </a:solidFill>
+            <a:prstDash val="solid"/>
+          </a:ln>
+        </p:spPr>
+        <p:txBody>
+          <a:bodyPr lIns="0" tIns="0" rIns="0" bIns="0" anchor="t"/>
+          <a:lstStyle/>
+          <a:p>
             <a:pPr algn="l">
               <a:defRPr sz="1050" b="0">
                 <a:solidFill>
@@ -8250,7 +8250,7 @@
                 <a:ea typeface="Microsoft YaHei"/>
                 <a:cs typeface="Microsoft YaHei"/>
               </a:rPr>
-              <a:t>Frequencies and percentages</a:t>
+              <a:t>Frequencies and item means</a:t>
             </a:r>
           </a:p>
         </p:txBody>
@@ -8258,29 +8258,29 @@
       <p:sp>
         <p:nvSpPr>
           <p:cNvPr id="13" name="">
-            <a:extLst xmlns:a="http://schemas.openxmlformats.org/drawingml/2006/main">
-              <a:ext uri="{FF2B5EF4-FFF2-40B4-BE49-F238E27FC236}">
-                <a16:creationId xmlns:a16="http://schemas.microsoft.com/office/drawing/2014/main" id="{92B99F04-C2D7-4ECC-8AF9-B2356CEAE1FD}"/>
-              </a:ext>
-            </a:extLst>
-          </p:cNvPr>
-          <p:cNvSpPr>
-            <a:spLocks xmlns:a="http://schemas.openxmlformats.org/drawingml/2006/main" noGrp="1"/>
-          </p:cNvSpPr>
-          <p:nvPr/>
-        </p:nvSpPr>
-        <p:spPr>
-          <a:xfrm xmlns:a="http://schemas.openxmlformats.org/drawingml/2006/main">
+            <a:extLst>
+              <a:ext uri="{FF2B5EF4-FFF2-40B4-BE49-F238E27FC236}">
+                <ns2:creationId id="{92B99F04-C2D7-4ECC-8AF9-B2356CEAE1FD}"/>
+              </a:ext>
+            </a:extLst>
+          </p:cNvPr>
+          <p:cNvSpPr>
+            <a:spLocks noGrp="1"/>
+          </p:cNvSpPr>
+          <p:nvPr/>
+        </p:nvSpPr>
+        <p:spPr>
+          <a:xfrm>
             <a:off x="7524750" y="3257550"/>
             <a:ext cx="2667000" cy="171450"/>
           </a:xfrm>
-          <a:prstGeom xmlns:a="http://schemas.openxmlformats.org/drawingml/2006/main" prst="rect">
-            <a:avLst/>
-          </a:prstGeom>
-          <a:solidFill xmlns:a="http://schemas.openxmlformats.org/drawingml/2006/main">
+          <a:prstGeom prst="rect">
+            <a:avLst/>
+          </a:prstGeom>
+          <a:solidFill>
             <a:srgbClr val="E7DED0"/>
           </a:solidFill>
-          <a:ln xmlns:a="http://schemas.openxmlformats.org/drawingml/2006/main" w="0">
+          <a:ln w="0">
             <a:solidFill>
               <a:srgbClr val="000000">
                 <a:alpha val="0"/>
@@ -8293,29 +8293,29 @@
       <p:sp>
         <p:nvSpPr>
           <p:cNvPr id="14" name="">
-            <a:extLst xmlns:a="http://schemas.openxmlformats.org/drawingml/2006/main">
-              <a:ext uri="{FF2B5EF4-FFF2-40B4-BE49-F238E27FC236}">
-                <a16:creationId xmlns:a16="http://schemas.microsoft.com/office/drawing/2014/main" id="{ACDB9828-F875-49F3-9AB7-3C4CE316F291}"/>
-              </a:ext>
-            </a:extLst>
-          </p:cNvPr>
-          <p:cNvSpPr>
-            <a:spLocks xmlns:a="http://schemas.openxmlformats.org/drawingml/2006/main" noGrp="1"/>
-          </p:cNvSpPr>
-          <p:nvPr/>
-        </p:nvSpPr>
-        <p:spPr>
-          <a:xfrm xmlns:a="http://schemas.openxmlformats.org/drawingml/2006/main">
+            <a:extLst>
+              <a:ext uri="{FF2B5EF4-FFF2-40B4-BE49-F238E27FC236}">
+                <ns2:creationId id="{ACDB9828-F875-49F3-9AB7-3C4CE316F291}"/>
+              </a:ext>
+            </a:extLst>
+          </p:cNvPr>
+          <p:cNvSpPr>
+            <a:spLocks noGrp="1"/>
+          </p:cNvSpPr>
+          <p:nvPr/>
+        </p:nvSpPr>
+        <p:spPr>
+          <a:xfrm>
             <a:off x="7524750" y="3257550"/>
             <a:ext cx="2667000" cy="171450"/>
           </a:xfrm>
-          <a:prstGeom xmlns:a="http://schemas.openxmlformats.org/drawingml/2006/main" prst="rect">
-            <a:avLst/>
-          </a:prstGeom>
-          <a:solidFill xmlns:a="http://schemas.openxmlformats.org/drawingml/2006/main">
+          <a:prstGeom prst="rect">
+            <a:avLst/>
+          </a:prstGeom>
+          <a:solidFill>
             <a:srgbClr val="6F8E5F"/>
           </a:solidFill>
-          <a:ln xmlns:a="http://schemas.openxmlformats.org/drawingml/2006/main" w="0">
+          <a:ln w="0">
             <a:solidFill>
               <a:srgbClr val="000000">
                 <a:alpha val="0"/>
@@ -8328,43 +8328,43 @@
       <p:sp>
         <p:nvSpPr>
           <p:cNvPr id="15" name="">
-            <a:extLst xmlns:a="http://schemas.openxmlformats.org/drawingml/2006/main">
-              <a:ext uri="{FF2B5EF4-FFF2-40B4-BE49-F238E27FC236}">
-                <a16:creationId xmlns:a16="http://schemas.microsoft.com/office/drawing/2014/main" id="{5EBBE835-7F2F-4F5C-B3E5-FF58996434E3}"/>
-              </a:ext>
-            </a:extLst>
-          </p:cNvPr>
-          <p:cNvSpPr>
-            <a:spLocks xmlns:a="http://schemas.openxmlformats.org/drawingml/2006/main" noGrp="1"/>
-          </p:cNvSpPr>
-          <p:nvPr/>
-        </p:nvSpPr>
-        <p:spPr>
-          <a:xfrm xmlns:a="http://schemas.openxmlformats.org/drawingml/2006/main">
+            <a:extLst>
+              <a:ext uri="{FF2B5EF4-FFF2-40B4-BE49-F238E27FC236}">
+                <ns2:creationId id="{5EBBE835-7F2F-4F5C-B3E5-FF58996434E3}"/>
+              </a:ext>
+            </a:extLst>
+          </p:cNvPr>
+          <p:cNvSpPr>
+            <a:spLocks noGrp="1"/>
+          </p:cNvSpPr>
+          <p:nvPr/>
+        </p:nvSpPr>
+        <p:spPr>
+          <a:xfrm>
             <a:off x="10287000" y="3219450"/>
             <a:ext cx="666750" cy="228600"/>
           </a:xfrm>
-          <a:prstGeom xmlns:a="http://schemas.openxmlformats.org/drawingml/2006/main" prst="rect">
-            <a:avLst/>
-          </a:prstGeom>
-          <a:solidFill xmlns:a="http://schemas.openxmlformats.org/drawingml/2006/main">
-            <a:srgbClr val="000000">
-              <a:alpha val="0"/>
-            </a:srgbClr>
-          </a:solidFill>
-          <a:ln xmlns:a="http://schemas.openxmlformats.org/drawingml/2006/main" w="0">
-            <a:solidFill>
-              <a:srgbClr val="000000">
-                <a:alpha val="0"/>
-              </a:srgbClr>
-            </a:solidFill>
-            <a:prstDash val="solid"/>
-          </a:ln>
-        </p:spPr>
-        <p:txBody>
-          <a:bodyPr xmlns:a="http://schemas.openxmlformats.org/drawingml/2006/main" lIns="0" tIns="0" rIns="0" bIns="0" anchor="t"/>
-          <a:lstStyle xmlns:a="http://schemas.openxmlformats.org/drawingml/2006/main"/>
-          <a:p xmlns:a="http://schemas.openxmlformats.org/drawingml/2006/main">
+          <a:prstGeom prst="rect">
+            <a:avLst/>
+          </a:prstGeom>
+          <a:solidFill>
+            <a:srgbClr val="000000">
+              <a:alpha val="0"/>
+            </a:srgbClr>
+          </a:solidFill>
+          <a:ln w="0">
+            <a:solidFill>
+              <a:srgbClr val="000000">
+                <a:alpha val="0"/>
+              </a:srgbClr>
+            </a:solidFill>
+            <a:prstDash val="solid"/>
+          </a:ln>
+        </p:spPr>
+        <p:txBody>
+          <a:bodyPr lIns="0" tIns="0" rIns="0" bIns="0" anchor="t"/>
+          <a:lstStyle/>
+          <a:p>
             <a:pPr algn="l">
               <a:defRPr sz="1050" b="1">
                 <a:solidFill>
@@ -8392,43 +8392,43 @@
       <p:sp>
         <p:nvSpPr>
           <p:cNvPr id="16" name="">
-            <a:extLst xmlns:a="http://schemas.openxmlformats.org/drawingml/2006/main">
-              <a:ext uri="{FF2B5EF4-FFF2-40B4-BE49-F238E27FC236}">
-                <a16:creationId xmlns:a16="http://schemas.microsoft.com/office/drawing/2014/main" id="{602C3AF0-10D2-48DA-AF7A-DDF92B8AD6CF}"/>
-              </a:ext>
-            </a:extLst>
-          </p:cNvPr>
-          <p:cNvSpPr>
-            <a:spLocks xmlns:a="http://schemas.openxmlformats.org/drawingml/2006/main" noGrp="1"/>
-          </p:cNvSpPr>
-          <p:nvPr/>
-        </p:nvSpPr>
-        <p:spPr>
-          <a:xfrm xmlns:a="http://schemas.openxmlformats.org/drawingml/2006/main">
+            <a:extLst>
+              <a:ext uri="{FF2B5EF4-FFF2-40B4-BE49-F238E27FC236}">
+                <ns2:creationId id="{602C3AF0-10D2-48DA-AF7A-DDF92B8AD6CF}"/>
+              </a:ext>
+            </a:extLst>
+          </p:cNvPr>
+          <p:cNvSpPr>
+            <a:spLocks noGrp="1"/>
+          </p:cNvSpPr>
+          <p:nvPr/>
+        </p:nvSpPr>
+        <p:spPr>
+          <a:xfrm>
             <a:off x="4629150" y="3657600"/>
             <a:ext cx="2762250" cy="228600"/>
           </a:xfrm>
-          <a:prstGeom xmlns:a="http://schemas.openxmlformats.org/drawingml/2006/main" prst="rect">
-            <a:avLst/>
-          </a:prstGeom>
-          <a:solidFill xmlns:a="http://schemas.openxmlformats.org/drawingml/2006/main">
-            <a:srgbClr val="000000">
-              <a:alpha val="0"/>
-            </a:srgbClr>
-          </a:solidFill>
-          <a:ln xmlns:a="http://schemas.openxmlformats.org/drawingml/2006/main" w="0">
-            <a:solidFill>
-              <a:srgbClr val="000000">
-                <a:alpha val="0"/>
-              </a:srgbClr>
-            </a:solidFill>
-            <a:prstDash val="solid"/>
-          </a:ln>
-        </p:spPr>
-        <p:txBody>
-          <a:bodyPr xmlns:a="http://schemas.openxmlformats.org/drawingml/2006/main" lIns="0" tIns="0" rIns="0" bIns="0" anchor="t"/>
-          <a:lstStyle xmlns:a="http://schemas.openxmlformats.org/drawingml/2006/main"/>
-          <a:p xmlns:a="http://schemas.openxmlformats.org/drawingml/2006/main">
+          <a:prstGeom prst="rect">
+            <a:avLst/>
+          </a:prstGeom>
+          <a:solidFill>
+            <a:srgbClr val="000000">
+              <a:alpha val="0"/>
+            </a:srgbClr>
+          </a:solidFill>
+          <a:ln w="0">
+            <a:solidFill>
+              <a:srgbClr val="000000">
+                <a:alpha val="0"/>
+              </a:srgbClr>
+            </a:solidFill>
+            <a:prstDash val="solid"/>
+          </a:ln>
+        </p:spPr>
+        <p:txBody>
+          <a:bodyPr lIns="0" tIns="0" rIns="0" bIns="0" anchor="t"/>
+          <a:lstStyle/>
+          <a:p>
             <a:pPr algn="l">
               <a:defRPr sz="1050" b="0">
                 <a:solidFill>
@@ -8448,7 +8448,7 @@
                 <a:ea typeface="Microsoft YaHei"/>
                 <a:cs typeface="Microsoft YaHei"/>
               </a:rPr>
-              <a:t>Item means and high-score bands</a:t>
+              <a:t>Construct scores + Cronbach's alpha</a:t>
             </a:r>
           </a:p>
         </p:txBody>
@@ -8456,29 +8456,29 @@
       <p:sp>
         <p:nvSpPr>
           <p:cNvPr id="17" name="">
-            <a:extLst xmlns:a="http://schemas.openxmlformats.org/drawingml/2006/main">
-              <a:ext uri="{FF2B5EF4-FFF2-40B4-BE49-F238E27FC236}">
-                <a16:creationId xmlns:a16="http://schemas.microsoft.com/office/drawing/2014/main" id="{01913AC8-871B-4296-AA73-A6E7A11F68C8}"/>
-              </a:ext>
-            </a:extLst>
-          </p:cNvPr>
-          <p:cNvSpPr>
-            <a:spLocks xmlns:a="http://schemas.openxmlformats.org/drawingml/2006/main" noGrp="1"/>
-          </p:cNvSpPr>
-          <p:nvPr/>
-        </p:nvSpPr>
-        <p:spPr>
-          <a:xfrm xmlns:a="http://schemas.openxmlformats.org/drawingml/2006/main">
+            <a:extLst>
+              <a:ext uri="{FF2B5EF4-FFF2-40B4-BE49-F238E27FC236}">
+                <ns2:creationId id="{01913AC8-871B-4296-AA73-A6E7A11F68C8}"/>
+              </a:ext>
+            </a:extLst>
+          </p:cNvPr>
+          <p:cNvSpPr>
+            <a:spLocks noGrp="1"/>
+          </p:cNvSpPr>
+          <p:nvPr/>
+        </p:nvSpPr>
+        <p:spPr>
+          <a:xfrm>
             <a:off x="7524750" y="3695700"/>
             <a:ext cx="2667000" cy="171450"/>
           </a:xfrm>
-          <a:prstGeom xmlns:a="http://schemas.openxmlformats.org/drawingml/2006/main" prst="rect">
-            <a:avLst/>
-          </a:prstGeom>
-          <a:solidFill xmlns:a="http://schemas.openxmlformats.org/drawingml/2006/main">
+          <a:prstGeom prst="rect">
+            <a:avLst/>
+          </a:prstGeom>
+          <a:solidFill>
             <a:srgbClr val="E7DED0"/>
           </a:solidFill>
-          <a:ln xmlns:a="http://schemas.openxmlformats.org/drawingml/2006/main" w="0">
+          <a:ln w="0">
             <a:solidFill>
               <a:srgbClr val="000000">
                 <a:alpha val="0"/>
@@ -8491,29 +8491,29 @@
       <p:sp>
         <p:nvSpPr>
           <p:cNvPr id="18" name="">
-            <a:extLst xmlns:a="http://schemas.openxmlformats.org/drawingml/2006/main">
-              <a:ext uri="{FF2B5EF4-FFF2-40B4-BE49-F238E27FC236}">
-                <a16:creationId xmlns:a16="http://schemas.microsoft.com/office/drawing/2014/main" id="{0DB6126E-1259-4716-BF78-53B481E67176}"/>
-              </a:ext>
-            </a:extLst>
-          </p:cNvPr>
-          <p:cNvSpPr>
-            <a:spLocks xmlns:a="http://schemas.openxmlformats.org/drawingml/2006/main" noGrp="1"/>
-          </p:cNvSpPr>
-          <p:nvPr/>
-        </p:nvSpPr>
-        <p:spPr>
-          <a:xfrm xmlns:a="http://schemas.openxmlformats.org/drawingml/2006/main">
+            <a:extLst>
+              <a:ext uri="{FF2B5EF4-FFF2-40B4-BE49-F238E27FC236}">
+                <ns2:creationId id="{0DB6126E-1259-4716-BF78-53B481E67176}"/>
+              </a:ext>
+            </a:extLst>
+          </p:cNvPr>
+          <p:cNvSpPr>
+            <a:spLocks noGrp="1"/>
+          </p:cNvSpPr>
+          <p:nvPr/>
+        </p:nvSpPr>
+        <p:spPr>
+          <a:xfrm>
             <a:off x="7524750" y="3695700"/>
             <a:ext cx="2667000" cy="171450"/>
           </a:xfrm>
-          <a:prstGeom xmlns:a="http://schemas.openxmlformats.org/drawingml/2006/main" prst="rect">
-            <a:avLst/>
-          </a:prstGeom>
-          <a:solidFill xmlns:a="http://schemas.openxmlformats.org/drawingml/2006/main">
+          <a:prstGeom prst="rect">
+            <a:avLst/>
+          </a:prstGeom>
+          <a:solidFill>
             <a:srgbClr val="C08B32"/>
           </a:solidFill>
-          <a:ln xmlns:a="http://schemas.openxmlformats.org/drawingml/2006/main" w="0">
+          <a:ln w="0">
             <a:solidFill>
               <a:srgbClr val="000000">
                 <a:alpha val="0"/>
@@ -8526,43 +8526,43 @@
       <p:sp>
         <p:nvSpPr>
           <p:cNvPr id="19" name="">
-            <a:extLst xmlns:a="http://schemas.openxmlformats.org/drawingml/2006/main">
-              <a:ext uri="{FF2B5EF4-FFF2-40B4-BE49-F238E27FC236}">
-                <a16:creationId xmlns:a16="http://schemas.microsoft.com/office/drawing/2014/main" id="{87894372-656F-42F4-AD75-8F7840FA2590}"/>
-              </a:ext>
-            </a:extLst>
-          </p:cNvPr>
-          <p:cNvSpPr>
-            <a:spLocks xmlns:a="http://schemas.openxmlformats.org/drawingml/2006/main" noGrp="1"/>
-          </p:cNvSpPr>
-          <p:nvPr/>
-        </p:nvSpPr>
-        <p:spPr>
-          <a:xfrm xmlns:a="http://schemas.openxmlformats.org/drawingml/2006/main">
+            <a:extLst>
+              <a:ext uri="{FF2B5EF4-FFF2-40B4-BE49-F238E27FC236}">
+                <ns2:creationId id="{87894372-656F-42F4-AD75-8F7840FA2590}"/>
+              </a:ext>
+            </a:extLst>
+          </p:cNvPr>
+          <p:cNvSpPr>
+            <a:spLocks noGrp="1"/>
+          </p:cNvSpPr>
+          <p:nvPr/>
+        </p:nvSpPr>
+        <p:spPr>
+          <a:xfrm>
             <a:off x="10287000" y="3657600"/>
             <a:ext cx="666750" cy="228600"/>
           </a:xfrm>
-          <a:prstGeom xmlns:a="http://schemas.openxmlformats.org/drawingml/2006/main" prst="rect">
-            <a:avLst/>
-          </a:prstGeom>
-          <a:solidFill xmlns:a="http://schemas.openxmlformats.org/drawingml/2006/main">
-            <a:srgbClr val="000000">
-              <a:alpha val="0"/>
-            </a:srgbClr>
-          </a:solidFill>
-          <a:ln xmlns:a="http://schemas.openxmlformats.org/drawingml/2006/main" w="0">
-            <a:solidFill>
-              <a:srgbClr val="000000">
-                <a:alpha val="0"/>
-              </a:srgbClr>
-            </a:solidFill>
-            <a:prstDash val="solid"/>
-          </a:ln>
-        </p:spPr>
-        <p:txBody>
-          <a:bodyPr xmlns:a="http://schemas.openxmlformats.org/drawingml/2006/main" lIns="0" tIns="0" rIns="0" bIns="0" anchor="t"/>
-          <a:lstStyle xmlns:a="http://schemas.openxmlformats.org/drawingml/2006/main"/>
-          <a:p xmlns:a="http://schemas.openxmlformats.org/drawingml/2006/main">
+          <a:prstGeom prst="rect">
+            <a:avLst/>
+          </a:prstGeom>
+          <a:solidFill>
+            <a:srgbClr val="000000">
+              <a:alpha val="0"/>
+            </a:srgbClr>
+          </a:solidFill>
+          <a:ln w="0">
+            <a:solidFill>
+              <a:srgbClr val="000000">
+                <a:alpha val="0"/>
+              </a:srgbClr>
+            </a:solidFill>
+            <a:prstDash val="solid"/>
+          </a:ln>
+        </p:spPr>
+        <p:txBody>
+          <a:bodyPr lIns="0" tIns="0" rIns="0" bIns="0" anchor="t"/>
+          <a:lstStyle/>
+          <a:p>
             <a:pPr algn="l">
               <a:defRPr sz="1050" b="1">
                 <a:solidFill>
@@ -8590,43 +8590,43 @@
       <p:sp>
         <p:nvSpPr>
           <p:cNvPr id="20" name="">
-            <a:extLst xmlns:a="http://schemas.openxmlformats.org/drawingml/2006/main">
-              <a:ext uri="{FF2B5EF4-FFF2-40B4-BE49-F238E27FC236}">
-                <a16:creationId xmlns:a16="http://schemas.microsoft.com/office/drawing/2014/main" id="{919F209F-C3E7-4856-8A11-E76FF639D196}"/>
-              </a:ext>
-            </a:extLst>
-          </p:cNvPr>
-          <p:cNvSpPr>
-            <a:spLocks xmlns:a="http://schemas.openxmlformats.org/drawingml/2006/main" noGrp="1"/>
-          </p:cNvSpPr>
-          <p:nvPr/>
-        </p:nvSpPr>
-        <p:spPr>
-          <a:xfrm xmlns:a="http://schemas.openxmlformats.org/drawingml/2006/main">
+            <a:extLst>
+              <a:ext uri="{FF2B5EF4-FFF2-40B4-BE49-F238E27FC236}">
+                <ns2:creationId id="{919F209F-C3E7-4856-8A11-E76FF639D196}"/>
+              </a:ext>
+            </a:extLst>
+          </p:cNvPr>
+          <p:cNvSpPr>
+            <a:spLocks noGrp="1"/>
+          </p:cNvSpPr>
+          <p:nvPr/>
+        </p:nvSpPr>
+        <p:spPr>
+          <a:xfrm>
             <a:off x="4629150" y="4095750"/>
             <a:ext cx="2762250" cy="228600"/>
           </a:xfrm>
-          <a:prstGeom xmlns:a="http://schemas.openxmlformats.org/drawingml/2006/main" prst="rect">
-            <a:avLst/>
-          </a:prstGeom>
-          <a:solidFill xmlns:a="http://schemas.openxmlformats.org/drawingml/2006/main">
-            <a:srgbClr val="000000">
-              <a:alpha val="0"/>
-            </a:srgbClr>
-          </a:solidFill>
-          <a:ln xmlns:a="http://schemas.openxmlformats.org/drawingml/2006/main" w="0">
-            <a:solidFill>
-              <a:srgbClr val="000000">
-                <a:alpha val="0"/>
-              </a:srgbClr>
-            </a:solidFill>
-            <a:prstDash val="solid"/>
-          </a:ln>
-        </p:spPr>
-        <p:txBody>
-          <a:bodyPr xmlns:a="http://schemas.openxmlformats.org/drawingml/2006/main" lIns="0" tIns="0" rIns="0" bIns="0" anchor="t"/>
-          <a:lstStyle xmlns:a="http://schemas.openxmlformats.org/drawingml/2006/main"/>
-          <a:p xmlns:a="http://schemas.openxmlformats.org/drawingml/2006/main">
+          <a:prstGeom prst="rect">
+            <a:avLst/>
+          </a:prstGeom>
+          <a:solidFill>
+            <a:srgbClr val="000000">
+              <a:alpha val="0"/>
+            </a:srgbClr>
+          </a:solidFill>
+          <a:ln w="0">
+            <a:solidFill>
+              <a:srgbClr val="000000">
+                <a:alpha val="0"/>
+              </a:srgbClr>
+            </a:solidFill>
+            <a:prstDash val="solid"/>
+          </a:ln>
+        </p:spPr>
+        <p:txBody>
+          <a:bodyPr lIns="0" tIns="0" rIns="0" bIns="0" anchor="t"/>
+          <a:lstStyle/>
+          <a:p>
             <a:pPr algn="l">
               <a:defRPr sz="1050" b="0">
                 <a:solidFill>
@@ -8646,7 +8646,7 @@
                 <a:ea typeface="Microsoft YaHei"/>
                 <a:cs typeface="Microsoft YaHei"/>
               </a:rPr>
-              <a:t>Interview theme integration</a:t>
+              <a:t>Spearman correlations + group comparisons</a:t>
             </a:r>
           </a:p>
         </p:txBody>
@@ -8654,29 +8654,29 @@
       <p:sp>
         <p:nvSpPr>
           <p:cNvPr id="21" name="">
-            <a:extLst xmlns:a="http://schemas.openxmlformats.org/drawingml/2006/main">
-              <a:ext uri="{FF2B5EF4-FFF2-40B4-BE49-F238E27FC236}">
-                <a16:creationId xmlns:a16="http://schemas.microsoft.com/office/drawing/2014/main" id="{1C526E95-8736-4C20-8E46-095BD4737301}"/>
-              </a:ext>
-            </a:extLst>
-          </p:cNvPr>
-          <p:cNvSpPr>
-            <a:spLocks xmlns:a="http://schemas.openxmlformats.org/drawingml/2006/main" noGrp="1"/>
-          </p:cNvSpPr>
-          <p:nvPr/>
-        </p:nvSpPr>
-        <p:spPr>
-          <a:xfrm xmlns:a="http://schemas.openxmlformats.org/drawingml/2006/main">
+            <a:extLst>
+              <a:ext uri="{FF2B5EF4-FFF2-40B4-BE49-F238E27FC236}">
+                <ns2:creationId id="{1C526E95-8736-4C20-8E46-095BD4737301}"/>
+              </a:ext>
+            </a:extLst>
+          </p:cNvPr>
+          <p:cNvSpPr>
+            <a:spLocks noGrp="1"/>
+          </p:cNvSpPr>
+          <p:nvPr/>
+        </p:nvSpPr>
+        <p:spPr>
+          <a:xfrm>
             <a:off x="7524750" y="4133850"/>
             <a:ext cx="2667000" cy="171450"/>
           </a:xfrm>
-          <a:prstGeom xmlns:a="http://schemas.openxmlformats.org/drawingml/2006/main" prst="rect">
-            <a:avLst/>
-          </a:prstGeom>
-          <a:solidFill xmlns:a="http://schemas.openxmlformats.org/drawingml/2006/main">
+          <a:prstGeom prst="rect">
+            <a:avLst/>
+          </a:prstGeom>
+          <a:solidFill>
             <a:srgbClr val="E7DED0"/>
           </a:solidFill>
-          <a:ln xmlns:a="http://schemas.openxmlformats.org/drawingml/2006/main" w="0">
+          <a:ln w="0">
             <a:solidFill>
               <a:srgbClr val="000000">
                 <a:alpha val="0"/>
@@ -8689,29 +8689,29 @@
       <p:sp>
         <p:nvSpPr>
           <p:cNvPr id="22" name="">
-            <a:extLst xmlns:a="http://schemas.openxmlformats.org/drawingml/2006/main">
-              <a:ext uri="{FF2B5EF4-FFF2-40B4-BE49-F238E27FC236}">
-                <a16:creationId xmlns:a16="http://schemas.microsoft.com/office/drawing/2014/main" id="{5C8F82CB-65D9-4AEC-B0B5-3FD8F908B631}"/>
-              </a:ext>
-            </a:extLst>
-          </p:cNvPr>
-          <p:cNvSpPr>
-            <a:spLocks xmlns:a="http://schemas.openxmlformats.org/drawingml/2006/main" noGrp="1"/>
-          </p:cNvSpPr>
-          <p:nvPr/>
-        </p:nvSpPr>
-        <p:spPr>
-          <a:xfrm xmlns:a="http://schemas.openxmlformats.org/drawingml/2006/main">
+            <a:extLst>
+              <a:ext uri="{FF2B5EF4-FFF2-40B4-BE49-F238E27FC236}">
+                <ns2:creationId id="{5C8F82CB-65D9-4AEC-B0B5-3FD8F908B631}"/>
+              </a:ext>
+            </a:extLst>
+          </p:cNvPr>
+          <p:cNvSpPr>
+            <a:spLocks noGrp="1"/>
+          </p:cNvSpPr>
+          <p:nvPr/>
+        </p:nvSpPr>
+        <p:spPr>
+          <a:xfrm>
             <a:off x="7524750" y="4133850"/>
             <a:ext cx="2667000" cy="171450"/>
           </a:xfrm>
-          <a:prstGeom xmlns:a="http://schemas.openxmlformats.org/drawingml/2006/main" prst="rect">
-            <a:avLst/>
-          </a:prstGeom>
-          <a:solidFill xmlns:a="http://schemas.openxmlformats.org/drawingml/2006/main">
+          <a:prstGeom prst="rect">
+            <a:avLst/>
+          </a:prstGeom>
+          <a:solidFill>
             <a:srgbClr val="2F7C77"/>
           </a:solidFill>
-          <a:ln xmlns:a="http://schemas.openxmlformats.org/drawingml/2006/main" w="0">
+          <a:ln w="0">
             <a:solidFill>
               <a:srgbClr val="000000">
                 <a:alpha val="0"/>
@@ -8724,43 +8724,43 @@
       <p:sp>
         <p:nvSpPr>
           <p:cNvPr id="23" name="">
-            <a:extLst xmlns:a="http://schemas.openxmlformats.org/drawingml/2006/main">
-              <a:ext uri="{FF2B5EF4-FFF2-40B4-BE49-F238E27FC236}">
-                <a16:creationId xmlns:a16="http://schemas.microsoft.com/office/drawing/2014/main" id="{5B537855-E919-4668-A21F-431581A737FB}"/>
-              </a:ext>
-            </a:extLst>
-          </p:cNvPr>
-          <p:cNvSpPr>
-            <a:spLocks xmlns:a="http://schemas.openxmlformats.org/drawingml/2006/main" noGrp="1"/>
-          </p:cNvSpPr>
-          <p:nvPr/>
-        </p:nvSpPr>
-        <p:spPr>
-          <a:xfrm xmlns:a="http://schemas.openxmlformats.org/drawingml/2006/main">
+            <a:extLst>
+              <a:ext uri="{FF2B5EF4-FFF2-40B4-BE49-F238E27FC236}">
+                <ns2:creationId id="{5B537855-E919-4668-A21F-431581A737FB}"/>
+              </a:ext>
+            </a:extLst>
+          </p:cNvPr>
+          <p:cNvSpPr>
+            <a:spLocks noGrp="1"/>
+          </p:cNvSpPr>
+          <p:nvPr/>
+        </p:nvSpPr>
+        <p:spPr>
+          <a:xfrm>
             <a:off x="10287000" y="4095750"/>
             <a:ext cx="666750" cy="228600"/>
           </a:xfrm>
-          <a:prstGeom xmlns:a="http://schemas.openxmlformats.org/drawingml/2006/main" prst="rect">
-            <a:avLst/>
-          </a:prstGeom>
-          <a:solidFill xmlns:a="http://schemas.openxmlformats.org/drawingml/2006/main">
-            <a:srgbClr val="000000">
-              <a:alpha val="0"/>
-            </a:srgbClr>
-          </a:solidFill>
-          <a:ln xmlns:a="http://schemas.openxmlformats.org/drawingml/2006/main" w="0">
-            <a:solidFill>
-              <a:srgbClr val="000000">
-                <a:alpha val="0"/>
-              </a:srgbClr>
-            </a:solidFill>
-            <a:prstDash val="solid"/>
-          </a:ln>
-        </p:spPr>
-        <p:txBody>
-          <a:bodyPr xmlns:a="http://schemas.openxmlformats.org/drawingml/2006/main" lIns="0" tIns="0" rIns="0" bIns="0" anchor="t"/>
-          <a:lstStyle xmlns:a="http://schemas.openxmlformats.org/drawingml/2006/main"/>
-          <a:p xmlns:a="http://schemas.openxmlformats.org/drawingml/2006/main">
+          <a:prstGeom prst="rect">
+            <a:avLst/>
+          </a:prstGeom>
+          <a:solidFill>
+            <a:srgbClr val="000000">
+              <a:alpha val="0"/>
+            </a:srgbClr>
+          </a:solidFill>
+          <a:ln w="0">
+            <a:solidFill>
+              <a:srgbClr val="000000">
+                <a:alpha val="0"/>
+              </a:srgbClr>
+            </a:solidFill>
+            <a:prstDash val="solid"/>
+          </a:ln>
+        </p:spPr>
+        <p:txBody>
+          <a:bodyPr lIns="0" tIns="0" rIns="0" bIns="0" anchor="t"/>
+          <a:lstStyle/>
+          <a:p>
             <a:pPr algn="l">
               <a:defRPr sz="1050" b="1">
                 <a:solidFill>
@@ -8788,43 +8788,43 @@
       <p:sp>
         <p:nvSpPr>
           <p:cNvPr id="24" name="">
-            <a:extLst xmlns:a="http://schemas.openxmlformats.org/drawingml/2006/main">
-              <a:ext uri="{FF2B5EF4-FFF2-40B4-BE49-F238E27FC236}">
-                <a16:creationId xmlns:a16="http://schemas.microsoft.com/office/drawing/2014/main" id="{54254055-64F9-4A0F-990E-732535090076}"/>
-              </a:ext>
-            </a:extLst>
-          </p:cNvPr>
-          <p:cNvSpPr>
-            <a:spLocks xmlns:a="http://schemas.openxmlformats.org/drawingml/2006/main" noGrp="1"/>
-          </p:cNvSpPr>
-          <p:nvPr/>
-        </p:nvSpPr>
-        <p:spPr>
-          <a:xfrm xmlns:a="http://schemas.openxmlformats.org/drawingml/2006/main">
+            <a:extLst>
+              <a:ext uri="{FF2B5EF4-FFF2-40B4-BE49-F238E27FC236}">
+                <ns2:creationId id="{54254055-64F9-4A0F-990E-732535090076}"/>
+              </a:ext>
+            </a:extLst>
+          </p:cNvPr>
+          <p:cNvSpPr>
+            <a:spLocks noGrp="1"/>
+          </p:cNvSpPr>
+          <p:nvPr/>
+        </p:nvSpPr>
+        <p:spPr>
+          <a:xfrm>
             <a:off x="4610100" y="4648200"/>
             <a:ext cx="4667250" cy="285750"/>
           </a:xfrm>
-          <a:prstGeom xmlns:a="http://schemas.openxmlformats.org/drawingml/2006/main" prst="rect">
-            <a:avLst/>
-          </a:prstGeom>
-          <a:solidFill xmlns:a="http://schemas.openxmlformats.org/drawingml/2006/main">
-            <a:srgbClr val="000000">
-              <a:alpha val="0"/>
-            </a:srgbClr>
-          </a:solidFill>
-          <a:ln xmlns:a="http://schemas.openxmlformats.org/drawingml/2006/main" w="0">
-            <a:solidFill>
-              <a:srgbClr val="000000">
-                <a:alpha val="0"/>
-              </a:srgbClr>
-            </a:solidFill>
-            <a:prstDash val="solid"/>
-          </a:ln>
-        </p:spPr>
-        <p:txBody>
-          <a:bodyPr xmlns:a="http://schemas.openxmlformats.org/drawingml/2006/main" lIns="0" tIns="0" rIns="0" bIns="0" anchor="t"/>
-          <a:lstStyle xmlns:a="http://schemas.openxmlformats.org/drawingml/2006/main"/>
-          <a:p xmlns:a="http://schemas.openxmlformats.org/drawingml/2006/main">
+          <a:prstGeom prst="rect">
+            <a:avLst/>
+          </a:prstGeom>
+          <a:solidFill>
+            <a:srgbClr val="000000">
+              <a:alpha val="0"/>
+            </a:srgbClr>
+          </a:solidFill>
+          <a:ln w="0">
+            <a:solidFill>
+              <a:srgbClr val="000000">
+                <a:alpha val="0"/>
+              </a:srgbClr>
+            </a:solidFill>
+            <a:prstDash val="solid"/>
+          </a:ln>
+        </p:spPr>
+        <p:txBody>
+          <a:bodyPr lIns="0" tIns="0" rIns="0" bIns="0" anchor="t"/>
+          <a:lstStyle/>
+          <a:p>
             <a:pPr algn="l">
               <a:defRPr sz="1125" b="1">
                 <a:solidFill>
@@ -8844,7 +8844,7 @@
                 <a:ea typeface="Microsoft YaHei"/>
                 <a:cs typeface="Microsoft YaHei"/>
               </a:rPr>
-              <a:t>No alpha, correlation, t-test, regression, or mediation claims.</a:t>
+              <a:t>No regression, mediation, prediction, or causal claims.</a:t>
             </a:r>
           </a:p>
         </p:txBody>
@@ -8852,29 +8852,29 @@
       <p:sp>
         <p:nvSpPr>
           <p:cNvPr id="25" name="">
-            <a:extLst xmlns:a="http://schemas.openxmlformats.org/drawingml/2006/main">
-              <a:ext uri="{FF2B5EF4-FFF2-40B4-BE49-F238E27FC236}">
-                <a16:creationId xmlns:a16="http://schemas.microsoft.com/office/drawing/2014/main" id="{A1BFBFF2-E6C1-4C59-92C2-DF283EC4EB5F}"/>
-              </a:ext>
-            </a:extLst>
-          </p:cNvPr>
-          <p:cNvSpPr>
-            <a:spLocks xmlns:a="http://schemas.openxmlformats.org/drawingml/2006/main" noGrp="1"/>
-          </p:cNvSpPr>
-          <p:nvPr/>
-        </p:nvSpPr>
-        <p:spPr>
-          <a:xfrm xmlns:a="http://schemas.openxmlformats.org/drawingml/2006/main">
+            <a:extLst>
+              <a:ext uri="{FF2B5EF4-FFF2-40B4-BE49-F238E27FC236}">
+                <ns2:creationId id="{A1BFBFF2-E6C1-4C59-92C2-DF283EC4EB5F}"/>
+              </a:ext>
+            </a:extLst>
+          </p:cNvPr>
+          <p:cNvSpPr>
+            <a:spLocks noGrp="1"/>
+          </p:cNvSpPr>
+          <p:nvPr/>
+        </p:nvSpPr>
+        <p:spPr>
+          <a:xfrm>
             <a:off x="609600" y="6334125"/>
             <a:ext cx="9810750" cy="9525"/>
           </a:xfrm>
-          <a:prstGeom xmlns:a="http://schemas.openxmlformats.org/drawingml/2006/main" prst="rect">
-            <a:avLst/>
-          </a:prstGeom>
-          <a:solidFill xmlns:a="http://schemas.openxmlformats.org/drawingml/2006/main">
+          <a:prstGeom prst="rect">
+            <a:avLst/>
+          </a:prstGeom>
+          <a:solidFill>
             <a:srgbClr val="E2D8C9"/>
           </a:solidFill>
-          <a:ln xmlns:a="http://schemas.openxmlformats.org/drawingml/2006/main" w="0">
+          <a:ln w="0">
             <a:solidFill>
               <a:srgbClr val="000000">
                 <a:alpha val="0"/>
@@ -8887,43 +8887,43 @@
       <p:sp>
         <p:nvSpPr>
           <p:cNvPr id="26" name="">
-            <a:extLst xmlns:a="http://schemas.openxmlformats.org/drawingml/2006/main">
-              <a:ext uri="{FF2B5EF4-FFF2-40B4-BE49-F238E27FC236}">
-                <a16:creationId xmlns:a16="http://schemas.microsoft.com/office/drawing/2014/main" id="{2AD1F66F-D8D5-44BE-83DE-6F92525CF11B}"/>
-              </a:ext>
-            </a:extLst>
-          </p:cNvPr>
-          <p:cNvSpPr>
-            <a:spLocks xmlns:a="http://schemas.openxmlformats.org/drawingml/2006/main" noGrp="1"/>
-          </p:cNvSpPr>
-          <p:nvPr/>
-        </p:nvSpPr>
-        <p:spPr>
-          <a:xfrm xmlns:a="http://schemas.openxmlformats.org/drawingml/2006/main">
+            <a:extLst>
+              <a:ext uri="{FF2B5EF4-FFF2-40B4-BE49-F238E27FC236}">
+                <ns2:creationId id="{2AD1F66F-D8D5-44BE-83DE-6F92525CF11B}"/>
+              </a:ext>
+            </a:extLst>
+          </p:cNvPr>
+          <p:cNvSpPr>
+            <a:spLocks noGrp="1"/>
+          </p:cNvSpPr>
+          <p:nvPr/>
+        </p:nvSpPr>
+        <p:spPr>
+          <a:xfrm>
             <a:off x="609600" y="6419850"/>
             <a:ext cx="7239000" cy="228600"/>
           </a:xfrm>
-          <a:prstGeom xmlns:a="http://schemas.openxmlformats.org/drawingml/2006/main" prst="rect">
-            <a:avLst/>
-          </a:prstGeom>
-          <a:solidFill xmlns:a="http://schemas.openxmlformats.org/drawingml/2006/main">
-            <a:srgbClr val="000000">
-              <a:alpha val="0"/>
-            </a:srgbClr>
-          </a:solidFill>
-          <a:ln xmlns:a="http://schemas.openxmlformats.org/drawingml/2006/main" w="0">
-            <a:solidFill>
-              <a:srgbClr val="000000">
-                <a:alpha val="0"/>
-              </a:srgbClr>
-            </a:solidFill>
-            <a:prstDash val="solid"/>
-          </a:ln>
-        </p:spPr>
-        <p:txBody>
-          <a:bodyPr xmlns:a="http://schemas.openxmlformats.org/drawingml/2006/main" lIns="0" tIns="0" rIns="0" bIns="0" anchor="t"/>
-          <a:lstStyle xmlns:a="http://schemas.openxmlformats.org/drawingml/2006/main"/>
-          <a:p xmlns:a="http://schemas.openxmlformats.org/drawingml/2006/main">
+          <a:prstGeom prst="rect">
+            <a:avLst/>
+          </a:prstGeom>
+          <a:solidFill>
+            <a:srgbClr val="000000">
+              <a:alpha val="0"/>
+            </a:srgbClr>
+          </a:solidFill>
+          <a:ln w="0">
+            <a:solidFill>
+              <a:srgbClr val="000000">
+                <a:alpha val="0"/>
+              </a:srgbClr>
+            </a:solidFill>
+            <a:prstDash val="solid"/>
+          </a:ln>
+        </p:spPr>
+        <p:txBody>
+          <a:bodyPr lIns="0" tIns="0" rIns="0" bIns="0" anchor="t"/>
+          <a:lstStyle/>
+          <a:p>
             <a:pPr algn="l">
               <a:defRPr sz="750" b="0">
                 <a:solidFill>
@@ -8943,7 +8943,7 @@
                 <a:ea typeface="Microsoft YaHei"/>
                 <a:cs typeface="Microsoft YaHei"/>
               </a:rPr>
-              <a:t>Methodology: aggregate survey export + semi-structured interviews</a:t>
+              <a:t>Methodology: participant-level survey matrix + semi-structured interviews</a:t>
             </a:r>
           </a:p>
         </p:txBody>
@@ -8951,43 +8951,43 @@
       <p:sp>
         <p:nvSpPr>
           <p:cNvPr id="27" name="">
-            <a:extLst xmlns:a="http://schemas.openxmlformats.org/drawingml/2006/main">
-              <a:ext uri="{FF2B5EF4-FFF2-40B4-BE49-F238E27FC236}">
-                <a16:creationId xmlns:a16="http://schemas.microsoft.com/office/drawing/2014/main" id="{1D9548A2-59EE-4347-824F-4ACE390ECCA2}"/>
-              </a:ext>
-            </a:extLst>
-          </p:cNvPr>
-          <p:cNvSpPr>
-            <a:spLocks xmlns:a="http://schemas.openxmlformats.org/drawingml/2006/main" noGrp="1"/>
-          </p:cNvSpPr>
-          <p:nvPr/>
-        </p:nvSpPr>
-        <p:spPr>
-          <a:xfrm xmlns:a="http://schemas.openxmlformats.org/drawingml/2006/main">
+            <a:extLst>
+              <a:ext uri="{FF2B5EF4-FFF2-40B4-BE49-F238E27FC236}">
+                <ns2:creationId id="{1D9548A2-59EE-4347-824F-4ACE390ECCA2}"/>
+              </a:ext>
+            </a:extLst>
+          </p:cNvPr>
+          <p:cNvSpPr>
+            <a:spLocks noGrp="1"/>
+          </p:cNvSpPr>
+          <p:nvPr/>
+        </p:nvSpPr>
+        <p:spPr>
+          <a:xfrm>
             <a:off x="10953750" y="6419850"/>
             <a:ext cx="628650" cy="228600"/>
           </a:xfrm>
-          <a:prstGeom xmlns:a="http://schemas.openxmlformats.org/drawingml/2006/main" prst="rect">
-            <a:avLst/>
-          </a:prstGeom>
-          <a:solidFill xmlns:a="http://schemas.openxmlformats.org/drawingml/2006/main">
-            <a:srgbClr val="000000">
-              <a:alpha val="0"/>
-            </a:srgbClr>
-          </a:solidFill>
-          <a:ln xmlns:a="http://schemas.openxmlformats.org/drawingml/2006/main" w="0">
-            <a:solidFill>
-              <a:srgbClr val="000000">
-                <a:alpha val="0"/>
-              </a:srgbClr>
-            </a:solidFill>
-            <a:prstDash val="solid"/>
-          </a:ln>
-        </p:spPr>
-        <p:txBody>
-          <a:bodyPr xmlns:a="http://schemas.openxmlformats.org/drawingml/2006/main" lIns="0" tIns="0" rIns="0" bIns="0" anchor="t"/>
-          <a:lstStyle xmlns:a="http://schemas.openxmlformats.org/drawingml/2006/main"/>
-          <a:p xmlns:a="http://schemas.openxmlformats.org/drawingml/2006/main">
+          <a:prstGeom prst="rect">
+            <a:avLst/>
+          </a:prstGeom>
+          <a:solidFill>
+            <a:srgbClr val="000000">
+              <a:alpha val="0"/>
+            </a:srgbClr>
+          </a:solidFill>
+          <a:ln w="0">
+            <a:solidFill>
+              <a:srgbClr val="000000">
+                <a:alpha val="0"/>
+              </a:srgbClr>
+            </a:solidFill>
+            <a:prstDash val="solid"/>
+          </a:ln>
+        </p:spPr>
+        <p:txBody>
+          <a:bodyPr lIns="0" tIns="0" rIns="0" bIns="0" anchor="t"/>
+          <a:lstStyle/>
+          <a:p>
             <a:pPr algn="r">
               <a:defRPr sz="900" b="1">
                 <a:solidFill>
@@ -9015,7 +9015,7 @@
     </p:spTree>
     <p:extLst>
       <p:ext uri="{BB962C8B-B14F-4D97-AF65-F5344CB8AC3E}">
-        <p14:creationId xmlns:p14="http://schemas.microsoft.com/office/powerpoint/2010/main" val="1154912639"/>
+        <ns3:creationId val="1154912639"/>
       </p:ext>
     </p:extLst>
   </p:cSld>
@@ -9973,7 +9973,7 @@
 </file>
 
 <file path=ppt/slides/slide6.xml><?xml version="1.0" encoding="utf-8"?>
-<p:sld xmlns:p="http://schemas.openxmlformats.org/presentationml/2006/main">
+<p:sld xmlns:a="http://schemas.openxmlformats.org/drawingml/2006/main" xmlns:ns2="http://schemas.microsoft.com/office/drawing/2014/main" xmlns:ns4="http://schemas.microsoft.com/office/powerpoint/2010/main" xmlns:p="http://schemas.openxmlformats.org/presentationml/2006/main" xmlns:r="http://schemas.openxmlformats.org/officeDocument/2006/relationships">
   <p:cSld>
     <p:spTree>
       <p:nvGrpSpPr>
@@ -9982,34 +9982,34 @@
         <p:nvPr/>
       </p:nvGrpSpPr>
       <p:grpSpPr>
-        <a:xfrm xmlns:a="http://schemas.openxmlformats.org/drawingml/2006/main"/>
+        <a:xfrm/>
       </p:grpSpPr>
       <p:sp>
         <p:nvSpPr>
           <p:cNvPr id="1" name="">
-            <a:extLst xmlns:a="http://schemas.openxmlformats.org/drawingml/2006/main">
-              <a:ext uri="{FF2B5EF4-FFF2-40B4-BE49-F238E27FC236}">
-                <a16:creationId xmlns:a16="http://schemas.microsoft.com/office/drawing/2014/main" id="{AA4980AF-EFE8-4F39-AC55-79733F7E74F8}"/>
-              </a:ext>
-            </a:extLst>
-          </p:cNvPr>
-          <p:cNvSpPr>
-            <a:spLocks xmlns:a="http://schemas.openxmlformats.org/drawingml/2006/main" noGrp="1"/>
-          </p:cNvSpPr>
-          <p:nvPr/>
-        </p:nvSpPr>
-        <p:spPr>
-          <a:xfrm xmlns:a="http://schemas.openxmlformats.org/drawingml/2006/main">
+            <a:extLst>
+              <a:ext uri="{FF2B5EF4-FFF2-40B4-BE49-F238E27FC236}">
+                <ns2:creationId id="{AA4980AF-EFE8-4F39-AC55-79733F7E74F8}"/>
+              </a:ext>
+            </a:extLst>
+          </p:cNvPr>
+          <p:cNvSpPr>
+            <a:spLocks noGrp="1"/>
+          </p:cNvSpPr>
+          <p:nvPr/>
+        </p:nvSpPr>
+        <p:spPr>
+          <a:xfrm>
             <a:off x="0" y="0"/>
             <a:ext cx="12192000" cy="6858000"/>
           </a:xfrm>
-          <a:prstGeom xmlns:a="http://schemas.openxmlformats.org/drawingml/2006/main" prst="rect">
-            <a:avLst/>
-          </a:prstGeom>
-          <a:solidFill xmlns:a="http://schemas.openxmlformats.org/drawingml/2006/main">
+          <a:prstGeom prst="rect">
+            <a:avLst/>
+          </a:prstGeom>
+          <a:solidFill>
             <a:srgbClr val="F7F2EA"/>
           </a:solidFill>
-          <a:ln xmlns:a="http://schemas.openxmlformats.org/drawingml/2006/main" w="0">
+          <a:ln w="0">
             <a:solidFill>
               <a:srgbClr val="000000">
                 <a:alpha val="0"/>
@@ -10022,29 +10022,29 @@
       <p:sp>
         <p:nvSpPr>
           <p:cNvPr id="2" name="kicker-6-marker">
-            <a:extLst xmlns:a="http://schemas.openxmlformats.org/drawingml/2006/main">
-              <a:ext uri="{FF2B5EF4-FFF2-40B4-BE49-F238E27FC236}">
-                <a16:creationId xmlns:a16="http://schemas.microsoft.com/office/drawing/2014/main" id="{2272C8FA-286D-412E-8C05-768AC2C4BF79}"/>
-              </a:ext>
-            </a:extLst>
-          </p:cNvPr>
-          <p:cNvSpPr>
-            <a:spLocks xmlns:a="http://schemas.openxmlformats.org/drawingml/2006/main" noGrp="1"/>
-          </p:cNvSpPr>
-          <p:nvPr/>
-        </p:nvSpPr>
-        <p:spPr>
-          <a:xfrm xmlns:a="http://schemas.openxmlformats.org/drawingml/2006/main">
+            <a:extLst>
+              <a:ext uri="{FF2B5EF4-FFF2-40B4-BE49-F238E27FC236}">
+                <ns2:creationId id="{2272C8FA-286D-412E-8C05-768AC2C4BF79}"/>
+              </a:ext>
+            </a:extLst>
+          </p:cNvPr>
+          <p:cNvSpPr>
+            <a:spLocks noGrp="1"/>
+          </p:cNvSpPr>
+          <p:nvPr/>
+        </p:nvSpPr>
+        <p:spPr>
+          <a:xfrm>
             <a:off x="609600" y="457200"/>
             <a:ext cx="95250" cy="95250"/>
           </a:xfrm>
-          <a:prstGeom xmlns:a="http://schemas.openxmlformats.org/drawingml/2006/main" prst="rect">
-            <a:avLst/>
-          </a:prstGeom>
-          <a:solidFill xmlns:a="http://schemas.openxmlformats.org/drawingml/2006/main">
+          <a:prstGeom prst="rect">
+            <a:avLst/>
+          </a:prstGeom>
+          <a:solidFill>
             <a:srgbClr val="B44B3F"/>
           </a:solidFill>
-          <a:ln xmlns:a="http://schemas.openxmlformats.org/drawingml/2006/main" w="0">
+          <a:ln w="0">
             <a:solidFill>
               <a:srgbClr val="000000">
                 <a:alpha val="0"/>
@@ -10057,43 +10057,43 @@
       <p:sp>
         <p:nvSpPr>
           <p:cNvPr id="3" name="kicker-6-label">
-            <a:extLst xmlns:a="http://schemas.openxmlformats.org/drawingml/2006/main">
-              <a:ext uri="{FF2B5EF4-FFF2-40B4-BE49-F238E27FC236}">
-                <a16:creationId xmlns:a16="http://schemas.microsoft.com/office/drawing/2014/main" id="{FA40A9A1-A729-4D3B-88FB-7F5B3FA51427}"/>
-              </a:ext>
-            </a:extLst>
-          </p:cNvPr>
-          <p:cNvSpPr>
-            <a:spLocks xmlns:a="http://schemas.openxmlformats.org/drawingml/2006/main" noGrp="1"/>
-          </p:cNvSpPr>
-          <p:nvPr/>
-        </p:nvSpPr>
-        <p:spPr>
-          <a:xfrm xmlns:a="http://schemas.openxmlformats.org/drawingml/2006/main">
+            <a:extLst>
+              <a:ext uri="{FF2B5EF4-FFF2-40B4-BE49-F238E27FC236}">
+                <ns2:creationId id="{FA40A9A1-A729-4D3B-88FB-7F5B3FA51427}"/>
+              </a:ext>
+            </a:extLst>
+          </p:cNvPr>
+          <p:cNvSpPr>
+            <a:spLocks noGrp="1"/>
+          </p:cNvSpPr>
+          <p:nvPr/>
+        </p:nvSpPr>
+        <p:spPr>
+          <a:xfrm>
             <a:off x="800100" y="371475"/>
             <a:ext cx="3429000" cy="266700"/>
           </a:xfrm>
-          <a:prstGeom xmlns:a="http://schemas.openxmlformats.org/drawingml/2006/main" prst="rect">
-            <a:avLst/>
-          </a:prstGeom>
-          <a:solidFill xmlns:a="http://schemas.openxmlformats.org/drawingml/2006/main">
-            <a:srgbClr val="000000">
-              <a:alpha val="0"/>
-            </a:srgbClr>
-          </a:solidFill>
-          <a:ln xmlns:a="http://schemas.openxmlformats.org/drawingml/2006/main" w="0">
-            <a:solidFill>
-              <a:srgbClr val="000000">
-                <a:alpha val="0"/>
-              </a:srgbClr>
-            </a:solidFill>
-            <a:prstDash val="solid"/>
-          </a:ln>
-        </p:spPr>
-        <p:txBody>
-          <a:bodyPr xmlns:a="http://schemas.openxmlformats.org/drawingml/2006/main" lIns="0" tIns="0" rIns="0" bIns="0" anchor="t"/>
-          <a:lstStyle xmlns:a="http://schemas.openxmlformats.org/drawingml/2006/main"/>
-          <a:p xmlns:a="http://schemas.openxmlformats.org/drawingml/2006/main">
+          <a:prstGeom prst="rect">
+            <a:avLst/>
+          </a:prstGeom>
+          <a:solidFill>
+            <a:srgbClr val="000000">
+              <a:alpha val="0"/>
+            </a:srgbClr>
+          </a:solidFill>
+          <a:ln w="0">
+            <a:solidFill>
+              <a:srgbClr val="000000">
+                <a:alpha val="0"/>
+              </a:srgbClr>
+            </a:solidFill>
+            <a:prstDash val="solid"/>
+          </a:ln>
+        </p:spPr>
+        <p:txBody>
+          <a:bodyPr lIns="0" tIns="0" rIns="0" bIns="0" anchor="t"/>
+          <a:lstStyle/>
+          <a:p>
             <a:pPr algn="l">
               <a:defRPr sz="1050" b="1">
                 <a:solidFill>
@@ -10121,43 +10121,43 @@
       <p:sp>
         <p:nvSpPr>
           <p:cNvPr id="4" name="">
-            <a:extLst xmlns:a="http://schemas.openxmlformats.org/drawingml/2006/main">
-              <a:ext uri="{FF2B5EF4-FFF2-40B4-BE49-F238E27FC236}">
-                <a16:creationId xmlns:a16="http://schemas.microsoft.com/office/drawing/2014/main" id="{173CDBA5-0660-496A-83E1-E997B05E767A}"/>
-              </a:ext>
-            </a:extLst>
-          </p:cNvPr>
-          <p:cNvSpPr>
-            <a:spLocks xmlns:a="http://schemas.openxmlformats.org/drawingml/2006/main" noGrp="1"/>
-          </p:cNvSpPr>
-          <p:nvPr/>
-        </p:nvSpPr>
-        <p:spPr>
-          <a:xfrm xmlns:a="http://schemas.openxmlformats.org/drawingml/2006/main">
+            <a:extLst>
+              <a:ext uri="{FF2B5EF4-FFF2-40B4-BE49-F238E27FC236}">
+                <ns2:creationId id="{173CDBA5-0660-496A-83E1-E997B05E767A}"/>
+              </a:ext>
+            </a:extLst>
+          </p:cNvPr>
+          <p:cNvSpPr>
+            <a:spLocks noGrp="1"/>
+          </p:cNvSpPr>
+          <p:nvPr/>
+        </p:nvSpPr>
+        <p:spPr>
+          <a:xfrm>
             <a:off x="609600" y="781050"/>
             <a:ext cx="8096250" cy="914400"/>
           </a:xfrm>
-          <a:prstGeom xmlns:a="http://schemas.openxmlformats.org/drawingml/2006/main" prst="rect">
-            <a:avLst/>
-          </a:prstGeom>
-          <a:solidFill xmlns:a="http://schemas.openxmlformats.org/drawingml/2006/main">
-            <a:srgbClr val="000000">
-              <a:alpha val="0"/>
-            </a:srgbClr>
-          </a:solidFill>
-          <a:ln xmlns:a="http://schemas.openxmlformats.org/drawingml/2006/main" w="0">
-            <a:solidFill>
-              <a:srgbClr val="000000">
-                <a:alpha val="0"/>
-              </a:srgbClr>
-            </a:solidFill>
-            <a:prstDash val="solid"/>
-          </a:ln>
-        </p:spPr>
-        <p:txBody>
-          <a:bodyPr xmlns:a="http://schemas.openxmlformats.org/drawingml/2006/main" lIns="0" tIns="0" rIns="0" bIns="0" anchor="t"/>
-          <a:lstStyle xmlns:a="http://schemas.openxmlformats.org/drawingml/2006/main"/>
-          <a:p xmlns:a="http://schemas.openxmlformats.org/drawingml/2006/main">
+          <a:prstGeom prst="rect">
+            <a:avLst/>
+          </a:prstGeom>
+          <a:solidFill>
+            <a:srgbClr val="000000">
+              <a:alpha val="0"/>
+            </a:srgbClr>
+          </a:solidFill>
+          <a:ln w="0">
+            <a:solidFill>
+              <a:srgbClr val="000000">
+                <a:alpha val="0"/>
+              </a:srgbClr>
+            </a:solidFill>
+            <a:prstDash val="solid"/>
+          </a:ln>
+        </p:spPr>
+        <p:txBody>
+          <a:bodyPr lIns="0" tIns="0" rIns="0" bIns="0" anchor="t"/>
+          <a:lstStyle/>
+          <a:p>
             <a:pPr algn="l">
               <a:defRPr sz="2550" b="1">
                 <a:solidFill>
@@ -10185,43 +10185,43 @@
       <p:sp>
         <p:nvSpPr>
           <p:cNvPr id="5" name="">
-            <a:extLst xmlns:a="http://schemas.openxmlformats.org/drawingml/2006/main">
-              <a:ext uri="{FF2B5EF4-FFF2-40B4-BE49-F238E27FC236}">
-                <a16:creationId xmlns:a16="http://schemas.microsoft.com/office/drawing/2014/main" id="{53F45173-AAD1-4959-8B05-9A271B1BEDD2}"/>
-              </a:ext>
-            </a:extLst>
-          </p:cNvPr>
-          <p:cNvSpPr>
-            <a:spLocks xmlns:a="http://schemas.openxmlformats.org/drawingml/2006/main" noGrp="1"/>
-          </p:cNvSpPr>
-          <p:nvPr/>
-        </p:nvSpPr>
-        <p:spPr>
-          <a:xfrm xmlns:a="http://schemas.openxmlformats.org/drawingml/2006/main">
+            <a:extLst>
+              <a:ext uri="{FF2B5EF4-FFF2-40B4-BE49-F238E27FC236}">
+                <ns2:creationId id="{53F45173-AAD1-4959-8B05-9A271B1BEDD2}"/>
+              </a:ext>
+            </a:extLst>
+          </p:cNvPr>
+          <p:cNvSpPr>
+            <a:spLocks noGrp="1"/>
+          </p:cNvSpPr>
+          <p:nvPr/>
+        </p:nvSpPr>
+        <p:spPr>
+          <a:xfrm>
             <a:off x="609600" y="1676400"/>
             <a:ext cx="7429500" cy="381000"/>
           </a:xfrm>
-          <a:prstGeom xmlns:a="http://schemas.openxmlformats.org/drawingml/2006/main" prst="rect">
-            <a:avLst/>
-          </a:prstGeom>
-          <a:solidFill xmlns:a="http://schemas.openxmlformats.org/drawingml/2006/main">
-            <a:srgbClr val="000000">
-              <a:alpha val="0"/>
-            </a:srgbClr>
-          </a:solidFill>
-          <a:ln xmlns:a="http://schemas.openxmlformats.org/drawingml/2006/main" w="0">
-            <a:solidFill>
-              <a:srgbClr val="000000">
-                <a:alpha val="0"/>
-              </a:srgbClr>
-            </a:solidFill>
-            <a:prstDash val="solid"/>
-          </a:ln>
-        </p:spPr>
-        <p:txBody>
-          <a:bodyPr xmlns:a="http://schemas.openxmlformats.org/drawingml/2006/main" lIns="0" tIns="0" rIns="0" bIns="0" anchor="t"/>
-          <a:lstStyle xmlns:a="http://schemas.openxmlformats.org/drawingml/2006/main"/>
-          <a:p xmlns:a="http://schemas.openxmlformats.org/drawingml/2006/main">
+          <a:prstGeom prst="rect">
+            <a:avLst/>
+          </a:prstGeom>
+          <a:solidFill>
+            <a:srgbClr val="000000">
+              <a:alpha val="0"/>
+            </a:srgbClr>
+          </a:solidFill>
+          <a:ln w="0">
+            <a:solidFill>
+              <a:srgbClr val="000000">
+                <a:alpha val="0"/>
+              </a:srgbClr>
+            </a:solidFill>
+            <a:prstDash val="solid"/>
+          </a:ln>
+        </p:spPr>
+        <p:txBody>
+          <a:bodyPr lIns="0" tIns="0" rIns="0" bIns="0" anchor="t"/>
+          <a:lstStyle/>
+          <a:p>
             <a:pPr algn="l">
               <a:defRPr sz="1125" b="0">
                 <a:solidFill>
@@ -10249,29 +10249,29 @@
       <p:sp>
         <p:nvSpPr>
           <p:cNvPr id="6" name="">
-            <a:extLst xmlns:a="http://schemas.openxmlformats.org/drawingml/2006/main">
-              <a:ext uri="{FF2B5EF4-FFF2-40B4-BE49-F238E27FC236}">
-                <a16:creationId xmlns:a16="http://schemas.microsoft.com/office/drawing/2014/main" id="{3CB7069B-AEFC-41C2-84BA-C5E7A603A394}"/>
-              </a:ext>
-            </a:extLst>
-          </p:cNvPr>
-          <p:cNvSpPr>
-            <a:spLocks xmlns:a="http://schemas.openxmlformats.org/drawingml/2006/main" noGrp="1"/>
-          </p:cNvSpPr>
-          <p:nvPr/>
-        </p:nvSpPr>
-        <p:spPr>
-          <a:xfrm xmlns:a="http://schemas.openxmlformats.org/drawingml/2006/main">
+            <a:extLst>
+              <a:ext uri="{FF2B5EF4-FFF2-40B4-BE49-F238E27FC236}">
+                <ns2:creationId id="{3CB7069B-AEFC-41C2-84BA-C5E7A603A394}"/>
+              </a:ext>
+            </a:extLst>
+          </p:cNvPr>
+          <p:cNvSpPr>
+            <a:spLocks noGrp="1"/>
+          </p:cNvSpPr>
+          <p:nvPr/>
+        </p:nvSpPr>
+        <p:spPr>
+          <a:xfrm>
             <a:off x="6762750" y="2152650"/>
             <a:ext cx="3905250" cy="3238500"/>
           </a:xfrm>
-          <a:prstGeom xmlns:a="http://schemas.openxmlformats.org/drawingml/2006/main" prst="rect">
-            <a:avLst/>
-          </a:prstGeom>
-          <a:solidFill xmlns:a="http://schemas.openxmlformats.org/drawingml/2006/main">
+          <a:prstGeom prst="rect">
+            <a:avLst/>
+          </a:prstGeom>
+          <a:solidFill>
             <a:srgbClr val="FFFDF8"/>
           </a:solidFill>
-          <a:ln xmlns:a="http://schemas.openxmlformats.org/drawingml/2006/main" w="9525">
+          <a:ln w="9525">
             <a:solidFill>
               <a:srgbClr val="D9CDBB"/>
             </a:solidFill>
@@ -10283,20 +10283,20 @@
         <p:nvPicPr>
           <p:cNvPr id="7" name=""/>
           <p:cNvPicPr>
-            <a:picLocks xmlns:a="http://schemas.openxmlformats.org/drawingml/2006/main" noChangeAspect="1"/>
+            <a:picLocks noChangeAspect="1"/>
           </p:cNvPicPr>
           <p:nvPr/>
         </p:nvPicPr>
         <p:blipFill>
-          <a:blip xmlns:r="http://schemas.openxmlformats.org/officeDocument/2006/relationships" xmlns:a="http://schemas.openxmlformats.org/drawingml/2006/main" r:embed="R56d152443b724541"/>
-          <a:stretch xmlns:a="http://schemas.openxmlformats.org/drawingml/2006/main"/>
+          <a:blip r:embed="R56d152443b724541"/>
+          <a:stretch/>
         </p:blipFill>
         <p:spPr>
-          <a:xfrm xmlns:a="http://schemas.openxmlformats.org/drawingml/2006/main">
+          <a:xfrm>
             <a:off x="6858000" y="3144948"/>
             <a:ext cx="3714750" cy="1253904"/>
           </a:xfrm>
-          <a:prstGeom xmlns:a="http://schemas.openxmlformats.org/drawingml/2006/main" prst="rect">
+          <a:prstGeom prst="rect">
             <a:avLst/>
           </a:prstGeom>
         </p:spPr>
@@ -10304,43 +10304,43 @@
       <p:sp>
         <p:nvSpPr>
           <p:cNvPr id="8" name="">
-            <a:extLst xmlns:a="http://schemas.openxmlformats.org/drawingml/2006/main">
-              <a:ext uri="{FF2B5EF4-FFF2-40B4-BE49-F238E27FC236}">
-                <a16:creationId xmlns:a16="http://schemas.microsoft.com/office/drawing/2014/main" id="{F8C8F62A-6BDA-48D6-82BC-3F92EA0553A5}"/>
-              </a:ext>
-            </a:extLst>
-          </p:cNvPr>
-          <p:cNvSpPr>
-            <a:spLocks xmlns:a="http://schemas.openxmlformats.org/drawingml/2006/main" noGrp="1"/>
-          </p:cNvSpPr>
-          <p:nvPr/>
-        </p:nvSpPr>
-        <p:spPr>
-          <a:xfrm xmlns:a="http://schemas.openxmlformats.org/drawingml/2006/main">
+            <a:extLst>
+              <a:ext uri="{FF2B5EF4-FFF2-40B4-BE49-F238E27FC236}">
+                <ns2:creationId id="{F8C8F62A-6BDA-48D6-82BC-3F92EA0553A5}"/>
+              </a:ext>
+            </a:extLst>
+          </p:cNvPr>
+          <p:cNvSpPr>
+            <a:spLocks noGrp="1"/>
+          </p:cNvSpPr>
+          <p:nvPr/>
+        </p:nvSpPr>
+        <p:spPr>
+          <a:xfrm>
             <a:off x="6858000" y="5372100"/>
             <a:ext cx="3714750" cy="228600"/>
           </a:xfrm>
-          <a:prstGeom xmlns:a="http://schemas.openxmlformats.org/drawingml/2006/main" prst="rect">
-            <a:avLst/>
-          </a:prstGeom>
-          <a:solidFill xmlns:a="http://schemas.openxmlformats.org/drawingml/2006/main">
-            <a:srgbClr val="000000">
-              <a:alpha val="0"/>
-            </a:srgbClr>
-          </a:solidFill>
-          <a:ln xmlns:a="http://schemas.openxmlformats.org/drawingml/2006/main" w="0">
-            <a:solidFill>
-              <a:srgbClr val="000000">
-                <a:alpha val="0"/>
-              </a:srgbClr>
-            </a:solidFill>
-            <a:prstDash val="solid"/>
-          </a:ln>
-        </p:spPr>
-        <p:txBody>
-          <a:bodyPr xmlns:a="http://schemas.openxmlformats.org/drawingml/2006/main" lIns="0" tIns="0" rIns="0" bIns="0" anchor="t"/>
-          <a:lstStyle xmlns:a="http://schemas.openxmlformats.org/drawingml/2006/main"/>
-          <a:p xmlns:a="http://schemas.openxmlformats.org/drawingml/2006/main">
+          <a:prstGeom prst="rect">
+            <a:avLst/>
+          </a:prstGeom>
+          <a:solidFill>
+            <a:srgbClr val="000000">
+              <a:alpha val="0"/>
+            </a:srgbClr>
+          </a:solidFill>
+          <a:ln w="0">
+            <a:solidFill>
+              <a:srgbClr val="000000">
+                <a:alpha val="0"/>
+              </a:srgbClr>
+            </a:solidFill>
+            <a:prstDash val="solid"/>
+          </a:ln>
+        </p:spPr>
+        <p:txBody>
+          <a:bodyPr lIns="0" tIns="0" rIns="0" bIns="0" anchor="t"/>
+          <a:lstStyle/>
+          <a:p>
             <a:pPr algn="ctr">
               <a:defRPr sz="825" b="0">
                 <a:solidFill>
@@ -10360,7 +10360,7 @@
                 <a:ea typeface="Microsoft YaHei"/>
                 <a:cs typeface="Microsoft YaHei"/>
               </a:rPr>
-              <a:t>Spatial pressure / training anxiety distribution</a:t>
+              <a:t>Participant-level support</a:t>
             </a:r>
           </a:p>
         </p:txBody>
@@ -10368,43 +10368,43 @@
       <p:sp>
         <p:nvSpPr>
           <p:cNvPr id="9" name="">
-            <a:extLst xmlns:a="http://schemas.openxmlformats.org/drawingml/2006/main">
-              <a:ext uri="{FF2B5EF4-FFF2-40B4-BE49-F238E27FC236}">
-                <a16:creationId xmlns:a16="http://schemas.microsoft.com/office/drawing/2014/main" id="{F4CC4C50-59B8-4188-9A16-D144B8555923}"/>
-              </a:ext>
-            </a:extLst>
-          </p:cNvPr>
-          <p:cNvSpPr>
-            <a:spLocks xmlns:a="http://schemas.openxmlformats.org/drawingml/2006/main" noGrp="1"/>
-          </p:cNvSpPr>
-          <p:nvPr/>
-        </p:nvSpPr>
-        <p:spPr>
-          <a:xfrm xmlns:a="http://schemas.openxmlformats.org/drawingml/2006/main">
+            <a:extLst>
+              <a:ext uri="{FF2B5EF4-FFF2-40B4-BE49-F238E27FC236}">
+                <ns2:creationId id="{F4CC4C50-59B8-4188-9A16-D144B8555923}"/>
+              </a:ext>
+            </a:extLst>
+          </p:cNvPr>
+          <p:cNvSpPr>
+            <a:spLocks noGrp="1"/>
+          </p:cNvSpPr>
+          <p:nvPr/>
+        </p:nvSpPr>
+        <p:spPr>
+          <a:xfrm>
             <a:off x="781050" y="2609850"/>
             <a:ext cx="2762250" cy="228600"/>
           </a:xfrm>
-          <a:prstGeom xmlns:a="http://schemas.openxmlformats.org/drawingml/2006/main" prst="rect">
-            <a:avLst/>
-          </a:prstGeom>
-          <a:solidFill xmlns:a="http://schemas.openxmlformats.org/drawingml/2006/main">
-            <a:srgbClr val="000000">
-              <a:alpha val="0"/>
-            </a:srgbClr>
-          </a:solidFill>
-          <a:ln xmlns:a="http://schemas.openxmlformats.org/drawingml/2006/main" w="0">
-            <a:solidFill>
-              <a:srgbClr val="000000">
-                <a:alpha val="0"/>
-              </a:srgbClr>
-            </a:solidFill>
-            <a:prstDash val="solid"/>
-          </a:ln>
-        </p:spPr>
-        <p:txBody>
-          <a:bodyPr xmlns:a="http://schemas.openxmlformats.org/drawingml/2006/main" lIns="0" tIns="0" rIns="0" bIns="0" anchor="t"/>
-          <a:lstStyle xmlns:a="http://schemas.openxmlformats.org/drawingml/2006/main"/>
-          <a:p xmlns:a="http://schemas.openxmlformats.org/drawingml/2006/main">
+          <a:prstGeom prst="rect">
+            <a:avLst/>
+          </a:prstGeom>
+          <a:solidFill>
+            <a:srgbClr val="000000">
+              <a:alpha val="0"/>
+            </a:srgbClr>
+          </a:solidFill>
+          <a:ln w="0">
+            <a:solidFill>
+              <a:srgbClr val="000000">
+                <a:alpha val="0"/>
+              </a:srgbClr>
+            </a:solidFill>
+            <a:prstDash val="solid"/>
+          </a:ln>
+        </p:spPr>
+        <p:txBody>
+          <a:bodyPr lIns="0" tIns="0" rIns="0" bIns="0" anchor="t"/>
+          <a:lstStyle/>
+          <a:p>
             <a:pPr algn="l">
               <a:defRPr sz="1050" b="0">
                 <a:solidFill>
@@ -10424,7 +10424,7 @@
                 <a:ea typeface="Microsoft YaHei"/>
                 <a:cs typeface="Microsoft YaHei"/>
               </a:rPr>
-              <a:t>Men in free-weight area feel uncomfortable</a:t>
+              <a:t>Spatial pressure/training anxiety</a:t>
             </a:r>
           </a:p>
         </p:txBody>
@@ -10432,29 +10432,29 @@
       <p:sp>
         <p:nvSpPr>
           <p:cNvPr id="10" name="">
-            <a:extLst xmlns:a="http://schemas.openxmlformats.org/drawingml/2006/main">
-              <a:ext uri="{FF2B5EF4-FFF2-40B4-BE49-F238E27FC236}">
-                <a16:creationId xmlns:a16="http://schemas.microsoft.com/office/drawing/2014/main" id="{AF8971D0-40DC-4890-9DB8-5DD535F79528}"/>
-              </a:ext>
-            </a:extLst>
-          </p:cNvPr>
-          <p:cNvSpPr>
-            <a:spLocks xmlns:a="http://schemas.openxmlformats.org/drawingml/2006/main" noGrp="1"/>
-          </p:cNvSpPr>
-          <p:nvPr/>
-        </p:nvSpPr>
-        <p:spPr>
-          <a:xfrm xmlns:a="http://schemas.openxmlformats.org/drawingml/2006/main">
+            <a:extLst>
+              <a:ext uri="{FF2B5EF4-FFF2-40B4-BE49-F238E27FC236}">
+                <ns2:creationId id="{AF8971D0-40DC-4890-9DB8-5DD535F79528}"/>
+              </a:ext>
+            </a:extLst>
+          </p:cNvPr>
+          <p:cNvSpPr>
+            <a:spLocks noGrp="1"/>
+          </p:cNvSpPr>
+          <p:nvPr/>
+        </p:nvSpPr>
+        <p:spPr>
+          <a:xfrm>
             <a:off x="3676650" y="2647950"/>
             <a:ext cx="1619250" cy="171450"/>
           </a:xfrm>
-          <a:prstGeom xmlns:a="http://schemas.openxmlformats.org/drawingml/2006/main" prst="rect">
-            <a:avLst/>
-          </a:prstGeom>
-          <a:solidFill xmlns:a="http://schemas.openxmlformats.org/drawingml/2006/main">
+          <a:prstGeom prst="rect">
+            <a:avLst/>
+          </a:prstGeom>
+          <a:solidFill>
             <a:srgbClr val="E7DED0"/>
           </a:solidFill>
-          <a:ln xmlns:a="http://schemas.openxmlformats.org/drawingml/2006/main" w="0">
+          <a:ln w="0">
             <a:solidFill>
               <a:srgbClr val="000000">
                 <a:alpha val="0"/>
@@ -10467,29 +10467,29 @@
       <p:sp>
         <p:nvSpPr>
           <p:cNvPr id="11" name="">
-            <a:extLst xmlns:a="http://schemas.openxmlformats.org/drawingml/2006/main">
-              <a:ext uri="{FF2B5EF4-FFF2-40B4-BE49-F238E27FC236}">
-                <a16:creationId xmlns:a16="http://schemas.microsoft.com/office/drawing/2014/main" id="{BB2801AB-2A41-4E62-8C0E-FEAB0D504992}"/>
-              </a:ext>
-            </a:extLst>
-          </p:cNvPr>
-          <p:cNvSpPr>
-            <a:spLocks xmlns:a="http://schemas.openxmlformats.org/drawingml/2006/main" noGrp="1"/>
-          </p:cNvSpPr>
-          <p:nvPr/>
-        </p:nvSpPr>
-        <p:spPr>
-          <a:xfrm xmlns:a="http://schemas.openxmlformats.org/drawingml/2006/main">
+            <a:extLst>
+              <a:ext uri="{FF2B5EF4-FFF2-40B4-BE49-F238E27FC236}">
+                <ns2:creationId id="{BB2801AB-2A41-4E62-8C0E-FEAB0D504992}"/>
+              </a:ext>
+            </a:extLst>
+          </p:cNvPr>
+          <p:cNvSpPr>
+            <a:spLocks noGrp="1"/>
+          </p:cNvSpPr>
+          <p:nvPr/>
+        </p:nvSpPr>
+        <p:spPr>
+          <a:xfrm>
             <a:off x="3676650" y="2647950"/>
             <a:ext cx="1315641" cy="171450"/>
           </a:xfrm>
-          <a:prstGeom xmlns:a="http://schemas.openxmlformats.org/drawingml/2006/main" prst="rect">
-            <a:avLst/>
-          </a:prstGeom>
-          <a:solidFill xmlns:a="http://schemas.openxmlformats.org/drawingml/2006/main">
+          <a:prstGeom prst="rect">
+            <a:avLst/>
+          </a:prstGeom>
+          <a:solidFill>
             <a:srgbClr val="B44B3F"/>
           </a:solidFill>
-          <a:ln xmlns:a="http://schemas.openxmlformats.org/drawingml/2006/main" w="0">
+          <a:ln w="0">
             <a:solidFill>
               <a:srgbClr val="000000">
                 <a:alpha val="0"/>
@@ -10502,43 +10502,43 @@
       <p:sp>
         <p:nvSpPr>
           <p:cNvPr id="12" name="">
-            <a:extLst xmlns:a="http://schemas.openxmlformats.org/drawingml/2006/main">
-              <a:ext uri="{FF2B5EF4-FFF2-40B4-BE49-F238E27FC236}">
-                <a16:creationId xmlns:a16="http://schemas.microsoft.com/office/drawing/2014/main" id="{BCFDB298-F7A3-4365-BB14-8F1B28CC712F}"/>
-              </a:ext>
-            </a:extLst>
-          </p:cNvPr>
-          <p:cNvSpPr>
-            <a:spLocks xmlns:a="http://schemas.openxmlformats.org/drawingml/2006/main" noGrp="1"/>
-          </p:cNvSpPr>
-          <p:nvPr/>
-        </p:nvSpPr>
-        <p:spPr>
-          <a:xfrm xmlns:a="http://schemas.openxmlformats.org/drawingml/2006/main">
+            <a:extLst>
+              <a:ext uri="{FF2B5EF4-FFF2-40B4-BE49-F238E27FC236}">
+                <ns2:creationId id="{BCFDB298-F7A3-4365-BB14-8F1B28CC712F}"/>
+              </a:ext>
+            </a:extLst>
+          </p:cNvPr>
+          <p:cNvSpPr>
+            <a:spLocks noGrp="1"/>
+          </p:cNvSpPr>
+          <p:nvPr/>
+        </p:nvSpPr>
+        <p:spPr>
+          <a:xfrm>
             <a:off x="5391150" y="2609850"/>
             <a:ext cx="666750" cy="228600"/>
           </a:xfrm>
-          <a:prstGeom xmlns:a="http://schemas.openxmlformats.org/drawingml/2006/main" prst="rect">
-            <a:avLst/>
-          </a:prstGeom>
-          <a:solidFill xmlns:a="http://schemas.openxmlformats.org/drawingml/2006/main">
-            <a:srgbClr val="000000">
-              <a:alpha val="0"/>
-            </a:srgbClr>
-          </a:solidFill>
-          <a:ln xmlns:a="http://schemas.openxmlformats.org/drawingml/2006/main" w="0">
-            <a:solidFill>
-              <a:srgbClr val="000000">
-                <a:alpha val="0"/>
-              </a:srgbClr>
-            </a:solidFill>
-            <a:prstDash val="solid"/>
-          </a:ln>
-        </p:spPr>
-        <p:txBody>
-          <a:bodyPr xmlns:a="http://schemas.openxmlformats.org/drawingml/2006/main" lIns="0" tIns="0" rIns="0" bIns="0" anchor="t"/>
-          <a:lstStyle xmlns:a="http://schemas.openxmlformats.org/drawingml/2006/main"/>
-          <a:p xmlns:a="http://schemas.openxmlformats.org/drawingml/2006/main">
+          <a:prstGeom prst="rect">
+            <a:avLst/>
+          </a:prstGeom>
+          <a:solidFill>
+            <a:srgbClr val="000000">
+              <a:alpha val="0"/>
+            </a:srgbClr>
+          </a:solidFill>
+          <a:ln w="0">
+            <a:solidFill>
+              <a:srgbClr val="000000">
+                <a:alpha val="0"/>
+              </a:srgbClr>
+            </a:solidFill>
+            <a:prstDash val="solid"/>
+          </a:ln>
+        </p:spPr>
+        <p:txBody>
+          <a:bodyPr lIns="0" tIns="0" rIns="0" bIns="0" anchor="t"/>
+          <a:lstStyle/>
+          <a:p>
             <a:pPr algn="l">
               <a:defRPr sz="1050" b="1">
                 <a:solidFill>
@@ -10558,7 +10558,7 @@
                 <a:ea typeface="Microsoft YaHei"/>
                 <a:cs typeface="Microsoft YaHei"/>
               </a:rPr>
-              <a:t>81.25%</a:t>
+              <a:t>M=3.72</a:t>
             </a:r>
           </a:p>
         </p:txBody>
@@ -10566,43 +10566,43 @@
       <p:sp>
         <p:nvSpPr>
           <p:cNvPr id="13" name="">
-            <a:extLst xmlns:a="http://schemas.openxmlformats.org/drawingml/2006/main">
-              <a:ext uri="{FF2B5EF4-FFF2-40B4-BE49-F238E27FC236}">
-                <a16:creationId xmlns:a16="http://schemas.microsoft.com/office/drawing/2014/main" id="{E86A6D05-57C5-446F-BE02-9EE86060090F}"/>
-              </a:ext>
-            </a:extLst>
-          </p:cNvPr>
-          <p:cNvSpPr>
-            <a:spLocks xmlns:a="http://schemas.openxmlformats.org/drawingml/2006/main" noGrp="1"/>
-          </p:cNvSpPr>
-          <p:nvPr/>
-        </p:nvSpPr>
-        <p:spPr>
-          <a:xfrm xmlns:a="http://schemas.openxmlformats.org/drawingml/2006/main">
+            <a:extLst>
+              <a:ext uri="{FF2B5EF4-FFF2-40B4-BE49-F238E27FC236}">
+                <ns2:creationId id="{E86A6D05-57C5-446F-BE02-9EE86060090F}"/>
+              </a:ext>
+            </a:extLst>
+          </p:cNvPr>
+          <p:cNvSpPr>
+            <a:spLocks noGrp="1"/>
+          </p:cNvSpPr>
+          <p:nvPr/>
+        </p:nvSpPr>
+        <p:spPr>
+          <a:xfrm>
             <a:off x="781050" y="3124200"/>
             <a:ext cx="2762250" cy="228600"/>
           </a:xfrm>
-          <a:prstGeom xmlns:a="http://schemas.openxmlformats.org/drawingml/2006/main" prst="rect">
-            <a:avLst/>
-          </a:prstGeom>
-          <a:solidFill xmlns:a="http://schemas.openxmlformats.org/drawingml/2006/main">
-            <a:srgbClr val="000000">
-              <a:alpha val="0"/>
-            </a:srgbClr>
-          </a:solidFill>
-          <a:ln xmlns:a="http://schemas.openxmlformats.org/drawingml/2006/main" w="0">
-            <a:solidFill>
-              <a:srgbClr val="000000">
-                <a:alpha val="0"/>
-              </a:srgbClr>
-            </a:solidFill>
-            <a:prstDash val="solid"/>
-          </a:ln>
-        </p:spPr>
-        <p:txBody>
-          <a:bodyPr xmlns:a="http://schemas.openxmlformats.org/drawingml/2006/main" lIns="0" tIns="0" rIns="0" bIns="0" anchor="t"/>
-          <a:lstStyle xmlns:a="http://schemas.openxmlformats.org/drawingml/2006/main"/>
-          <a:p xmlns:a="http://schemas.openxmlformats.org/drawingml/2006/main">
+          <a:prstGeom prst="rect">
+            <a:avLst/>
+          </a:prstGeom>
+          <a:solidFill>
+            <a:srgbClr val="000000">
+              <a:alpha val="0"/>
+            </a:srgbClr>
+          </a:solidFill>
+          <a:ln w="0">
+            <a:solidFill>
+              <a:srgbClr val="000000">
+                <a:alpha val="0"/>
+              </a:srgbClr>
+            </a:solidFill>
+            <a:prstDash val="solid"/>
+          </a:ln>
+        </p:spPr>
+        <p:txBody>
+          <a:bodyPr lIns="0" tIns="0" rIns="0" bIns="0" anchor="t"/>
+          <a:lstStyle/>
+          <a:p>
             <a:pPr algn="l">
               <a:defRPr sz="1050" b="0">
                 <a:solidFill>
@@ -10622,7 +10622,7 @@
                 <a:ea typeface="Microsoft YaHei"/>
                 <a:cs typeface="Microsoft YaHei"/>
               </a:rPr>
-              <a:t>Crowding lowers willingness to stay</a:t>
+              <a:t>Short-item reliability</a:t>
             </a:r>
           </a:p>
         </p:txBody>
@@ -10630,29 +10630,29 @@
       <p:sp>
         <p:nvSpPr>
           <p:cNvPr id="14" name="">
-            <a:extLst xmlns:a="http://schemas.openxmlformats.org/drawingml/2006/main">
-              <a:ext uri="{FF2B5EF4-FFF2-40B4-BE49-F238E27FC236}">
-                <a16:creationId xmlns:a16="http://schemas.microsoft.com/office/drawing/2014/main" id="{7394627F-1946-4BCE-874C-D23BC1094E80}"/>
-              </a:ext>
-            </a:extLst>
-          </p:cNvPr>
-          <p:cNvSpPr>
-            <a:spLocks xmlns:a="http://schemas.openxmlformats.org/drawingml/2006/main" noGrp="1"/>
-          </p:cNvSpPr>
-          <p:nvPr/>
-        </p:nvSpPr>
-        <p:spPr>
-          <a:xfrm xmlns:a="http://schemas.openxmlformats.org/drawingml/2006/main">
+            <a:extLst>
+              <a:ext uri="{FF2B5EF4-FFF2-40B4-BE49-F238E27FC236}">
+                <ns2:creationId id="{7394627F-1946-4BCE-874C-D23BC1094E80}"/>
+              </a:ext>
+            </a:extLst>
+          </p:cNvPr>
+          <p:cNvSpPr>
+            <a:spLocks noGrp="1"/>
+          </p:cNvSpPr>
+          <p:nvPr/>
+        </p:nvSpPr>
+        <p:spPr>
+          <a:xfrm>
             <a:off x="3676650" y="3162300"/>
             <a:ext cx="1619250" cy="171450"/>
           </a:xfrm>
-          <a:prstGeom xmlns:a="http://schemas.openxmlformats.org/drawingml/2006/main" prst="rect">
-            <a:avLst/>
-          </a:prstGeom>
-          <a:solidFill xmlns:a="http://schemas.openxmlformats.org/drawingml/2006/main">
+          <a:prstGeom prst="rect">
+            <a:avLst/>
+          </a:prstGeom>
+          <a:solidFill>
             <a:srgbClr val="E7DED0"/>
           </a:solidFill>
-          <a:ln xmlns:a="http://schemas.openxmlformats.org/drawingml/2006/main" w="0">
+          <a:ln w="0">
             <a:solidFill>
               <a:srgbClr val="000000">
                 <a:alpha val="0"/>
@@ -10665,29 +10665,29 @@
       <p:sp>
         <p:nvSpPr>
           <p:cNvPr id="15" name="">
-            <a:extLst xmlns:a="http://schemas.openxmlformats.org/drawingml/2006/main">
-              <a:ext uri="{FF2B5EF4-FFF2-40B4-BE49-F238E27FC236}">
-                <a16:creationId xmlns:a16="http://schemas.microsoft.com/office/drawing/2014/main" id="{A962360A-B45A-4F8E-A003-1456D93806B9}"/>
-              </a:ext>
-            </a:extLst>
-          </p:cNvPr>
-          <p:cNvSpPr>
-            <a:spLocks xmlns:a="http://schemas.openxmlformats.org/drawingml/2006/main" noGrp="1"/>
-          </p:cNvSpPr>
-          <p:nvPr/>
-        </p:nvSpPr>
-        <p:spPr>
-          <a:xfrm xmlns:a="http://schemas.openxmlformats.org/drawingml/2006/main">
+            <a:extLst>
+              <a:ext uri="{FF2B5EF4-FFF2-40B4-BE49-F238E27FC236}">
+                <ns2:creationId id="{A962360A-B45A-4F8E-A003-1456D93806B9}"/>
+              </a:ext>
+            </a:extLst>
+          </p:cNvPr>
+          <p:cNvSpPr>
+            <a:spLocks noGrp="1"/>
+          </p:cNvSpPr>
+          <p:nvPr/>
+        </p:nvSpPr>
+        <p:spPr>
+          <a:xfrm>
             <a:off x="3676650" y="3162300"/>
             <a:ext cx="1214438" cy="171450"/>
           </a:xfrm>
-          <a:prstGeom xmlns:a="http://schemas.openxmlformats.org/drawingml/2006/main" prst="rect">
-            <a:avLst/>
-          </a:prstGeom>
-          <a:solidFill xmlns:a="http://schemas.openxmlformats.org/drawingml/2006/main">
+          <a:prstGeom prst="rect">
+            <a:avLst/>
+          </a:prstGeom>
+          <a:solidFill>
             <a:srgbClr val="C08B32"/>
           </a:solidFill>
-          <a:ln xmlns:a="http://schemas.openxmlformats.org/drawingml/2006/main" w="0">
+          <a:ln w="0">
             <a:solidFill>
               <a:srgbClr val="000000">
                 <a:alpha val="0"/>
@@ -10700,43 +10700,43 @@
       <p:sp>
         <p:nvSpPr>
           <p:cNvPr id="16" name="">
-            <a:extLst xmlns:a="http://schemas.openxmlformats.org/drawingml/2006/main">
-              <a:ext uri="{FF2B5EF4-FFF2-40B4-BE49-F238E27FC236}">
-                <a16:creationId xmlns:a16="http://schemas.microsoft.com/office/drawing/2014/main" id="{0B21E39E-7CD3-4C63-B7EF-47DA12CA1F59}"/>
-              </a:ext>
-            </a:extLst>
-          </p:cNvPr>
-          <p:cNvSpPr>
-            <a:spLocks xmlns:a="http://schemas.openxmlformats.org/drawingml/2006/main" noGrp="1"/>
-          </p:cNvSpPr>
-          <p:nvPr/>
-        </p:nvSpPr>
-        <p:spPr>
-          <a:xfrm xmlns:a="http://schemas.openxmlformats.org/drawingml/2006/main">
+            <a:extLst>
+              <a:ext uri="{FF2B5EF4-FFF2-40B4-BE49-F238E27FC236}">
+                <ns2:creationId id="{0B21E39E-7CD3-4C63-B7EF-47DA12CA1F59}"/>
+              </a:ext>
+            </a:extLst>
+          </p:cNvPr>
+          <p:cNvSpPr>
+            <a:spLocks noGrp="1"/>
+          </p:cNvSpPr>
+          <p:nvPr/>
+        </p:nvSpPr>
+        <p:spPr>
+          <a:xfrm>
             <a:off x="5391150" y="3124200"/>
             <a:ext cx="666750" cy="228600"/>
           </a:xfrm>
-          <a:prstGeom xmlns:a="http://schemas.openxmlformats.org/drawingml/2006/main" prst="rect">
-            <a:avLst/>
-          </a:prstGeom>
-          <a:solidFill xmlns:a="http://schemas.openxmlformats.org/drawingml/2006/main">
-            <a:srgbClr val="000000">
-              <a:alpha val="0"/>
-            </a:srgbClr>
-          </a:solidFill>
-          <a:ln xmlns:a="http://schemas.openxmlformats.org/drawingml/2006/main" w="0">
-            <a:solidFill>
-              <a:srgbClr val="000000">
-                <a:alpha val="0"/>
-              </a:srgbClr>
-            </a:solidFill>
-            <a:prstDash val="solid"/>
-          </a:ln>
-        </p:spPr>
-        <p:txBody>
-          <a:bodyPr xmlns:a="http://schemas.openxmlformats.org/drawingml/2006/main" lIns="0" tIns="0" rIns="0" bIns="0" anchor="t"/>
-          <a:lstStyle xmlns:a="http://schemas.openxmlformats.org/drawingml/2006/main"/>
-          <a:p xmlns:a="http://schemas.openxmlformats.org/drawingml/2006/main">
+          <a:prstGeom prst="rect">
+            <a:avLst/>
+          </a:prstGeom>
+          <a:solidFill>
+            <a:srgbClr val="000000">
+              <a:alpha val="0"/>
+            </a:srgbClr>
+          </a:solidFill>
+          <a:ln w="0">
+            <a:solidFill>
+              <a:srgbClr val="000000">
+                <a:alpha val="0"/>
+              </a:srgbClr>
+            </a:solidFill>
+            <a:prstDash val="solid"/>
+          </a:ln>
+        </p:spPr>
+        <p:txBody>
+          <a:bodyPr lIns="0" tIns="0" rIns="0" bIns="0" anchor="t"/>
+          <a:lstStyle/>
+          <a:p>
             <a:pPr algn="l">
               <a:defRPr sz="1050" b="1">
                 <a:solidFill>
@@ -10756,7 +10756,7 @@
                 <a:ea typeface="Microsoft YaHei"/>
                 <a:cs typeface="Microsoft YaHei"/>
               </a:rPr>
-              <a:t>75%</a:t>
+              <a:t>alpha=.81</a:t>
             </a:r>
           </a:p>
         </p:txBody>
@@ -10764,43 +10764,43 @@
       <p:sp>
         <p:nvSpPr>
           <p:cNvPr id="17" name="">
-            <a:extLst xmlns:a="http://schemas.openxmlformats.org/drawingml/2006/main">
-              <a:ext uri="{FF2B5EF4-FFF2-40B4-BE49-F238E27FC236}">
-                <a16:creationId xmlns:a16="http://schemas.microsoft.com/office/drawing/2014/main" id="{FEAB68CF-356D-4966-A9A3-3EEC62F7D5C5}"/>
-              </a:ext>
-            </a:extLst>
-          </p:cNvPr>
-          <p:cNvSpPr>
-            <a:spLocks xmlns:a="http://schemas.openxmlformats.org/drawingml/2006/main" noGrp="1"/>
-          </p:cNvSpPr>
-          <p:nvPr/>
-        </p:nvSpPr>
-        <p:spPr>
-          <a:xfrm xmlns:a="http://schemas.openxmlformats.org/drawingml/2006/main">
+            <a:extLst>
+              <a:ext uri="{FF2B5EF4-FFF2-40B4-BE49-F238E27FC236}">
+                <ns2:creationId id="{FEAB68CF-356D-4966-A9A3-3EEC62F7D5C5}"/>
+              </a:ext>
+            </a:extLst>
+          </p:cNvPr>
+          <p:cNvSpPr>
+            <a:spLocks noGrp="1"/>
+          </p:cNvSpPr>
+          <p:nvPr/>
+        </p:nvSpPr>
+        <p:spPr>
+          <a:xfrm>
             <a:off x="781050" y="3638550"/>
             <a:ext cx="2762250" cy="228600"/>
           </a:xfrm>
-          <a:prstGeom xmlns:a="http://schemas.openxmlformats.org/drawingml/2006/main" prst="rect">
-            <a:avLst/>
-          </a:prstGeom>
-          <a:solidFill xmlns:a="http://schemas.openxmlformats.org/drawingml/2006/main">
-            <a:srgbClr val="000000">
-              <a:alpha val="0"/>
-            </a:srgbClr>
-          </a:solidFill>
-          <a:ln xmlns:a="http://schemas.openxmlformats.org/drawingml/2006/main" w="0">
-            <a:solidFill>
-              <a:srgbClr val="000000">
-                <a:alpha val="0"/>
-              </a:srgbClr>
-            </a:solidFill>
-            <a:prstDash val="solid"/>
-          </a:ln>
-        </p:spPr>
-        <p:txBody>
-          <a:bodyPr xmlns:a="http://schemas.openxmlformats.org/drawingml/2006/main" lIns="0" tIns="0" rIns="0" bIns="0" anchor="t"/>
-          <a:lstStyle xmlns:a="http://schemas.openxmlformats.org/drawingml/2006/main"/>
-          <a:p xmlns:a="http://schemas.openxmlformats.org/drawingml/2006/main">
+          <a:prstGeom prst="rect">
+            <a:avLst/>
+          </a:prstGeom>
+          <a:solidFill>
+            <a:srgbClr val="000000">
+              <a:alpha val="0"/>
+            </a:srgbClr>
+          </a:solidFill>
+          <a:ln w="0">
+            <a:solidFill>
+              <a:srgbClr val="000000">
+                <a:alpha val="0"/>
+              </a:srgbClr>
+            </a:solidFill>
+            <a:prstDash val="solid"/>
+          </a:ln>
+        </p:spPr>
+        <p:txBody>
+          <a:bodyPr lIns="0" tIns="0" rIns="0" bIns="0" anchor="t"/>
+          <a:lstStyle/>
+          <a:p>
             <a:pPr algn="l">
               <a:defRPr sz="1050" b="0">
                 <a:solidFill>
@@ -10820,7 +10820,7 @@
                 <a:ea typeface="Microsoft YaHei"/>
                 <a:cs typeface="Microsoft YaHei"/>
               </a:rPr>
-              <a:t>Worry about incorrect form being judged</a:t>
+              <a:t>Association with avoidance</a:t>
             </a:r>
           </a:p>
         </p:txBody>
@@ -10828,29 +10828,29 @@
       <p:sp>
         <p:nvSpPr>
           <p:cNvPr id="18" name="">
-            <a:extLst xmlns:a="http://schemas.openxmlformats.org/drawingml/2006/main">
-              <a:ext uri="{FF2B5EF4-FFF2-40B4-BE49-F238E27FC236}">
-                <a16:creationId xmlns:a16="http://schemas.microsoft.com/office/drawing/2014/main" id="{C0F19C47-EAAE-438D-940C-9E2C47423C14}"/>
-              </a:ext>
-            </a:extLst>
-          </p:cNvPr>
-          <p:cNvSpPr>
-            <a:spLocks xmlns:a="http://schemas.openxmlformats.org/drawingml/2006/main" noGrp="1"/>
-          </p:cNvSpPr>
-          <p:nvPr/>
-        </p:nvSpPr>
-        <p:spPr>
-          <a:xfrm xmlns:a="http://schemas.openxmlformats.org/drawingml/2006/main">
+            <a:extLst>
+              <a:ext uri="{FF2B5EF4-FFF2-40B4-BE49-F238E27FC236}">
+                <ns2:creationId id="{C0F19C47-EAAE-438D-940C-9E2C47423C14}"/>
+              </a:ext>
+            </a:extLst>
+          </p:cNvPr>
+          <p:cNvSpPr>
+            <a:spLocks noGrp="1"/>
+          </p:cNvSpPr>
+          <p:nvPr/>
+        </p:nvSpPr>
+        <p:spPr>
+          <a:xfrm>
             <a:off x="3676650" y="3676650"/>
             <a:ext cx="1619250" cy="171450"/>
           </a:xfrm>
-          <a:prstGeom xmlns:a="http://schemas.openxmlformats.org/drawingml/2006/main" prst="rect">
-            <a:avLst/>
-          </a:prstGeom>
-          <a:solidFill xmlns:a="http://schemas.openxmlformats.org/drawingml/2006/main">
+          <a:prstGeom prst="rect">
+            <a:avLst/>
+          </a:prstGeom>
+          <a:solidFill>
             <a:srgbClr val="E7DED0"/>
           </a:solidFill>
-          <a:ln xmlns:a="http://schemas.openxmlformats.org/drawingml/2006/main" w="0">
+          <a:ln w="0">
             <a:solidFill>
               <a:srgbClr val="000000">
                 <a:alpha val="0"/>
@@ -10863,29 +10863,29 @@
       <p:sp>
         <p:nvSpPr>
           <p:cNvPr id="19" name="">
-            <a:extLst xmlns:a="http://schemas.openxmlformats.org/drawingml/2006/main">
-              <a:ext uri="{FF2B5EF4-FFF2-40B4-BE49-F238E27FC236}">
-                <a16:creationId xmlns:a16="http://schemas.microsoft.com/office/drawing/2014/main" id="{B32FC930-5584-4855-87B6-CF39AE5BEE22}"/>
-              </a:ext>
-            </a:extLst>
-          </p:cNvPr>
-          <p:cNvSpPr>
-            <a:spLocks xmlns:a="http://schemas.openxmlformats.org/drawingml/2006/main" noGrp="1"/>
-          </p:cNvSpPr>
-          <p:nvPr/>
-        </p:nvSpPr>
-        <p:spPr>
-          <a:xfrm xmlns:a="http://schemas.openxmlformats.org/drawingml/2006/main">
+            <a:extLst>
+              <a:ext uri="{FF2B5EF4-FFF2-40B4-BE49-F238E27FC236}">
+                <ns2:creationId id="{B32FC930-5584-4855-87B6-CF39AE5BEE22}"/>
+              </a:ext>
+            </a:extLst>
+          </p:cNvPr>
+          <p:cNvSpPr>
+            <a:spLocks noGrp="1"/>
+          </p:cNvSpPr>
+          <p:nvPr/>
+        </p:nvSpPr>
+        <p:spPr>
+          <a:xfrm>
             <a:off x="3676650" y="3676650"/>
             <a:ext cx="1062714" cy="171450"/>
           </a:xfrm>
-          <a:prstGeom xmlns:a="http://schemas.openxmlformats.org/drawingml/2006/main" prst="rect">
-            <a:avLst/>
-          </a:prstGeom>
-          <a:solidFill xmlns:a="http://schemas.openxmlformats.org/drawingml/2006/main">
+          <a:prstGeom prst="rect">
+            <a:avLst/>
+          </a:prstGeom>
+          <a:solidFill>
             <a:srgbClr val="2F7C77"/>
           </a:solidFill>
-          <a:ln xmlns:a="http://schemas.openxmlformats.org/drawingml/2006/main" w="0">
+          <a:ln w="0">
             <a:solidFill>
               <a:srgbClr val="000000">
                 <a:alpha val="0"/>
@@ -10898,43 +10898,43 @@
       <p:sp>
         <p:nvSpPr>
           <p:cNvPr id="20" name="">
-            <a:extLst xmlns:a="http://schemas.openxmlformats.org/drawingml/2006/main">
-              <a:ext uri="{FF2B5EF4-FFF2-40B4-BE49-F238E27FC236}">
-                <a16:creationId xmlns:a16="http://schemas.microsoft.com/office/drawing/2014/main" id="{7F4303DD-4662-4975-8E40-910F771195B5}"/>
-              </a:ext>
-            </a:extLst>
-          </p:cNvPr>
-          <p:cNvSpPr>
-            <a:spLocks xmlns:a="http://schemas.openxmlformats.org/drawingml/2006/main" noGrp="1"/>
-          </p:cNvSpPr>
-          <p:nvPr/>
-        </p:nvSpPr>
-        <p:spPr>
-          <a:xfrm xmlns:a="http://schemas.openxmlformats.org/drawingml/2006/main">
+            <a:extLst>
+              <a:ext uri="{FF2B5EF4-FFF2-40B4-BE49-F238E27FC236}">
+                <ns2:creationId id="{7F4303DD-4662-4975-8E40-910F771195B5}"/>
+              </a:ext>
+            </a:extLst>
+          </p:cNvPr>
+          <p:cNvSpPr>
+            <a:spLocks noGrp="1"/>
+          </p:cNvSpPr>
+          <p:nvPr/>
+        </p:nvSpPr>
+        <p:spPr>
+          <a:xfrm>
             <a:off x="5391150" y="3638550"/>
             <a:ext cx="666750" cy="228600"/>
           </a:xfrm>
-          <a:prstGeom xmlns:a="http://schemas.openxmlformats.org/drawingml/2006/main" prst="rect">
-            <a:avLst/>
-          </a:prstGeom>
-          <a:solidFill xmlns:a="http://schemas.openxmlformats.org/drawingml/2006/main">
-            <a:srgbClr val="000000">
-              <a:alpha val="0"/>
-            </a:srgbClr>
-          </a:solidFill>
-          <a:ln xmlns:a="http://schemas.openxmlformats.org/drawingml/2006/main" w="0">
-            <a:solidFill>
-              <a:srgbClr val="000000">
-                <a:alpha val="0"/>
-              </a:srgbClr>
-            </a:solidFill>
-            <a:prstDash val="solid"/>
-          </a:ln>
-        </p:spPr>
-        <p:txBody>
-          <a:bodyPr xmlns:a="http://schemas.openxmlformats.org/drawingml/2006/main" lIns="0" tIns="0" rIns="0" bIns="0" anchor="t"/>
-          <a:lstStyle xmlns:a="http://schemas.openxmlformats.org/drawingml/2006/main"/>
-          <a:p xmlns:a="http://schemas.openxmlformats.org/drawingml/2006/main">
+          <a:prstGeom prst="rect">
+            <a:avLst/>
+          </a:prstGeom>
+          <a:solidFill>
+            <a:srgbClr val="000000">
+              <a:alpha val="0"/>
+            </a:srgbClr>
+          </a:solidFill>
+          <a:ln w="0">
+            <a:solidFill>
+              <a:srgbClr val="000000">
+                <a:alpha val="0"/>
+              </a:srgbClr>
+            </a:solidFill>
+            <a:prstDash val="solid"/>
+          </a:ln>
+        </p:spPr>
+        <p:txBody>
+          <a:bodyPr lIns="0" tIns="0" rIns="0" bIns="0" anchor="t"/>
+          <a:lstStyle/>
+          <a:p>
             <a:pPr algn="l">
               <a:defRPr sz="1050" b="1">
                 <a:solidFill>
@@ -10954,7 +10954,7 @@
                 <a:ea typeface="Microsoft YaHei"/>
                 <a:cs typeface="Microsoft YaHei"/>
               </a:rPr>
-              <a:t>65.63%</a:t>
+              <a:t>rho=.65</a:t>
             </a:r>
           </a:p>
         </p:txBody>
@@ -10962,43 +10962,43 @@
       <p:sp>
         <p:nvSpPr>
           <p:cNvPr id="21" name="">
-            <a:extLst xmlns:a="http://schemas.openxmlformats.org/drawingml/2006/main">
-              <a:ext uri="{FF2B5EF4-FFF2-40B4-BE49-F238E27FC236}">
-                <a16:creationId xmlns:a16="http://schemas.microsoft.com/office/drawing/2014/main" id="{B49A6E5F-A7C9-41F3-8894-9D39AB193E54}"/>
-              </a:ext>
-            </a:extLst>
-          </p:cNvPr>
-          <p:cNvSpPr>
-            <a:spLocks xmlns:a="http://schemas.openxmlformats.org/drawingml/2006/main" noGrp="1"/>
-          </p:cNvSpPr>
-          <p:nvPr/>
-        </p:nvSpPr>
-        <p:spPr>
-          <a:xfrm xmlns:a="http://schemas.openxmlformats.org/drawingml/2006/main">
+            <a:extLst>
+              <a:ext uri="{FF2B5EF4-FFF2-40B4-BE49-F238E27FC236}">
+                <ns2:creationId id="{B49A6E5F-A7C9-41F3-8894-9D39AB193E54}"/>
+              </a:ext>
+            </a:extLst>
+          </p:cNvPr>
+          <p:cNvSpPr>
+            <a:spLocks noGrp="1"/>
+          </p:cNvSpPr>
+          <p:nvPr/>
+        </p:nvSpPr>
+        <p:spPr>
+          <a:xfrm>
             <a:off x="781050" y="4152900"/>
             <a:ext cx="2762250" cy="228600"/>
           </a:xfrm>
-          <a:prstGeom xmlns:a="http://schemas.openxmlformats.org/drawingml/2006/main" prst="rect">
-            <a:avLst/>
-          </a:prstGeom>
-          <a:solidFill xmlns:a="http://schemas.openxmlformats.org/drawingml/2006/main">
-            <a:srgbClr val="000000">
-              <a:alpha val="0"/>
-            </a:srgbClr>
-          </a:solidFill>
-          <a:ln xmlns:a="http://schemas.openxmlformats.org/drawingml/2006/main" w="0">
-            <a:solidFill>
-              <a:srgbClr val="000000">
-                <a:alpha val="0"/>
-              </a:srgbClr>
-            </a:solidFill>
-            <a:prstDash val="solid"/>
-          </a:ln>
-        </p:spPr>
-        <p:txBody>
-          <a:bodyPr xmlns:a="http://schemas.openxmlformats.org/drawingml/2006/main" lIns="0" tIns="0" rIns="0" bIns="0" anchor="t"/>
-          <a:lstStyle xmlns:a="http://schemas.openxmlformats.org/drawingml/2006/main"/>
-          <a:p xmlns:a="http://schemas.openxmlformats.org/drawingml/2006/main">
+          <a:prstGeom prst="rect">
+            <a:avLst/>
+          </a:prstGeom>
+          <a:solidFill>
+            <a:srgbClr val="000000">
+              <a:alpha val="0"/>
+            </a:srgbClr>
+          </a:solidFill>
+          <a:ln w="0">
+            <a:solidFill>
+              <a:srgbClr val="000000">
+                <a:alpha val="0"/>
+              </a:srgbClr>
+            </a:solidFill>
+            <a:prstDash val="solid"/>
+          </a:ln>
+        </p:spPr>
+        <p:txBody>
+          <a:bodyPr lIns="0" tIns="0" rIns="0" bIns="0" anchor="t"/>
+          <a:lstStyle/>
+          <a:p>
             <a:pPr algn="l">
               <a:defRPr sz="1050" b="0">
                 <a:solidFill>
@@ -11018,7 +11018,7 @@
                 <a:ea typeface="Microsoft YaHei"/>
                 <a:cs typeface="Microsoft YaHei"/>
               </a:rPr>
-              <a:t>Free-weight area feels male-dominated</a:t>
+              <a:t>Free-weight users report less pressure</a:t>
             </a:r>
           </a:p>
         </p:txBody>
@@ -11026,29 +11026,29 @@
       <p:sp>
         <p:nvSpPr>
           <p:cNvPr id="22" name="">
-            <a:extLst xmlns:a="http://schemas.openxmlformats.org/drawingml/2006/main">
-              <a:ext uri="{FF2B5EF4-FFF2-40B4-BE49-F238E27FC236}">
-                <a16:creationId xmlns:a16="http://schemas.microsoft.com/office/drawing/2014/main" id="{102E5540-6278-4DEF-BCE6-3A8C72FC9798}"/>
-              </a:ext>
-            </a:extLst>
-          </p:cNvPr>
-          <p:cNvSpPr>
-            <a:spLocks xmlns:a="http://schemas.openxmlformats.org/drawingml/2006/main" noGrp="1"/>
-          </p:cNvSpPr>
-          <p:nvPr/>
-        </p:nvSpPr>
-        <p:spPr>
-          <a:xfrm xmlns:a="http://schemas.openxmlformats.org/drawingml/2006/main">
+            <a:extLst>
+              <a:ext uri="{FF2B5EF4-FFF2-40B4-BE49-F238E27FC236}">
+                <ns2:creationId id="{102E5540-6278-4DEF-BCE6-3A8C72FC9798}"/>
+              </a:ext>
+            </a:extLst>
+          </p:cNvPr>
+          <p:cNvSpPr>
+            <a:spLocks noGrp="1"/>
+          </p:cNvSpPr>
+          <p:nvPr/>
+        </p:nvSpPr>
+        <p:spPr>
+          <a:xfrm>
             <a:off x="3676650" y="4191000"/>
             <a:ext cx="1619250" cy="171450"/>
           </a:xfrm>
-          <a:prstGeom xmlns:a="http://schemas.openxmlformats.org/drawingml/2006/main" prst="rect">
-            <a:avLst/>
-          </a:prstGeom>
-          <a:solidFill xmlns:a="http://schemas.openxmlformats.org/drawingml/2006/main">
+          <a:prstGeom prst="rect">
+            <a:avLst/>
+          </a:prstGeom>
+          <a:solidFill>
             <a:srgbClr val="E7DED0"/>
           </a:solidFill>
-          <a:ln xmlns:a="http://schemas.openxmlformats.org/drawingml/2006/main" w="0">
+          <a:ln w="0">
             <a:solidFill>
               <a:srgbClr val="000000">
                 <a:alpha val="0"/>
@@ -11061,29 +11061,29 @@
       <p:sp>
         <p:nvSpPr>
           <p:cNvPr id="23" name="">
-            <a:extLst xmlns:a="http://schemas.openxmlformats.org/drawingml/2006/main">
-              <a:ext uri="{FF2B5EF4-FFF2-40B4-BE49-F238E27FC236}">
-                <a16:creationId xmlns:a16="http://schemas.microsoft.com/office/drawing/2014/main" id="{945DA41C-78FE-4A01-808B-92BFA59B769F}"/>
-              </a:ext>
-            </a:extLst>
-          </p:cNvPr>
-          <p:cNvSpPr>
-            <a:spLocks xmlns:a="http://schemas.openxmlformats.org/drawingml/2006/main" noGrp="1"/>
-          </p:cNvSpPr>
-          <p:nvPr/>
-        </p:nvSpPr>
-        <p:spPr>
-          <a:xfrm xmlns:a="http://schemas.openxmlformats.org/drawingml/2006/main">
+            <a:extLst>
+              <a:ext uri="{FF2B5EF4-FFF2-40B4-BE49-F238E27FC236}">
+                <ns2:creationId id="{945DA41C-78FE-4A01-808B-92BFA59B769F}"/>
+              </a:ext>
+            </a:extLst>
+          </p:cNvPr>
+          <p:cNvSpPr>
+            <a:spLocks noGrp="1"/>
+          </p:cNvSpPr>
+          <p:nvPr/>
+        </p:nvSpPr>
+        <p:spPr>
+          <a:xfrm>
             <a:off x="3676650" y="4191000"/>
             <a:ext cx="1012031" cy="171450"/>
           </a:xfrm>
-          <a:prstGeom xmlns:a="http://schemas.openxmlformats.org/drawingml/2006/main" prst="rect">
-            <a:avLst/>
-          </a:prstGeom>
-          <a:solidFill xmlns:a="http://schemas.openxmlformats.org/drawingml/2006/main">
+          <a:prstGeom prst="rect">
+            <a:avLst/>
+          </a:prstGeom>
+          <a:solidFill>
             <a:srgbClr val="546A8B"/>
           </a:solidFill>
-          <a:ln xmlns:a="http://schemas.openxmlformats.org/drawingml/2006/main" w="0">
+          <a:ln w="0">
             <a:solidFill>
               <a:srgbClr val="000000">
                 <a:alpha val="0"/>
@@ -11096,43 +11096,43 @@
       <p:sp>
         <p:nvSpPr>
           <p:cNvPr id="24" name="">
-            <a:extLst xmlns:a="http://schemas.openxmlformats.org/drawingml/2006/main">
-              <a:ext uri="{FF2B5EF4-FFF2-40B4-BE49-F238E27FC236}">
-                <a16:creationId xmlns:a16="http://schemas.microsoft.com/office/drawing/2014/main" id="{113DA689-D795-4D7A-99B4-AEC8BD6979E7}"/>
-              </a:ext>
-            </a:extLst>
-          </p:cNvPr>
-          <p:cNvSpPr>
-            <a:spLocks xmlns:a="http://schemas.openxmlformats.org/drawingml/2006/main" noGrp="1"/>
-          </p:cNvSpPr>
-          <p:nvPr/>
-        </p:nvSpPr>
-        <p:spPr>
-          <a:xfrm xmlns:a="http://schemas.openxmlformats.org/drawingml/2006/main">
+            <a:extLst>
+              <a:ext uri="{FF2B5EF4-FFF2-40B4-BE49-F238E27FC236}">
+                <ns2:creationId id="{113DA689-D795-4D7A-99B4-AEC8BD6979E7}"/>
+              </a:ext>
+            </a:extLst>
+          </p:cNvPr>
+          <p:cNvSpPr>
+            <a:spLocks noGrp="1"/>
+          </p:cNvSpPr>
+          <p:nvPr/>
+        </p:nvSpPr>
+        <p:spPr>
+          <a:xfrm>
             <a:off x="5391150" y="4152900"/>
             <a:ext cx="666750" cy="228600"/>
           </a:xfrm>
-          <a:prstGeom xmlns:a="http://schemas.openxmlformats.org/drawingml/2006/main" prst="rect">
-            <a:avLst/>
-          </a:prstGeom>
-          <a:solidFill xmlns:a="http://schemas.openxmlformats.org/drawingml/2006/main">
-            <a:srgbClr val="000000">
-              <a:alpha val="0"/>
-            </a:srgbClr>
-          </a:solidFill>
-          <a:ln xmlns:a="http://schemas.openxmlformats.org/drawingml/2006/main" w="0">
-            <a:solidFill>
-              <a:srgbClr val="000000">
-                <a:alpha val="0"/>
-              </a:srgbClr>
-            </a:solidFill>
-            <a:prstDash val="solid"/>
-          </a:ln>
-        </p:spPr>
-        <p:txBody>
-          <a:bodyPr xmlns:a="http://schemas.openxmlformats.org/drawingml/2006/main" lIns="0" tIns="0" rIns="0" bIns="0" anchor="t"/>
-          <a:lstStyle xmlns:a="http://schemas.openxmlformats.org/drawingml/2006/main"/>
-          <a:p xmlns:a="http://schemas.openxmlformats.org/drawingml/2006/main">
+          <a:prstGeom prst="rect">
+            <a:avLst/>
+          </a:prstGeom>
+          <a:solidFill>
+            <a:srgbClr val="000000">
+              <a:alpha val="0"/>
+            </a:srgbClr>
+          </a:solidFill>
+          <a:ln w="0">
+            <a:solidFill>
+              <a:srgbClr val="000000">
+                <a:alpha val="0"/>
+              </a:srgbClr>
+            </a:solidFill>
+            <a:prstDash val="solid"/>
+          </a:ln>
+        </p:spPr>
+        <p:txBody>
+          <a:bodyPr lIns="0" tIns="0" rIns="0" bIns="0" anchor="t"/>
+          <a:lstStyle/>
+          <a:p>
             <a:pPr algn="l">
               <a:defRPr sz="1050" b="1">
                 <a:solidFill>
@@ -11152,7 +11152,7 @@
                 <a:ea typeface="Microsoft YaHei"/>
                 <a:cs typeface="Microsoft YaHei"/>
               </a:rPr>
-              <a:t>62.5%</a:t>
+              <a:t>2.60 vs 3.92</a:t>
             </a:r>
           </a:p>
         </p:txBody>
@@ -11160,43 +11160,43 @@
       <p:sp>
         <p:nvSpPr>
           <p:cNvPr id="25" name="">
-            <a:extLst xmlns:a="http://schemas.openxmlformats.org/drawingml/2006/main">
-              <a:ext uri="{FF2B5EF4-FFF2-40B4-BE49-F238E27FC236}">
-                <a16:creationId xmlns:a16="http://schemas.microsoft.com/office/drawing/2014/main" id="{4CBE3A23-0D26-40B0-A021-79217F0D607D}"/>
-              </a:ext>
-            </a:extLst>
-          </p:cNvPr>
-          <p:cNvSpPr>
-            <a:spLocks xmlns:a="http://schemas.openxmlformats.org/drawingml/2006/main" noGrp="1"/>
-          </p:cNvSpPr>
-          <p:nvPr/>
-        </p:nvSpPr>
-        <p:spPr>
-          <a:xfrm xmlns:a="http://schemas.openxmlformats.org/drawingml/2006/main">
+            <a:extLst>
+              <a:ext uri="{FF2B5EF4-FFF2-40B4-BE49-F238E27FC236}">
+                <ns2:creationId id="{4CBE3A23-0D26-40B0-A021-79217F0D607D}"/>
+              </a:ext>
+            </a:extLst>
+          </p:cNvPr>
+          <p:cNvSpPr>
+            <a:spLocks noGrp="1"/>
+          </p:cNvSpPr>
+          <p:nvPr/>
+        </p:nvSpPr>
+        <p:spPr>
+          <a:xfrm>
             <a:off x="800100" y="4933950"/>
             <a:ext cx="4000500" cy="419100"/>
           </a:xfrm>
-          <a:prstGeom xmlns:a="http://schemas.openxmlformats.org/drawingml/2006/main" prst="rect">
-            <a:avLst/>
-          </a:prstGeom>
-          <a:solidFill xmlns:a="http://schemas.openxmlformats.org/drawingml/2006/main">
-            <a:srgbClr val="000000">
-              <a:alpha val="0"/>
-            </a:srgbClr>
-          </a:solidFill>
-          <a:ln xmlns:a="http://schemas.openxmlformats.org/drawingml/2006/main" w="0">
-            <a:solidFill>
-              <a:srgbClr val="000000">
-                <a:alpha val="0"/>
-              </a:srgbClr>
-            </a:solidFill>
-            <a:prstDash val="solid"/>
-          </a:ln>
-        </p:spPr>
-        <p:txBody>
-          <a:bodyPr xmlns:a="http://schemas.openxmlformats.org/drawingml/2006/main" lIns="0" tIns="0" rIns="0" bIns="0" anchor="t"/>
-          <a:lstStyle xmlns:a="http://schemas.openxmlformats.org/drawingml/2006/main"/>
-          <a:p xmlns:a="http://schemas.openxmlformats.org/drawingml/2006/main">
+          <a:prstGeom prst="rect">
+            <a:avLst/>
+          </a:prstGeom>
+          <a:solidFill>
+            <a:srgbClr val="000000">
+              <a:alpha val="0"/>
+            </a:srgbClr>
+          </a:solidFill>
+          <a:ln w="0">
+            <a:solidFill>
+              <a:srgbClr val="000000">
+                <a:alpha val="0"/>
+              </a:srgbClr>
+            </a:solidFill>
+            <a:prstDash val="solid"/>
+          </a:ln>
+        </p:spPr>
+        <p:txBody>
+          <a:bodyPr lIns="0" tIns="0" rIns="0" bIns="0" anchor="t"/>
+          <a:lstStyle/>
+          <a:p>
             <a:pPr algn="l">
               <a:defRPr sz="1650" b="1">
                 <a:solidFill>
@@ -11216,7 +11216,7 @@
                 <a:ea typeface="Georgia"/>
                 <a:cs typeface="Georgia"/>
               </a:rPr>
-              <a:t>68.75% avoided the free-weight area at least sometimes.</a:t>
+              <a:t>68.75% avoided at least sometimes; pressure correlates with avoidance (p&lt;.001).</a:t>
             </a:r>
           </a:p>
         </p:txBody>
@@ -11224,29 +11224,29 @@
       <p:sp>
         <p:nvSpPr>
           <p:cNvPr id="26" name="">
-            <a:extLst xmlns:a="http://schemas.openxmlformats.org/drawingml/2006/main">
-              <a:ext uri="{FF2B5EF4-FFF2-40B4-BE49-F238E27FC236}">
-                <a16:creationId xmlns:a16="http://schemas.microsoft.com/office/drawing/2014/main" id="{0805576C-ED94-4186-B3E9-E09A632E9377}"/>
-              </a:ext>
-            </a:extLst>
-          </p:cNvPr>
-          <p:cNvSpPr>
-            <a:spLocks xmlns:a="http://schemas.openxmlformats.org/drawingml/2006/main" noGrp="1"/>
-          </p:cNvSpPr>
-          <p:nvPr/>
-        </p:nvSpPr>
-        <p:spPr>
-          <a:xfrm xmlns:a="http://schemas.openxmlformats.org/drawingml/2006/main">
+            <a:extLst>
+              <a:ext uri="{FF2B5EF4-FFF2-40B4-BE49-F238E27FC236}">
+                <ns2:creationId id="{0805576C-ED94-4186-B3E9-E09A632E9377}"/>
+              </a:ext>
+            </a:extLst>
+          </p:cNvPr>
+          <p:cNvSpPr>
+            <a:spLocks noGrp="1"/>
+          </p:cNvSpPr>
+          <p:nvPr/>
+        </p:nvSpPr>
+        <p:spPr>
+          <a:xfrm>
             <a:off x="609600" y="6334125"/>
             <a:ext cx="9810750" cy="9525"/>
           </a:xfrm>
-          <a:prstGeom xmlns:a="http://schemas.openxmlformats.org/drawingml/2006/main" prst="rect">
-            <a:avLst/>
-          </a:prstGeom>
-          <a:solidFill xmlns:a="http://schemas.openxmlformats.org/drawingml/2006/main">
+          <a:prstGeom prst="rect">
+            <a:avLst/>
+          </a:prstGeom>
+          <a:solidFill>
             <a:srgbClr val="E2D8C9"/>
           </a:solidFill>
-          <a:ln xmlns:a="http://schemas.openxmlformats.org/drawingml/2006/main" w="0">
+          <a:ln w="0">
             <a:solidFill>
               <a:srgbClr val="000000">
                 <a:alpha val="0"/>
@@ -11259,43 +11259,43 @@
       <p:sp>
         <p:nvSpPr>
           <p:cNvPr id="27" name="">
-            <a:extLst xmlns:a="http://schemas.openxmlformats.org/drawingml/2006/main">
-              <a:ext uri="{FF2B5EF4-FFF2-40B4-BE49-F238E27FC236}">
-                <a16:creationId xmlns:a16="http://schemas.microsoft.com/office/drawing/2014/main" id="{13AA0961-30D6-4C85-A3B7-7541604096F1}"/>
-              </a:ext>
-            </a:extLst>
-          </p:cNvPr>
-          <p:cNvSpPr>
-            <a:spLocks xmlns:a="http://schemas.openxmlformats.org/drawingml/2006/main" noGrp="1"/>
-          </p:cNvSpPr>
-          <p:nvPr/>
-        </p:nvSpPr>
-        <p:spPr>
-          <a:xfrm xmlns:a="http://schemas.openxmlformats.org/drawingml/2006/main">
+            <a:extLst>
+              <a:ext uri="{FF2B5EF4-FFF2-40B4-BE49-F238E27FC236}">
+                <ns2:creationId id="{13AA0961-30D6-4C85-A3B7-7541604096F1}"/>
+              </a:ext>
+            </a:extLst>
+          </p:cNvPr>
+          <p:cNvSpPr>
+            <a:spLocks noGrp="1"/>
+          </p:cNvSpPr>
+          <p:nvPr/>
+        </p:nvSpPr>
+        <p:spPr>
+          <a:xfrm>
             <a:off x="609600" y="6419850"/>
             <a:ext cx="7239000" cy="228600"/>
           </a:xfrm>
-          <a:prstGeom xmlns:a="http://schemas.openxmlformats.org/drawingml/2006/main" prst="rect">
-            <a:avLst/>
-          </a:prstGeom>
-          <a:solidFill xmlns:a="http://schemas.openxmlformats.org/drawingml/2006/main">
-            <a:srgbClr val="000000">
-              <a:alpha val="0"/>
-            </a:srgbClr>
-          </a:solidFill>
-          <a:ln xmlns:a="http://schemas.openxmlformats.org/drawingml/2006/main" w="0">
-            <a:solidFill>
-              <a:srgbClr val="000000">
-                <a:alpha val="0"/>
-              </a:srgbClr>
-            </a:solidFill>
-            <a:prstDash val="solid"/>
-          </a:ln>
-        </p:spPr>
-        <p:txBody>
-          <a:bodyPr xmlns:a="http://schemas.openxmlformats.org/drawingml/2006/main" lIns="0" tIns="0" rIns="0" bIns="0" anchor="t"/>
-          <a:lstStyle xmlns:a="http://schemas.openxmlformats.org/drawingml/2006/main"/>
-          <a:p xmlns:a="http://schemas.openxmlformats.org/drawingml/2006/main">
+          <a:prstGeom prst="rect">
+            <a:avLst/>
+          </a:prstGeom>
+          <a:solidFill>
+            <a:srgbClr val="000000">
+              <a:alpha val="0"/>
+            </a:srgbClr>
+          </a:solidFill>
+          <a:ln w="0">
+            <a:solidFill>
+              <a:srgbClr val="000000">
+                <a:alpha val="0"/>
+              </a:srgbClr>
+            </a:solidFill>
+            <a:prstDash val="solid"/>
+          </a:ln>
+        </p:spPr>
+        <p:txBody>
+          <a:bodyPr lIns="0" tIns="0" rIns="0" bIns="0" anchor="t"/>
+          <a:lstStyle/>
+          <a:p>
             <a:pPr algn="l">
               <a:defRPr sz="750" b="0">
                 <a:solidFill>
@@ -11315,7 +11315,7 @@
                 <a:ea typeface="Microsoft YaHei"/>
                 <a:cs typeface="Microsoft YaHei"/>
               </a:rPr>
-              <a:t>Survey slider items Q10-Q15 and free-weight avoidance frequency</a:t>
+              <a:t>Participant-level scores, Spearman correlation, and avoidance frequency</a:t>
             </a:r>
           </a:p>
         </p:txBody>
@@ -11323,43 +11323,43 @@
       <p:sp>
         <p:nvSpPr>
           <p:cNvPr id="28" name="">
-            <a:extLst xmlns:a="http://schemas.openxmlformats.org/drawingml/2006/main">
-              <a:ext uri="{FF2B5EF4-FFF2-40B4-BE49-F238E27FC236}">
-                <a16:creationId xmlns:a16="http://schemas.microsoft.com/office/drawing/2014/main" id="{D90DB01C-1022-4097-B358-EC263236C739}"/>
-              </a:ext>
-            </a:extLst>
-          </p:cNvPr>
-          <p:cNvSpPr>
-            <a:spLocks xmlns:a="http://schemas.openxmlformats.org/drawingml/2006/main" noGrp="1"/>
-          </p:cNvSpPr>
-          <p:nvPr/>
-        </p:nvSpPr>
-        <p:spPr>
-          <a:xfrm xmlns:a="http://schemas.openxmlformats.org/drawingml/2006/main">
+            <a:extLst>
+              <a:ext uri="{FF2B5EF4-FFF2-40B4-BE49-F238E27FC236}">
+                <ns2:creationId id="{D90DB01C-1022-4097-B358-EC263236C739}"/>
+              </a:ext>
+            </a:extLst>
+          </p:cNvPr>
+          <p:cNvSpPr>
+            <a:spLocks noGrp="1"/>
+          </p:cNvSpPr>
+          <p:nvPr/>
+        </p:nvSpPr>
+        <p:spPr>
+          <a:xfrm>
             <a:off x="10953750" y="6419850"/>
             <a:ext cx="628650" cy="228600"/>
           </a:xfrm>
-          <a:prstGeom xmlns:a="http://schemas.openxmlformats.org/drawingml/2006/main" prst="rect">
-            <a:avLst/>
-          </a:prstGeom>
-          <a:solidFill xmlns:a="http://schemas.openxmlformats.org/drawingml/2006/main">
-            <a:srgbClr val="000000">
-              <a:alpha val="0"/>
-            </a:srgbClr>
-          </a:solidFill>
-          <a:ln xmlns:a="http://schemas.openxmlformats.org/drawingml/2006/main" w="0">
-            <a:solidFill>
-              <a:srgbClr val="000000">
-                <a:alpha val="0"/>
-              </a:srgbClr>
-            </a:solidFill>
-            <a:prstDash val="solid"/>
-          </a:ln>
-        </p:spPr>
-        <p:txBody>
-          <a:bodyPr xmlns:a="http://schemas.openxmlformats.org/drawingml/2006/main" lIns="0" tIns="0" rIns="0" bIns="0" anchor="t"/>
-          <a:lstStyle xmlns:a="http://schemas.openxmlformats.org/drawingml/2006/main"/>
-          <a:p xmlns:a="http://schemas.openxmlformats.org/drawingml/2006/main">
+          <a:prstGeom prst="rect">
+            <a:avLst/>
+          </a:prstGeom>
+          <a:solidFill>
+            <a:srgbClr val="000000">
+              <a:alpha val="0"/>
+            </a:srgbClr>
+          </a:solidFill>
+          <a:ln w="0">
+            <a:solidFill>
+              <a:srgbClr val="000000">
+                <a:alpha val="0"/>
+              </a:srgbClr>
+            </a:solidFill>
+            <a:prstDash val="solid"/>
+          </a:ln>
+        </p:spPr>
+        <p:txBody>
+          <a:bodyPr lIns="0" tIns="0" rIns="0" bIns="0" anchor="t"/>
+          <a:lstStyle/>
+          <a:p>
             <a:pPr algn="r">
               <a:defRPr sz="900" b="1">
                 <a:solidFill>
@@ -11387,7 +11387,7 @@
     </p:spTree>
     <p:extLst>
       <p:ext uri="{BB962C8B-B14F-4D97-AF65-F5344CB8AC3E}">
-        <p14:creationId xmlns:p14="http://schemas.microsoft.com/office/powerpoint/2010/main" val="396007075"/>
+        <ns4:creationId val="396007075"/>
       </p:ext>
     </p:extLst>
   </p:cSld>
@@ -11395,7 +11395,7 @@
 </file>
 
 <file path=ppt/slides/slide7.xml><?xml version="1.0" encoding="utf-8"?>
-<p:sld xmlns:p="http://schemas.openxmlformats.org/presentationml/2006/main">
+<p:sld xmlns:a="http://schemas.openxmlformats.org/drawingml/2006/main" xmlns:ns2="http://schemas.microsoft.com/office/drawing/2014/main" xmlns:ns4="http://schemas.microsoft.com/office/powerpoint/2010/main" xmlns:p="http://schemas.openxmlformats.org/presentationml/2006/main" xmlns:r="http://schemas.openxmlformats.org/officeDocument/2006/relationships">
   <p:cSld>
     <p:spTree>
       <p:nvGrpSpPr>
@@ -11404,34 +11404,34 @@
         <p:nvPr/>
       </p:nvGrpSpPr>
       <p:grpSpPr>
-        <a:xfrm xmlns:a="http://schemas.openxmlformats.org/drawingml/2006/main"/>
+        <a:xfrm/>
       </p:grpSpPr>
       <p:sp>
         <p:nvSpPr>
           <p:cNvPr id="1" name="">
-            <a:extLst xmlns:a="http://schemas.openxmlformats.org/drawingml/2006/main">
-              <a:ext uri="{FF2B5EF4-FFF2-40B4-BE49-F238E27FC236}">
-                <a16:creationId xmlns:a16="http://schemas.microsoft.com/office/drawing/2014/main" id="{1568E617-5487-4373-A65D-4AE0C22D8E3A}"/>
-              </a:ext>
-            </a:extLst>
-          </p:cNvPr>
-          <p:cNvSpPr>
-            <a:spLocks xmlns:a="http://schemas.openxmlformats.org/drawingml/2006/main" noGrp="1"/>
-          </p:cNvSpPr>
-          <p:nvPr/>
-        </p:nvSpPr>
-        <p:spPr>
-          <a:xfrm xmlns:a="http://schemas.openxmlformats.org/drawingml/2006/main">
+            <a:extLst>
+              <a:ext uri="{FF2B5EF4-FFF2-40B4-BE49-F238E27FC236}">
+                <ns2:creationId id="{1568E617-5487-4373-A65D-4AE0C22D8E3A}"/>
+              </a:ext>
+            </a:extLst>
+          </p:cNvPr>
+          <p:cNvSpPr>
+            <a:spLocks noGrp="1"/>
+          </p:cNvSpPr>
+          <p:nvPr/>
+        </p:nvSpPr>
+        <p:spPr>
+          <a:xfrm>
             <a:off x="0" y="0"/>
             <a:ext cx="12192000" cy="6858000"/>
           </a:xfrm>
-          <a:prstGeom xmlns:a="http://schemas.openxmlformats.org/drawingml/2006/main" prst="rect">
-            <a:avLst/>
-          </a:prstGeom>
-          <a:solidFill xmlns:a="http://schemas.openxmlformats.org/drawingml/2006/main">
+          <a:prstGeom prst="rect">
+            <a:avLst/>
+          </a:prstGeom>
+          <a:solidFill>
             <a:srgbClr val="F7F2EA"/>
           </a:solidFill>
-          <a:ln xmlns:a="http://schemas.openxmlformats.org/drawingml/2006/main" w="0">
+          <a:ln w="0">
             <a:solidFill>
               <a:srgbClr val="000000">
                 <a:alpha val="0"/>
@@ -11444,29 +11444,29 @@
       <p:sp>
         <p:nvSpPr>
           <p:cNvPr id="2" name="kicker-7-marker">
-            <a:extLst xmlns:a="http://schemas.openxmlformats.org/drawingml/2006/main">
-              <a:ext uri="{FF2B5EF4-FFF2-40B4-BE49-F238E27FC236}">
-                <a16:creationId xmlns:a16="http://schemas.microsoft.com/office/drawing/2014/main" id="{12CAB686-902A-4454-8FB0-78686AA86CC9}"/>
-              </a:ext>
-            </a:extLst>
-          </p:cNvPr>
-          <p:cNvSpPr>
-            <a:spLocks xmlns:a="http://schemas.openxmlformats.org/drawingml/2006/main" noGrp="1"/>
-          </p:cNvSpPr>
-          <p:nvPr/>
-        </p:nvSpPr>
-        <p:spPr>
-          <a:xfrm xmlns:a="http://schemas.openxmlformats.org/drawingml/2006/main">
+            <a:extLst>
+              <a:ext uri="{FF2B5EF4-FFF2-40B4-BE49-F238E27FC236}">
+                <ns2:creationId id="{12CAB686-902A-4454-8FB0-78686AA86CC9}"/>
+              </a:ext>
+            </a:extLst>
+          </p:cNvPr>
+          <p:cNvSpPr>
+            <a:spLocks noGrp="1"/>
+          </p:cNvSpPr>
+          <p:nvPr/>
+        </p:nvSpPr>
+        <p:spPr>
+          <a:xfrm>
             <a:off x="609600" y="457200"/>
             <a:ext cx="95250" cy="95250"/>
           </a:xfrm>
-          <a:prstGeom xmlns:a="http://schemas.openxmlformats.org/drawingml/2006/main" prst="rect">
-            <a:avLst/>
-          </a:prstGeom>
-          <a:solidFill xmlns:a="http://schemas.openxmlformats.org/drawingml/2006/main">
+          <a:prstGeom prst="rect">
+            <a:avLst/>
+          </a:prstGeom>
+          <a:solidFill>
             <a:srgbClr val="B44B3F"/>
           </a:solidFill>
-          <a:ln xmlns:a="http://schemas.openxmlformats.org/drawingml/2006/main" w="0">
+          <a:ln w="0">
             <a:solidFill>
               <a:srgbClr val="000000">
                 <a:alpha val="0"/>
@@ -11479,43 +11479,43 @@
       <p:sp>
         <p:nvSpPr>
           <p:cNvPr id="3" name="kicker-7-label">
-            <a:extLst xmlns:a="http://schemas.openxmlformats.org/drawingml/2006/main">
-              <a:ext uri="{FF2B5EF4-FFF2-40B4-BE49-F238E27FC236}">
-                <a16:creationId xmlns:a16="http://schemas.microsoft.com/office/drawing/2014/main" id="{45ED504F-1179-470C-B533-3A1F62BE13DA}"/>
-              </a:ext>
-            </a:extLst>
-          </p:cNvPr>
-          <p:cNvSpPr>
-            <a:spLocks xmlns:a="http://schemas.openxmlformats.org/drawingml/2006/main" noGrp="1"/>
-          </p:cNvSpPr>
-          <p:nvPr/>
-        </p:nvSpPr>
-        <p:spPr>
-          <a:xfrm xmlns:a="http://schemas.openxmlformats.org/drawingml/2006/main">
+            <a:extLst>
+              <a:ext uri="{FF2B5EF4-FFF2-40B4-BE49-F238E27FC236}">
+                <ns2:creationId id="{45ED504F-1179-470C-B533-3A1F62BE13DA}"/>
+              </a:ext>
+            </a:extLst>
+          </p:cNvPr>
+          <p:cNvSpPr>
+            <a:spLocks noGrp="1"/>
+          </p:cNvSpPr>
+          <p:nvPr/>
+        </p:nvSpPr>
+        <p:spPr>
+          <a:xfrm>
             <a:off x="800100" y="371475"/>
             <a:ext cx="3429000" cy="266700"/>
           </a:xfrm>
-          <a:prstGeom xmlns:a="http://schemas.openxmlformats.org/drawingml/2006/main" prst="rect">
-            <a:avLst/>
-          </a:prstGeom>
-          <a:solidFill xmlns:a="http://schemas.openxmlformats.org/drawingml/2006/main">
-            <a:srgbClr val="000000">
-              <a:alpha val="0"/>
-            </a:srgbClr>
-          </a:solidFill>
-          <a:ln xmlns:a="http://schemas.openxmlformats.org/drawingml/2006/main" w="0">
-            <a:solidFill>
-              <a:srgbClr val="000000">
-                <a:alpha val="0"/>
-              </a:srgbClr>
-            </a:solidFill>
-            <a:prstDash val="solid"/>
-          </a:ln>
-        </p:spPr>
-        <p:txBody>
-          <a:bodyPr xmlns:a="http://schemas.openxmlformats.org/drawingml/2006/main" lIns="0" tIns="0" rIns="0" bIns="0" anchor="t"/>
-          <a:lstStyle xmlns:a="http://schemas.openxmlformats.org/drawingml/2006/main"/>
-          <a:p xmlns:a="http://schemas.openxmlformats.org/drawingml/2006/main">
+          <a:prstGeom prst="rect">
+            <a:avLst/>
+          </a:prstGeom>
+          <a:solidFill>
+            <a:srgbClr val="000000">
+              <a:alpha val="0"/>
+            </a:srgbClr>
+          </a:solidFill>
+          <a:ln w="0">
+            <a:solidFill>
+              <a:srgbClr val="000000">
+                <a:alpha val="0"/>
+              </a:srgbClr>
+            </a:solidFill>
+            <a:prstDash val="solid"/>
+          </a:ln>
+        </p:spPr>
+        <p:txBody>
+          <a:bodyPr lIns="0" tIns="0" rIns="0" bIns="0" anchor="t"/>
+          <a:lstStyle/>
+          <a:p>
             <a:pPr algn="l">
               <a:defRPr sz="1050" b="1">
                 <a:solidFill>
@@ -11543,43 +11543,43 @@
       <p:sp>
         <p:nvSpPr>
           <p:cNvPr id="4" name="">
-            <a:extLst xmlns:a="http://schemas.openxmlformats.org/drawingml/2006/main">
-              <a:ext uri="{FF2B5EF4-FFF2-40B4-BE49-F238E27FC236}">
-                <a16:creationId xmlns:a16="http://schemas.microsoft.com/office/drawing/2014/main" id="{15376E94-D870-4F6B-A18B-B8ECD291FB60}"/>
-              </a:ext>
-            </a:extLst>
-          </p:cNvPr>
-          <p:cNvSpPr>
-            <a:spLocks xmlns:a="http://schemas.openxmlformats.org/drawingml/2006/main" noGrp="1"/>
-          </p:cNvSpPr>
-          <p:nvPr/>
-        </p:nvSpPr>
-        <p:spPr>
-          <a:xfrm xmlns:a="http://schemas.openxmlformats.org/drawingml/2006/main">
+            <a:extLst>
+              <a:ext uri="{FF2B5EF4-FFF2-40B4-BE49-F238E27FC236}">
+                <ns2:creationId id="{15376E94-D870-4F6B-A18B-B8ECD291FB60}"/>
+              </a:ext>
+            </a:extLst>
+          </p:cNvPr>
+          <p:cNvSpPr>
+            <a:spLocks noGrp="1"/>
+          </p:cNvSpPr>
+          <p:nvPr/>
+        </p:nvSpPr>
+        <p:spPr>
+          <a:xfrm>
             <a:off x="609600" y="781050"/>
             <a:ext cx="8096250" cy="914400"/>
           </a:xfrm>
-          <a:prstGeom xmlns:a="http://schemas.openxmlformats.org/drawingml/2006/main" prst="rect">
-            <a:avLst/>
-          </a:prstGeom>
-          <a:solidFill xmlns:a="http://schemas.openxmlformats.org/drawingml/2006/main">
-            <a:srgbClr val="000000">
-              <a:alpha val="0"/>
-            </a:srgbClr>
-          </a:solidFill>
-          <a:ln xmlns:a="http://schemas.openxmlformats.org/drawingml/2006/main" w="0">
-            <a:solidFill>
-              <a:srgbClr val="000000">
-                <a:alpha val="0"/>
-              </a:srgbClr>
-            </a:solidFill>
-            <a:prstDash val="solid"/>
-          </a:ln>
-        </p:spPr>
-        <p:txBody>
-          <a:bodyPr xmlns:a="http://schemas.openxmlformats.org/drawingml/2006/main" lIns="0" tIns="0" rIns="0" bIns="0" anchor="t"/>
-          <a:lstStyle xmlns:a="http://schemas.openxmlformats.org/drawingml/2006/main"/>
-          <a:p xmlns:a="http://schemas.openxmlformats.org/drawingml/2006/main">
+          <a:prstGeom prst="rect">
+            <a:avLst/>
+          </a:prstGeom>
+          <a:solidFill>
+            <a:srgbClr val="000000">
+              <a:alpha val="0"/>
+            </a:srgbClr>
+          </a:solidFill>
+          <a:ln w="0">
+            <a:solidFill>
+              <a:srgbClr val="000000">
+                <a:alpha val="0"/>
+              </a:srgbClr>
+            </a:solidFill>
+            <a:prstDash val="solid"/>
+          </a:ln>
+        </p:spPr>
+        <p:txBody>
+          <a:bodyPr lIns="0" tIns="0" rIns="0" bIns="0" anchor="t"/>
+          <a:lstStyle/>
+          <a:p>
             <a:pPr algn="l">
               <a:defRPr sz="2550" b="1">
                 <a:solidFill>
@@ -11607,43 +11607,43 @@
       <p:sp>
         <p:nvSpPr>
           <p:cNvPr id="5" name="">
-            <a:extLst xmlns:a="http://schemas.openxmlformats.org/drawingml/2006/main">
-              <a:ext uri="{FF2B5EF4-FFF2-40B4-BE49-F238E27FC236}">
-                <a16:creationId xmlns:a16="http://schemas.microsoft.com/office/drawing/2014/main" id="{10AA0D0B-D126-479A-B386-F2DA55005F09}"/>
-              </a:ext>
-            </a:extLst>
-          </p:cNvPr>
-          <p:cNvSpPr>
-            <a:spLocks xmlns:a="http://schemas.openxmlformats.org/drawingml/2006/main" noGrp="1"/>
-          </p:cNvSpPr>
-          <p:nvPr/>
-        </p:nvSpPr>
-        <p:spPr>
-          <a:xfrm xmlns:a="http://schemas.openxmlformats.org/drawingml/2006/main">
+            <a:extLst>
+              <a:ext uri="{FF2B5EF4-FFF2-40B4-BE49-F238E27FC236}">
+                <ns2:creationId id="{10AA0D0B-D126-479A-B386-F2DA55005F09}"/>
+              </a:ext>
+            </a:extLst>
+          </p:cNvPr>
+          <p:cNvSpPr>
+            <a:spLocks noGrp="1"/>
+          </p:cNvSpPr>
+          <p:nvPr/>
+        </p:nvSpPr>
+        <p:spPr>
+          <a:xfrm>
             <a:off x="609600" y="1676400"/>
             <a:ext cx="7429500" cy="381000"/>
           </a:xfrm>
-          <a:prstGeom xmlns:a="http://schemas.openxmlformats.org/drawingml/2006/main" prst="rect">
-            <a:avLst/>
-          </a:prstGeom>
-          <a:solidFill xmlns:a="http://schemas.openxmlformats.org/drawingml/2006/main">
-            <a:srgbClr val="000000">
-              <a:alpha val="0"/>
-            </a:srgbClr>
-          </a:solidFill>
-          <a:ln xmlns:a="http://schemas.openxmlformats.org/drawingml/2006/main" w="0">
-            <a:solidFill>
-              <a:srgbClr val="000000">
-                <a:alpha val="0"/>
-              </a:srgbClr>
-            </a:solidFill>
-            <a:prstDash val="solid"/>
-          </a:ln>
-        </p:spPr>
-        <p:txBody>
-          <a:bodyPr xmlns:a="http://schemas.openxmlformats.org/drawingml/2006/main" lIns="0" tIns="0" rIns="0" bIns="0" anchor="t"/>
-          <a:lstStyle xmlns:a="http://schemas.openxmlformats.org/drawingml/2006/main"/>
-          <a:p xmlns:a="http://schemas.openxmlformats.org/drawingml/2006/main">
+          <a:prstGeom prst="rect">
+            <a:avLst/>
+          </a:prstGeom>
+          <a:solidFill>
+            <a:srgbClr val="000000">
+              <a:alpha val="0"/>
+            </a:srgbClr>
+          </a:solidFill>
+          <a:ln w="0">
+            <a:solidFill>
+              <a:srgbClr val="000000">
+                <a:alpha val="0"/>
+              </a:srgbClr>
+            </a:solidFill>
+            <a:prstDash val="solid"/>
+          </a:ln>
+        </p:spPr>
+        <p:txBody>
+          <a:bodyPr lIns="0" tIns="0" rIns="0" bIns="0" anchor="t"/>
+          <a:lstStyle/>
+          <a:p>
             <a:pPr algn="l">
               <a:defRPr sz="1125" b="0">
                 <a:solidFill>
@@ -11671,29 +11671,29 @@
       <p:sp>
         <p:nvSpPr>
           <p:cNvPr id="6" name="">
-            <a:extLst xmlns:a="http://schemas.openxmlformats.org/drawingml/2006/main">
-              <a:ext uri="{FF2B5EF4-FFF2-40B4-BE49-F238E27FC236}">
-                <a16:creationId xmlns:a16="http://schemas.microsoft.com/office/drawing/2014/main" id="{4358894D-7919-4E15-B7CC-AD81017B5DC9}"/>
-              </a:ext>
-            </a:extLst>
-          </p:cNvPr>
-          <p:cNvSpPr>
-            <a:spLocks xmlns:a="http://schemas.openxmlformats.org/drawingml/2006/main" noGrp="1"/>
-          </p:cNvSpPr>
-          <p:nvPr/>
-        </p:nvSpPr>
-        <p:spPr>
-          <a:xfrm xmlns:a="http://schemas.openxmlformats.org/drawingml/2006/main">
+            <a:extLst>
+              <a:ext uri="{FF2B5EF4-FFF2-40B4-BE49-F238E27FC236}">
+                <ns2:creationId id="{4358894D-7919-4E15-B7CC-AD81017B5DC9}"/>
+              </a:ext>
+            </a:extLst>
+          </p:cNvPr>
+          <p:cNvSpPr>
+            <a:spLocks noGrp="1"/>
+          </p:cNvSpPr>
+          <p:nvPr/>
+        </p:nvSpPr>
+        <p:spPr>
+          <a:xfrm>
             <a:off x="5619750" y="2228850"/>
             <a:ext cx="4953000" cy="3143250"/>
           </a:xfrm>
-          <a:prstGeom xmlns:a="http://schemas.openxmlformats.org/drawingml/2006/main" prst="rect">
-            <a:avLst/>
-          </a:prstGeom>
-          <a:solidFill xmlns:a="http://schemas.openxmlformats.org/drawingml/2006/main">
+          <a:prstGeom prst="rect">
+            <a:avLst/>
+          </a:prstGeom>
+          <a:solidFill>
             <a:srgbClr val="FFFDF8"/>
           </a:solidFill>
-          <a:ln xmlns:a="http://schemas.openxmlformats.org/drawingml/2006/main" w="9525">
+          <a:ln w="9525">
             <a:solidFill>
               <a:srgbClr val="D9CDBB"/>
             </a:solidFill>
@@ -11705,20 +11705,20 @@
         <p:nvPicPr>
           <p:cNvPr id="7" name=""/>
           <p:cNvPicPr>
-            <a:picLocks xmlns:a="http://schemas.openxmlformats.org/drawingml/2006/main" noChangeAspect="1"/>
+            <a:picLocks noChangeAspect="1"/>
           </p:cNvPicPr>
           <p:nvPr/>
         </p:nvPicPr>
         <p:blipFill>
-          <a:blip xmlns:r="http://schemas.openxmlformats.org/officeDocument/2006/relationships" xmlns:a="http://schemas.openxmlformats.org/drawingml/2006/main" r:embed="R0afd59ef918341dd"/>
-          <a:stretch xmlns:a="http://schemas.openxmlformats.org/drawingml/2006/main"/>
+          <a:blip r:embed="R0afd59ef918341dd"/>
+          <a:stretch/>
         </p:blipFill>
         <p:spPr>
-          <a:xfrm xmlns:a="http://schemas.openxmlformats.org/drawingml/2006/main">
+          <a:xfrm>
             <a:off x="5715000" y="2990890"/>
             <a:ext cx="4762500" cy="1619169"/>
           </a:xfrm>
-          <a:prstGeom xmlns:a="http://schemas.openxmlformats.org/drawingml/2006/main" prst="rect">
+          <a:prstGeom prst="rect">
             <a:avLst/>
           </a:prstGeom>
         </p:spPr>
@@ -11726,43 +11726,43 @@
       <p:sp>
         <p:nvSpPr>
           <p:cNvPr id="8" name="">
-            <a:extLst xmlns:a="http://schemas.openxmlformats.org/drawingml/2006/main">
-              <a:ext uri="{FF2B5EF4-FFF2-40B4-BE49-F238E27FC236}">
-                <a16:creationId xmlns:a16="http://schemas.microsoft.com/office/drawing/2014/main" id="{41E5D622-B079-4A0F-B0EB-93912C8F51FD}"/>
-              </a:ext>
-            </a:extLst>
-          </p:cNvPr>
-          <p:cNvSpPr>
-            <a:spLocks xmlns:a="http://schemas.openxmlformats.org/drawingml/2006/main" noGrp="1"/>
-          </p:cNvSpPr>
-          <p:nvPr/>
-        </p:nvSpPr>
-        <p:spPr>
-          <a:xfrm xmlns:a="http://schemas.openxmlformats.org/drawingml/2006/main">
+            <a:extLst>
+              <a:ext uri="{FF2B5EF4-FFF2-40B4-BE49-F238E27FC236}">
+                <ns2:creationId id="{41E5D622-B079-4A0F-B0EB-93912C8F51FD}"/>
+              </a:ext>
+            </a:extLst>
+          </p:cNvPr>
+          <p:cNvSpPr>
+            <a:spLocks noGrp="1"/>
+          </p:cNvSpPr>
+          <p:nvPr/>
+        </p:nvSpPr>
+        <p:spPr>
+          <a:xfrm>
             <a:off x="5715000" y="5353050"/>
             <a:ext cx="4762500" cy="228600"/>
           </a:xfrm>
-          <a:prstGeom xmlns:a="http://schemas.openxmlformats.org/drawingml/2006/main" prst="rect">
-            <a:avLst/>
-          </a:prstGeom>
-          <a:solidFill xmlns:a="http://schemas.openxmlformats.org/drawingml/2006/main">
-            <a:srgbClr val="000000">
-              <a:alpha val="0"/>
-            </a:srgbClr>
-          </a:solidFill>
-          <a:ln xmlns:a="http://schemas.openxmlformats.org/drawingml/2006/main" w="0">
-            <a:solidFill>
-              <a:srgbClr val="000000">
-                <a:alpha val="0"/>
-              </a:srgbClr>
-            </a:solidFill>
-            <a:prstDash val="solid"/>
-          </a:ln>
-        </p:spPr>
-        <p:txBody>
-          <a:bodyPr xmlns:a="http://schemas.openxmlformats.org/drawingml/2006/main" lIns="0" tIns="0" rIns="0" bIns="0" anchor="t"/>
-          <a:lstStyle xmlns:a="http://schemas.openxmlformats.org/drawingml/2006/main"/>
-          <a:p xmlns:a="http://schemas.openxmlformats.org/drawingml/2006/main">
+          <a:prstGeom prst="rect">
+            <a:avLst/>
+          </a:prstGeom>
+          <a:solidFill>
+            <a:srgbClr val="000000">
+              <a:alpha val="0"/>
+            </a:srgbClr>
+          </a:solidFill>
+          <a:ln w="0">
+            <a:solidFill>
+              <a:srgbClr val="000000">
+                <a:alpha val="0"/>
+              </a:srgbClr>
+            </a:solidFill>
+            <a:prstDash val="solid"/>
+          </a:ln>
+        </p:spPr>
+        <p:txBody>
+          <a:bodyPr lIns="0" tIns="0" rIns="0" bIns="0" anchor="t"/>
+          <a:lstStyle/>
+          <a:p>
             <a:pPr algn="ctr">
               <a:defRPr sz="825" b="0">
                 <a:solidFill>
@@ -11782,7 +11782,7 @@
                 <a:ea typeface="Microsoft YaHei"/>
                 <a:cs typeface="Microsoft YaHei"/>
               </a:rPr>
-              <a:t>Social media aesthetic items</a:t>
+              <a:t>Social media aesthetic items (alpha=.76)</a:t>
             </a:r>
           </a:p>
         </p:txBody>
@@ -11790,43 +11790,43 @@
       <p:sp>
         <p:nvSpPr>
           <p:cNvPr id="9" name="">
-            <a:extLst xmlns:a="http://schemas.openxmlformats.org/drawingml/2006/main">
-              <a:ext uri="{FF2B5EF4-FFF2-40B4-BE49-F238E27FC236}">
-                <a16:creationId xmlns:a16="http://schemas.microsoft.com/office/drawing/2014/main" id="{39C43ED5-267C-406C-ADE6-FC8012073AC2}"/>
-              </a:ext>
-            </a:extLst>
-          </p:cNvPr>
-          <p:cNvSpPr>
-            <a:spLocks xmlns:a="http://schemas.openxmlformats.org/drawingml/2006/main" noGrp="1"/>
-          </p:cNvSpPr>
-          <p:nvPr/>
-        </p:nvSpPr>
-        <p:spPr>
-          <a:xfrm xmlns:a="http://schemas.openxmlformats.org/drawingml/2006/main">
+            <a:extLst>
+              <a:ext uri="{FF2B5EF4-FFF2-40B4-BE49-F238E27FC236}">
+                <ns2:creationId id="{39C43ED5-267C-406C-ADE6-FC8012073AC2}"/>
+              </a:ext>
+            </a:extLst>
+          </p:cNvPr>
+          <p:cNvSpPr>
+            <a:spLocks noGrp="1"/>
+          </p:cNvSpPr>
+          <p:nvPr/>
+        </p:nvSpPr>
+        <p:spPr>
+          <a:xfrm>
             <a:off x="819150" y="2476500"/>
             <a:ext cx="2619375" cy="609600"/>
           </a:xfrm>
-          <a:prstGeom xmlns:a="http://schemas.openxmlformats.org/drawingml/2006/main" prst="rect">
-            <a:avLst/>
-          </a:prstGeom>
-          <a:solidFill xmlns:a="http://schemas.openxmlformats.org/drawingml/2006/main">
-            <a:srgbClr val="000000">
-              <a:alpha val="0"/>
-            </a:srgbClr>
-          </a:solidFill>
-          <a:ln xmlns:a="http://schemas.openxmlformats.org/drawingml/2006/main" w="0">
-            <a:solidFill>
-              <a:srgbClr val="000000">
-                <a:alpha val="0"/>
-              </a:srgbClr>
-            </a:solidFill>
-            <a:prstDash val="solid"/>
-          </a:ln>
-        </p:spPr>
-        <p:txBody>
-          <a:bodyPr xmlns:a="http://schemas.openxmlformats.org/drawingml/2006/main" lIns="0" tIns="0" rIns="0" bIns="0" anchor="t"/>
-          <a:lstStyle xmlns:a="http://schemas.openxmlformats.org/drawingml/2006/main"/>
-          <a:p xmlns:a="http://schemas.openxmlformats.org/drawingml/2006/main">
+          <a:prstGeom prst="rect">
+            <a:avLst/>
+          </a:prstGeom>
+          <a:solidFill>
+            <a:srgbClr val="000000">
+              <a:alpha val="0"/>
+            </a:srgbClr>
+          </a:solidFill>
+          <a:ln w="0">
+            <a:solidFill>
+              <a:srgbClr val="000000">
+                <a:alpha val="0"/>
+              </a:srgbClr>
+            </a:solidFill>
+            <a:prstDash val="solid"/>
+          </a:ln>
+        </p:spPr>
+        <p:txBody>
+          <a:bodyPr lIns="0" tIns="0" rIns="0" bIns="0" anchor="t"/>
+          <a:lstStyle/>
+          <a:p>
             <a:pPr algn="l">
               <a:defRPr sz="2700" b="1">
                 <a:solidFill>
@@ -11854,43 +11854,43 @@
       <p:sp>
         <p:nvSpPr>
           <p:cNvPr id="10" name="">
-            <a:extLst xmlns:a="http://schemas.openxmlformats.org/drawingml/2006/main">
-              <a:ext uri="{FF2B5EF4-FFF2-40B4-BE49-F238E27FC236}">
-                <a16:creationId xmlns:a16="http://schemas.microsoft.com/office/drawing/2014/main" id="{45755DC1-A03A-4722-9816-7C715F76B072}"/>
-              </a:ext>
-            </a:extLst>
-          </p:cNvPr>
-          <p:cNvSpPr>
-            <a:spLocks xmlns:a="http://schemas.openxmlformats.org/drawingml/2006/main" noGrp="1"/>
-          </p:cNvSpPr>
-          <p:nvPr/>
-        </p:nvSpPr>
-        <p:spPr>
-          <a:xfrm xmlns:a="http://schemas.openxmlformats.org/drawingml/2006/main">
+            <a:extLst>
+              <a:ext uri="{FF2B5EF4-FFF2-40B4-BE49-F238E27FC236}">
+                <ns2:creationId id="{45755DC1-A03A-4722-9816-7C715F76B072}"/>
+              </a:ext>
+            </a:extLst>
+          </p:cNvPr>
+          <p:cNvSpPr>
+            <a:spLocks noGrp="1"/>
+          </p:cNvSpPr>
+          <p:nvPr/>
+        </p:nvSpPr>
+        <p:spPr>
+          <a:xfrm>
             <a:off x="819150" y="3028950"/>
             <a:ext cx="2619375" cy="419100"/>
           </a:xfrm>
-          <a:prstGeom xmlns:a="http://schemas.openxmlformats.org/drawingml/2006/main" prst="rect">
-            <a:avLst/>
-          </a:prstGeom>
-          <a:solidFill xmlns:a="http://schemas.openxmlformats.org/drawingml/2006/main">
-            <a:srgbClr val="000000">
-              <a:alpha val="0"/>
-            </a:srgbClr>
-          </a:solidFill>
-          <a:ln xmlns:a="http://schemas.openxmlformats.org/drawingml/2006/main" w="0">
-            <a:solidFill>
-              <a:srgbClr val="000000">
-                <a:alpha val="0"/>
-              </a:srgbClr>
-            </a:solidFill>
-            <a:prstDash val="solid"/>
-          </a:ln>
-        </p:spPr>
-        <p:txBody>
-          <a:bodyPr xmlns:a="http://schemas.openxmlformats.org/drawingml/2006/main" lIns="0" tIns="0" rIns="0" bIns="0" anchor="t"/>
-          <a:lstStyle xmlns:a="http://schemas.openxmlformats.org/drawingml/2006/main"/>
-          <a:p xmlns:a="http://schemas.openxmlformats.org/drawingml/2006/main">
+          <a:prstGeom prst="rect">
+            <a:avLst/>
+          </a:prstGeom>
+          <a:solidFill>
+            <a:srgbClr val="000000">
+              <a:alpha val="0"/>
+            </a:srgbClr>
+          </a:solidFill>
+          <a:ln w="0">
+            <a:solidFill>
+              <a:srgbClr val="000000">
+                <a:alpha val="0"/>
+              </a:srgbClr>
+            </a:solidFill>
+            <a:prstDash val="solid"/>
+          </a:ln>
+        </p:spPr>
+        <p:txBody>
+          <a:bodyPr lIns="0" tIns="0" rIns="0" bIns="0" anchor="t"/>
+          <a:lstStyle/>
+          <a:p>
             <a:pPr algn="l">
               <a:defRPr sz="975" b="0">
                 <a:solidFill>
@@ -11918,43 +11918,43 @@
       <p:sp>
         <p:nvSpPr>
           <p:cNvPr id="11" name="">
-            <a:extLst xmlns:a="http://schemas.openxmlformats.org/drawingml/2006/main">
-              <a:ext uri="{FF2B5EF4-FFF2-40B4-BE49-F238E27FC236}">
-                <a16:creationId xmlns:a16="http://schemas.microsoft.com/office/drawing/2014/main" id="{B839BE16-5849-4F02-A03F-F65EA110A1A3}"/>
-              </a:ext>
-            </a:extLst>
-          </p:cNvPr>
-          <p:cNvSpPr>
-            <a:spLocks xmlns:a="http://schemas.openxmlformats.org/drawingml/2006/main" noGrp="1"/>
-          </p:cNvSpPr>
-          <p:nvPr/>
-        </p:nvSpPr>
-        <p:spPr>
-          <a:xfrm xmlns:a="http://schemas.openxmlformats.org/drawingml/2006/main">
+            <a:extLst>
+              <a:ext uri="{FF2B5EF4-FFF2-40B4-BE49-F238E27FC236}">
+                <ns2:creationId id="{B839BE16-5849-4F02-A03F-F65EA110A1A3}"/>
+              </a:ext>
+            </a:extLst>
+          </p:cNvPr>
+          <p:cNvSpPr>
+            <a:spLocks noGrp="1"/>
+          </p:cNvSpPr>
+          <p:nvPr/>
+        </p:nvSpPr>
+        <p:spPr>
+          <a:xfrm>
             <a:off x="819150" y="3676650"/>
             <a:ext cx="2857500" cy="609600"/>
           </a:xfrm>
-          <a:prstGeom xmlns:a="http://schemas.openxmlformats.org/drawingml/2006/main" prst="rect">
-            <a:avLst/>
-          </a:prstGeom>
-          <a:solidFill xmlns:a="http://schemas.openxmlformats.org/drawingml/2006/main">
-            <a:srgbClr val="000000">
-              <a:alpha val="0"/>
-            </a:srgbClr>
-          </a:solidFill>
-          <a:ln xmlns:a="http://schemas.openxmlformats.org/drawingml/2006/main" w="0">
-            <a:solidFill>
-              <a:srgbClr val="000000">
-                <a:alpha val="0"/>
-              </a:srgbClr>
-            </a:solidFill>
-            <a:prstDash val="solid"/>
-          </a:ln>
-        </p:spPr>
-        <p:txBody>
-          <a:bodyPr xmlns:a="http://schemas.openxmlformats.org/drawingml/2006/main" lIns="0" tIns="0" rIns="0" bIns="0" anchor="t"/>
-          <a:lstStyle xmlns:a="http://schemas.openxmlformats.org/drawingml/2006/main"/>
-          <a:p xmlns:a="http://schemas.openxmlformats.org/drawingml/2006/main">
+          <a:prstGeom prst="rect">
+            <a:avLst/>
+          </a:prstGeom>
+          <a:solidFill>
+            <a:srgbClr val="000000">
+              <a:alpha val="0"/>
+            </a:srgbClr>
+          </a:solidFill>
+          <a:ln w="0">
+            <a:solidFill>
+              <a:srgbClr val="000000">
+                <a:alpha val="0"/>
+              </a:srgbClr>
+            </a:solidFill>
+            <a:prstDash val="solid"/>
+          </a:ln>
+        </p:spPr>
+        <p:txBody>
+          <a:bodyPr lIns="0" tIns="0" rIns="0" bIns="0" anchor="t"/>
+          <a:lstStyle/>
+          <a:p>
             <a:pPr algn="l">
               <a:defRPr sz="2700" b="1">
                 <a:solidFill>
@@ -11982,43 +11982,43 @@
       <p:sp>
         <p:nvSpPr>
           <p:cNvPr id="12" name="">
-            <a:extLst xmlns:a="http://schemas.openxmlformats.org/drawingml/2006/main">
-              <a:ext uri="{FF2B5EF4-FFF2-40B4-BE49-F238E27FC236}">
-                <a16:creationId xmlns:a16="http://schemas.microsoft.com/office/drawing/2014/main" id="{DCC49218-0D0B-41E8-8372-752FA579321C}"/>
-              </a:ext>
-            </a:extLst>
-          </p:cNvPr>
-          <p:cNvSpPr>
-            <a:spLocks xmlns:a="http://schemas.openxmlformats.org/drawingml/2006/main" noGrp="1"/>
-          </p:cNvSpPr>
-          <p:nvPr/>
-        </p:nvSpPr>
-        <p:spPr>
-          <a:xfrm xmlns:a="http://schemas.openxmlformats.org/drawingml/2006/main">
+            <a:extLst>
+              <a:ext uri="{FF2B5EF4-FFF2-40B4-BE49-F238E27FC236}">
+                <ns2:creationId id="{DCC49218-0D0B-41E8-8372-752FA579321C}"/>
+              </a:ext>
+            </a:extLst>
+          </p:cNvPr>
+          <p:cNvSpPr>
+            <a:spLocks noGrp="1"/>
+          </p:cNvSpPr>
+          <p:nvPr/>
+        </p:nvSpPr>
+        <p:spPr>
+          <a:xfrm>
             <a:off x="819150" y="4229100"/>
             <a:ext cx="2857500" cy="419100"/>
           </a:xfrm>
-          <a:prstGeom xmlns:a="http://schemas.openxmlformats.org/drawingml/2006/main" prst="rect">
-            <a:avLst/>
-          </a:prstGeom>
-          <a:solidFill xmlns:a="http://schemas.openxmlformats.org/drawingml/2006/main">
-            <a:srgbClr val="000000">
-              <a:alpha val="0"/>
-            </a:srgbClr>
-          </a:solidFill>
-          <a:ln xmlns:a="http://schemas.openxmlformats.org/drawingml/2006/main" w="0">
-            <a:solidFill>
-              <a:srgbClr val="000000">
-                <a:alpha val="0"/>
-              </a:srgbClr>
-            </a:solidFill>
-            <a:prstDash val="solid"/>
-          </a:ln>
-        </p:spPr>
-        <p:txBody>
-          <a:bodyPr xmlns:a="http://schemas.openxmlformats.org/drawingml/2006/main" lIns="0" tIns="0" rIns="0" bIns="0" anchor="t"/>
-          <a:lstStyle xmlns:a="http://schemas.openxmlformats.org/drawingml/2006/main"/>
-          <a:p xmlns:a="http://schemas.openxmlformats.org/drawingml/2006/main">
+          <a:prstGeom prst="rect">
+            <a:avLst/>
+          </a:prstGeom>
+          <a:solidFill>
+            <a:srgbClr val="000000">
+              <a:alpha val="0"/>
+            </a:srgbClr>
+          </a:solidFill>
+          <a:ln w="0">
+            <a:solidFill>
+              <a:srgbClr val="000000">
+                <a:alpha val="0"/>
+              </a:srgbClr>
+            </a:solidFill>
+            <a:prstDash val="solid"/>
+          </a:ln>
+        </p:spPr>
+        <p:txBody>
+          <a:bodyPr lIns="0" tIns="0" rIns="0" bIns="0" anchor="t"/>
+          <a:lstStyle/>
+          <a:p>
             <a:pPr algn="l">
               <a:defRPr sz="975" b="0">
                 <a:solidFill>
@@ -12046,43 +12046,43 @@
       <p:sp>
         <p:nvSpPr>
           <p:cNvPr id="13" name="">
-            <a:extLst xmlns:a="http://schemas.openxmlformats.org/drawingml/2006/main">
-              <a:ext uri="{FF2B5EF4-FFF2-40B4-BE49-F238E27FC236}">
-                <a16:creationId xmlns:a16="http://schemas.microsoft.com/office/drawing/2014/main" id="{2498236A-D1F7-4C4C-88E5-A168E015870E}"/>
-              </a:ext>
-            </a:extLst>
-          </p:cNvPr>
-          <p:cNvSpPr>
-            <a:spLocks xmlns:a="http://schemas.openxmlformats.org/drawingml/2006/main" noGrp="1"/>
-          </p:cNvSpPr>
-          <p:nvPr/>
-        </p:nvSpPr>
-        <p:spPr>
-          <a:xfrm xmlns:a="http://schemas.openxmlformats.org/drawingml/2006/main">
+            <a:extLst>
+              <a:ext uri="{FF2B5EF4-FFF2-40B4-BE49-F238E27FC236}">
+                <ns2:creationId id="{2498236A-D1F7-4C4C-88E5-A168E015870E}"/>
+              </a:ext>
+            </a:extLst>
+          </p:cNvPr>
+          <p:cNvSpPr>
+            <a:spLocks noGrp="1"/>
+          </p:cNvSpPr>
+          <p:nvPr/>
+        </p:nvSpPr>
+        <p:spPr>
+          <a:xfrm>
             <a:off x="819150" y="4876800"/>
             <a:ext cx="2952750" cy="609600"/>
           </a:xfrm>
-          <a:prstGeom xmlns:a="http://schemas.openxmlformats.org/drawingml/2006/main" prst="rect">
-            <a:avLst/>
-          </a:prstGeom>
-          <a:solidFill xmlns:a="http://schemas.openxmlformats.org/drawingml/2006/main">
-            <a:srgbClr val="000000">
-              <a:alpha val="0"/>
-            </a:srgbClr>
-          </a:solidFill>
-          <a:ln xmlns:a="http://schemas.openxmlformats.org/drawingml/2006/main" w="0">
-            <a:solidFill>
-              <a:srgbClr val="000000">
-                <a:alpha val="0"/>
-              </a:srgbClr>
-            </a:solidFill>
-            <a:prstDash val="solid"/>
-          </a:ln>
-        </p:spPr>
-        <p:txBody>
-          <a:bodyPr xmlns:a="http://schemas.openxmlformats.org/drawingml/2006/main" lIns="0" tIns="0" rIns="0" bIns="0" anchor="t"/>
-          <a:lstStyle xmlns:a="http://schemas.openxmlformats.org/drawingml/2006/main"/>
-          <a:p xmlns:a="http://schemas.openxmlformats.org/drawingml/2006/main">
+          <a:prstGeom prst="rect">
+            <a:avLst/>
+          </a:prstGeom>
+          <a:solidFill>
+            <a:srgbClr val="000000">
+              <a:alpha val="0"/>
+            </a:srgbClr>
+          </a:solidFill>
+          <a:ln w="0">
+            <a:solidFill>
+              <a:srgbClr val="000000">
+                <a:alpha val="0"/>
+              </a:srgbClr>
+            </a:solidFill>
+            <a:prstDash val="solid"/>
+          </a:ln>
+        </p:spPr>
+        <p:txBody>
+          <a:bodyPr lIns="0" tIns="0" rIns="0" bIns="0" anchor="t"/>
+          <a:lstStyle/>
+          <a:p>
             <a:pPr algn="l">
               <a:defRPr sz="2700" b="1">
                 <a:solidFill>
@@ -12110,43 +12110,43 @@
       <p:sp>
         <p:nvSpPr>
           <p:cNvPr id="14" name="">
-            <a:extLst xmlns:a="http://schemas.openxmlformats.org/drawingml/2006/main">
-              <a:ext uri="{FF2B5EF4-FFF2-40B4-BE49-F238E27FC236}">
-                <a16:creationId xmlns:a16="http://schemas.microsoft.com/office/drawing/2014/main" id="{61EA7575-C683-461E-9A90-0B4723964BDC}"/>
-              </a:ext>
-            </a:extLst>
-          </p:cNvPr>
-          <p:cNvSpPr>
-            <a:spLocks xmlns:a="http://schemas.openxmlformats.org/drawingml/2006/main" noGrp="1"/>
-          </p:cNvSpPr>
-          <p:nvPr/>
-        </p:nvSpPr>
-        <p:spPr>
-          <a:xfrm xmlns:a="http://schemas.openxmlformats.org/drawingml/2006/main">
+            <a:extLst>
+              <a:ext uri="{FF2B5EF4-FFF2-40B4-BE49-F238E27FC236}">
+                <ns2:creationId id="{61EA7575-C683-461E-9A90-0B4723964BDC}"/>
+              </a:ext>
+            </a:extLst>
+          </p:cNvPr>
+          <p:cNvSpPr>
+            <a:spLocks noGrp="1"/>
+          </p:cNvSpPr>
+          <p:nvPr/>
+        </p:nvSpPr>
+        <p:spPr>
+          <a:xfrm>
             <a:off x="819150" y="5429250"/>
             <a:ext cx="2952750" cy="419100"/>
           </a:xfrm>
-          <a:prstGeom xmlns:a="http://schemas.openxmlformats.org/drawingml/2006/main" prst="rect">
-            <a:avLst/>
-          </a:prstGeom>
-          <a:solidFill xmlns:a="http://schemas.openxmlformats.org/drawingml/2006/main">
-            <a:srgbClr val="000000">
-              <a:alpha val="0"/>
-            </a:srgbClr>
-          </a:solidFill>
-          <a:ln xmlns:a="http://schemas.openxmlformats.org/drawingml/2006/main" w="0">
-            <a:solidFill>
-              <a:srgbClr val="000000">
-                <a:alpha val="0"/>
-              </a:srgbClr>
-            </a:solidFill>
-            <a:prstDash val="solid"/>
-          </a:ln>
-        </p:spPr>
-        <p:txBody>
-          <a:bodyPr xmlns:a="http://schemas.openxmlformats.org/drawingml/2006/main" lIns="0" tIns="0" rIns="0" bIns="0" anchor="t"/>
-          <a:lstStyle xmlns:a="http://schemas.openxmlformats.org/drawingml/2006/main"/>
-          <a:p xmlns:a="http://schemas.openxmlformats.org/drawingml/2006/main">
+          <a:prstGeom prst="rect">
+            <a:avLst/>
+          </a:prstGeom>
+          <a:solidFill>
+            <a:srgbClr val="000000">
+              <a:alpha val="0"/>
+            </a:srgbClr>
+          </a:solidFill>
+          <a:ln w="0">
+            <a:solidFill>
+              <a:srgbClr val="000000">
+                <a:alpha val="0"/>
+              </a:srgbClr>
+            </a:solidFill>
+            <a:prstDash val="solid"/>
+          </a:ln>
+        </p:spPr>
+        <p:txBody>
+          <a:bodyPr lIns="0" tIns="0" rIns="0" bIns="0" anchor="t"/>
+          <a:lstStyle/>
+          <a:p>
             <a:pPr algn="l">
               <a:defRPr sz="975" b="0">
                 <a:solidFill>
@@ -12174,29 +12174,29 @@
       <p:sp>
         <p:nvSpPr>
           <p:cNvPr id="15" name="">
-            <a:extLst xmlns:a="http://schemas.openxmlformats.org/drawingml/2006/main">
-              <a:ext uri="{FF2B5EF4-FFF2-40B4-BE49-F238E27FC236}">
-                <a16:creationId xmlns:a16="http://schemas.microsoft.com/office/drawing/2014/main" id="{F932C32D-7450-4FFE-8692-C858D39A91A2}"/>
-              </a:ext>
-            </a:extLst>
-          </p:cNvPr>
-          <p:cNvSpPr>
-            <a:spLocks xmlns:a="http://schemas.openxmlformats.org/drawingml/2006/main" noGrp="1"/>
-          </p:cNvSpPr>
-          <p:nvPr/>
-        </p:nvSpPr>
-        <p:spPr>
-          <a:xfrm xmlns:a="http://schemas.openxmlformats.org/drawingml/2006/main">
+            <a:extLst>
+              <a:ext uri="{FF2B5EF4-FFF2-40B4-BE49-F238E27FC236}">
+                <ns2:creationId id="{F932C32D-7450-4FFE-8692-C858D39A91A2}"/>
+              </a:ext>
+            </a:extLst>
+          </p:cNvPr>
+          <p:cNvSpPr>
+            <a:spLocks noGrp="1"/>
+          </p:cNvSpPr>
+          <p:nvPr/>
+        </p:nvSpPr>
+        <p:spPr>
+          <a:xfrm>
             <a:off x="609600" y="6334125"/>
             <a:ext cx="9810750" cy="9525"/>
           </a:xfrm>
-          <a:prstGeom xmlns:a="http://schemas.openxmlformats.org/drawingml/2006/main" prst="rect">
-            <a:avLst/>
-          </a:prstGeom>
-          <a:solidFill xmlns:a="http://schemas.openxmlformats.org/drawingml/2006/main">
+          <a:prstGeom prst="rect">
+            <a:avLst/>
+          </a:prstGeom>
+          <a:solidFill>
             <a:srgbClr val="E2D8C9"/>
           </a:solidFill>
-          <a:ln xmlns:a="http://schemas.openxmlformats.org/drawingml/2006/main" w="0">
+          <a:ln w="0">
             <a:solidFill>
               <a:srgbClr val="000000">
                 <a:alpha val="0"/>
@@ -12209,43 +12209,43 @@
       <p:sp>
         <p:nvSpPr>
           <p:cNvPr id="16" name="">
-            <a:extLst xmlns:a="http://schemas.openxmlformats.org/drawingml/2006/main">
-              <a:ext uri="{FF2B5EF4-FFF2-40B4-BE49-F238E27FC236}">
-                <a16:creationId xmlns:a16="http://schemas.microsoft.com/office/drawing/2014/main" id="{6B8A8C2A-94EE-4BD3-9122-A84736A4C0A4}"/>
-              </a:ext>
-            </a:extLst>
-          </p:cNvPr>
-          <p:cNvSpPr>
-            <a:spLocks xmlns:a="http://schemas.openxmlformats.org/drawingml/2006/main" noGrp="1"/>
-          </p:cNvSpPr>
-          <p:nvPr/>
-        </p:nvSpPr>
-        <p:spPr>
-          <a:xfrm xmlns:a="http://schemas.openxmlformats.org/drawingml/2006/main">
+            <a:extLst>
+              <a:ext uri="{FF2B5EF4-FFF2-40B4-BE49-F238E27FC236}">
+                <ns2:creationId id="{6B8A8C2A-94EE-4BD3-9122-A84736A4C0A4}"/>
+              </a:ext>
+            </a:extLst>
+          </p:cNvPr>
+          <p:cNvSpPr>
+            <a:spLocks noGrp="1"/>
+          </p:cNvSpPr>
+          <p:nvPr/>
+        </p:nvSpPr>
+        <p:spPr>
+          <a:xfrm>
             <a:off x="609600" y="6419850"/>
             <a:ext cx="7239000" cy="228600"/>
           </a:xfrm>
-          <a:prstGeom xmlns:a="http://schemas.openxmlformats.org/drawingml/2006/main" prst="rect">
-            <a:avLst/>
-          </a:prstGeom>
-          <a:solidFill xmlns:a="http://schemas.openxmlformats.org/drawingml/2006/main">
-            <a:srgbClr val="000000">
-              <a:alpha val="0"/>
-            </a:srgbClr>
-          </a:solidFill>
-          <a:ln xmlns:a="http://schemas.openxmlformats.org/drawingml/2006/main" w="0">
-            <a:solidFill>
-              <a:srgbClr val="000000">
-                <a:alpha val="0"/>
-              </a:srgbClr>
-            </a:solidFill>
-            <a:prstDash val="solid"/>
-          </a:ln>
-        </p:spPr>
-        <p:txBody>
-          <a:bodyPr xmlns:a="http://schemas.openxmlformats.org/drawingml/2006/main" lIns="0" tIns="0" rIns="0" bIns="0" anchor="t"/>
-          <a:lstStyle xmlns:a="http://schemas.openxmlformats.org/drawingml/2006/main"/>
-          <a:p xmlns:a="http://schemas.openxmlformats.org/drawingml/2006/main">
+          <a:prstGeom prst="rect">
+            <a:avLst/>
+          </a:prstGeom>
+          <a:solidFill>
+            <a:srgbClr val="000000">
+              <a:alpha val="0"/>
+            </a:srgbClr>
+          </a:solidFill>
+          <a:ln w="0">
+            <a:solidFill>
+              <a:srgbClr val="000000">
+                <a:alpha val="0"/>
+              </a:srgbClr>
+            </a:solidFill>
+            <a:prstDash val="solid"/>
+          </a:ln>
+        </p:spPr>
+        <p:txBody>
+          <a:bodyPr lIns="0" tIns="0" rIns="0" bIns="0" anchor="t"/>
+          <a:lstStyle/>
+          <a:p>
             <a:pPr algn="l">
               <a:defRPr sz="750" b="0">
                 <a:solidFill>
@@ -12265,7 +12265,7 @@
                 <a:ea typeface="Microsoft YaHei"/>
                 <a:cs typeface="Microsoft YaHei"/>
               </a:rPr>
-              <a:t>Survey items Q21-Q23 and avoidance reason table</a:t>
+              <a:t>Q21-Q23; media-avoidance rho=.31, p=.084</a:t>
             </a:r>
           </a:p>
         </p:txBody>
@@ -12273,43 +12273,43 @@
       <p:sp>
         <p:nvSpPr>
           <p:cNvPr id="17" name="">
-            <a:extLst xmlns:a="http://schemas.openxmlformats.org/drawingml/2006/main">
-              <a:ext uri="{FF2B5EF4-FFF2-40B4-BE49-F238E27FC236}">
-                <a16:creationId xmlns:a16="http://schemas.microsoft.com/office/drawing/2014/main" id="{2D5D07FD-B156-4469-8684-4D3715FBEAC0}"/>
-              </a:ext>
-            </a:extLst>
-          </p:cNvPr>
-          <p:cNvSpPr>
-            <a:spLocks xmlns:a="http://schemas.openxmlformats.org/drawingml/2006/main" noGrp="1"/>
-          </p:cNvSpPr>
-          <p:nvPr/>
-        </p:nvSpPr>
-        <p:spPr>
-          <a:xfrm xmlns:a="http://schemas.openxmlformats.org/drawingml/2006/main">
+            <a:extLst>
+              <a:ext uri="{FF2B5EF4-FFF2-40B4-BE49-F238E27FC236}">
+                <ns2:creationId id="{2D5D07FD-B156-4469-8684-4D3715FBEAC0}"/>
+              </a:ext>
+            </a:extLst>
+          </p:cNvPr>
+          <p:cNvSpPr>
+            <a:spLocks noGrp="1"/>
+          </p:cNvSpPr>
+          <p:nvPr/>
+        </p:nvSpPr>
+        <p:spPr>
+          <a:xfrm>
             <a:off x="10953750" y="6419850"/>
             <a:ext cx="628650" cy="228600"/>
           </a:xfrm>
-          <a:prstGeom xmlns:a="http://schemas.openxmlformats.org/drawingml/2006/main" prst="rect">
-            <a:avLst/>
-          </a:prstGeom>
-          <a:solidFill xmlns:a="http://schemas.openxmlformats.org/drawingml/2006/main">
-            <a:srgbClr val="000000">
-              <a:alpha val="0"/>
-            </a:srgbClr>
-          </a:solidFill>
-          <a:ln xmlns:a="http://schemas.openxmlformats.org/drawingml/2006/main" w="0">
-            <a:solidFill>
-              <a:srgbClr val="000000">
-                <a:alpha val="0"/>
-              </a:srgbClr>
-            </a:solidFill>
-            <a:prstDash val="solid"/>
-          </a:ln>
-        </p:spPr>
-        <p:txBody>
-          <a:bodyPr xmlns:a="http://schemas.openxmlformats.org/drawingml/2006/main" lIns="0" tIns="0" rIns="0" bIns="0" anchor="t"/>
-          <a:lstStyle xmlns:a="http://schemas.openxmlformats.org/drawingml/2006/main"/>
-          <a:p xmlns:a="http://schemas.openxmlformats.org/drawingml/2006/main">
+          <a:prstGeom prst="rect">
+            <a:avLst/>
+          </a:prstGeom>
+          <a:solidFill>
+            <a:srgbClr val="000000">
+              <a:alpha val="0"/>
+            </a:srgbClr>
+          </a:solidFill>
+          <a:ln w="0">
+            <a:solidFill>
+              <a:srgbClr val="000000">
+                <a:alpha val="0"/>
+              </a:srgbClr>
+            </a:solidFill>
+            <a:prstDash val="solid"/>
+          </a:ln>
+        </p:spPr>
+        <p:txBody>
+          <a:bodyPr lIns="0" tIns="0" rIns="0" bIns="0" anchor="t"/>
+          <a:lstStyle/>
+          <a:p>
             <a:pPr algn="r">
               <a:defRPr sz="900" b="1">
                 <a:solidFill>
@@ -12337,7 +12337,7 @@
     </p:spTree>
     <p:extLst>
       <p:ext uri="{BB962C8B-B14F-4D97-AF65-F5344CB8AC3E}">
-        <p14:creationId xmlns:p14="http://schemas.microsoft.com/office/powerpoint/2010/main" val="159572281"/>
+        <ns4:creationId val="159572281"/>
       </p:ext>
     </p:extLst>
   </p:cSld>
